--- a/slides.pptx
+++ b/slides.pptx
@@ -1,35 +1,203 @@
 
 <file path=ppt/presentation.xml><?xml version="1.0" encoding="utf-8"?>
-<p:presentation xmlns:a="http://schemas.openxmlformats.org/drawingml/2006/main" xmlns:p="http://schemas.openxmlformats.org/presentationml/2006/main" xmlns:r="http://schemas.openxmlformats.org/officeDocument/2006/relationships" xmlns:p14="http://schemas.microsoft.com/office/powerpoint/2010/main" xmlns:p15="http://schemas.microsoft.com/office/powerpoint/2012/main" xmlns:mc="http://schemas.openxmlformats.org/markup-compatibility/2006">
+<p:presentation xmlns:a="http://schemas.openxmlformats.org/drawingml/2006/main" xmlns:r="http://schemas.openxmlformats.org/officeDocument/2006/relationships" xmlns:p="http://schemas.openxmlformats.org/presentationml/2006/main">
   <p:sldMasterIdLst>
-    <p:sldMasterId id="2147483648" r:id="rId2"/>
+    <p:sldMasterId id="2147483648" r:id="rId1"/>
   </p:sldMasterIdLst>
   <p:sldIdLst>
-    <p:sldId id="256" r:id="rId3"/>
-    <p:sldId id="257" r:id="rId4"/>
-    <p:sldId id="258" r:id="rId5"/>
+    <p:sldId id="256" r:id="rId2"/>
+    <p:sldId id="257" r:id="rId3"/>
+    <p:sldId id="258" r:id="rId4"/>
+    <p:sldId id="267" r:id="rId5"/>
     <p:sldId id="259" r:id="rId6"/>
     <p:sldId id="260" r:id="rId7"/>
     <p:sldId id="261" r:id="rId8"/>
     <p:sldId id="262" r:id="rId9"/>
-    <p:sldId id="263" r:id="rId10"/>
-    <p:sldId id="264" r:id="rId11"/>
-    <p:sldId id="265" r:id="rId12"/>
-    <p:sldId id="266" r:id="rId13"/>
+    <p:sldId id="268" r:id="rId10"/>
+    <p:sldId id="265" r:id="rId11"/>
+    <p:sldId id="266" r:id="rId12"/>
   </p:sldIdLst>
   <p:sldSz cx="12192000" cy="6858000"/>
   <p:notesSz cx="7559675" cy="10691813"/>
+  <p:defaultTextStyle>
+    <a:defPPr>
+      <a:defRPr lang="en-US"/>
+    </a:defPPr>
+    <a:lvl1pPr marL="0" algn="l" defTabSz="914400" rtl="0" eaLnBrk="1" latinLnBrk="0" hangingPunct="1">
+      <a:defRPr sz="1800" kern="1200">
+        <a:solidFill>
+          <a:schemeClr val="tx1"/>
+        </a:solidFill>
+        <a:latin typeface="+mn-lt"/>
+        <a:ea typeface="+mn-ea"/>
+        <a:cs typeface="+mn-cs"/>
+      </a:defRPr>
+    </a:lvl1pPr>
+    <a:lvl2pPr marL="457200" algn="l" defTabSz="914400" rtl="0" eaLnBrk="1" latinLnBrk="0" hangingPunct="1">
+      <a:defRPr sz="1800" kern="1200">
+        <a:solidFill>
+          <a:schemeClr val="tx1"/>
+        </a:solidFill>
+        <a:latin typeface="+mn-lt"/>
+        <a:ea typeface="+mn-ea"/>
+        <a:cs typeface="+mn-cs"/>
+      </a:defRPr>
+    </a:lvl2pPr>
+    <a:lvl3pPr marL="914400" algn="l" defTabSz="914400" rtl="0" eaLnBrk="1" latinLnBrk="0" hangingPunct="1">
+      <a:defRPr sz="1800" kern="1200">
+        <a:solidFill>
+          <a:schemeClr val="tx1"/>
+        </a:solidFill>
+        <a:latin typeface="+mn-lt"/>
+        <a:ea typeface="+mn-ea"/>
+        <a:cs typeface="+mn-cs"/>
+      </a:defRPr>
+    </a:lvl3pPr>
+    <a:lvl4pPr marL="1371600" algn="l" defTabSz="914400" rtl="0" eaLnBrk="1" latinLnBrk="0" hangingPunct="1">
+      <a:defRPr sz="1800" kern="1200">
+        <a:solidFill>
+          <a:schemeClr val="tx1"/>
+        </a:solidFill>
+        <a:latin typeface="+mn-lt"/>
+        <a:ea typeface="+mn-ea"/>
+        <a:cs typeface="+mn-cs"/>
+      </a:defRPr>
+    </a:lvl4pPr>
+    <a:lvl5pPr marL="1828800" algn="l" defTabSz="914400" rtl="0" eaLnBrk="1" latinLnBrk="0" hangingPunct="1">
+      <a:defRPr sz="1800" kern="1200">
+        <a:solidFill>
+          <a:schemeClr val="tx1"/>
+        </a:solidFill>
+        <a:latin typeface="+mn-lt"/>
+        <a:ea typeface="+mn-ea"/>
+        <a:cs typeface="+mn-cs"/>
+      </a:defRPr>
+    </a:lvl5pPr>
+    <a:lvl6pPr marL="2286000" algn="l" defTabSz="914400" rtl="0" eaLnBrk="1" latinLnBrk="0" hangingPunct="1">
+      <a:defRPr sz="1800" kern="1200">
+        <a:solidFill>
+          <a:schemeClr val="tx1"/>
+        </a:solidFill>
+        <a:latin typeface="+mn-lt"/>
+        <a:ea typeface="+mn-ea"/>
+        <a:cs typeface="+mn-cs"/>
+      </a:defRPr>
+    </a:lvl6pPr>
+    <a:lvl7pPr marL="2743200" algn="l" defTabSz="914400" rtl="0" eaLnBrk="1" latinLnBrk="0" hangingPunct="1">
+      <a:defRPr sz="1800" kern="1200">
+        <a:solidFill>
+          <a:schemeClr val="tx1"/>
+        </a:solidFill>
+        <a:latin typeface="+mn-lt"/>
+        <a:ea typeface="+mn-ea"/>
+        <a:cs typeface="+mn-cs"/>
+      </a:defRPr>
+    </a:lvl7pPr>
+    <a:lvl8pPr marL="3200400" algn="l" defTabSz="914400" rtl="0" eaLnBrk="1" latinLnBrk="0" hangingPunct="1">
+      <a:defRPr sz="1800" kern="1200">
+        <a:solidFill>
+          <a:schemeClr val="tx1"/>
+        </a:solidFill>
+        <a:latin typeface="+mn-lt"/>
+        <a:ea typeface="+mn-ea"/>
+        <a:cs typeface="+mn-cs"/>
+      </a:defRPr>
+    </a:lvl8pPr>
+    <a:lvl9pPr marL="3657600" algn="l" defTabSz="914400" rtl="0" eaLnBrk="1" latinLnBrk="0" hangingPunct="1">
+      <a:defRPr sz="1800" kern="1200">
+        <a:solidFill>
+          <a:schemeClr val="tx1"/>
+        </a:solidFill>
+        <a:latin typeface="+mn-lt"/>
+        <a:ea typeface="+mn-ea"/>
+        <a:cs typeface="+mn-cs"/>
+      </a:defRPr>
+    </a:lvl9pPr>
+  </p:defaultTextStyle>
+  <p:extLst>
+    <p:ext uri="{EFAFB233-063F-42B5-8137-9DF3F51BA10A}">
+      <p15:sldGuideLst xmlns:p15="http://schemas.microsoft.com/office/powerpoint/2012/main"/>
+    </p:ext>
+  </p:extLst>
 </p:presentation>
 </file>
 
+<file path=ppt/changesInfos/changesInfo1.xml><?xml version="1.0" encoding="utf-8"?>
+<pc:chgInfo xmlns:a="http://schemas.openxmlformats.org/drawingml/2006/main" xmlns:r="http://schemas.openxmlformats.org/officeDocument/2006/relationships" xmlns:ac="http://schemas.microsoft.com/office/drawing/2013/main/command" xmlns:pc="http://schemas.microsoft.com/office/powerpoint/2013/main/command">
+  <pc:docChgLst>
+    <pc:chgData name="Avinandan Patel" userId="a3bc2255e017deb0" providerId="LiveId" clId="{0A1AA9F1-FE00-4051-8CE0-470FED28A189}"/>
+    <pc:docChg chg="undo custSel modSld">
+      <pc:chgData name="Avinandan Patel" userId="a3bc2255e017deb0" providerId="LiveId" clId="{0A1AA9F1-FE00-4051-8CE0-470FED28A189}" dt="2026-08-01T13:41:30.048" v="37" actId="1076"/>
+      <pc:docMkLst>
+        <pc:docMk/>
+      </pc:docMkLst>
+      <pc:sldChg chg="modSp mod">
+        <pc:chgData name="Avinandan Patel" userId="a3bc2255e017deb0" providerId="LiveId" clId="{0A1AA9F1-FE00-4051-8CE0-470FED28A189}" dt="2026-08-01T13:41:30.048" v="37" actId="1076"/>
+        <pc:sldMkLst>
+          <pc:docMk/>
+          <pc:sldMk cId="0" sldId="261"/>
+        </pc:sldMkLst>
+        <pc:spChg chg="mod">
+          <ac:chgData name="Avinandan Patel" userId="a3bc2255e017deb0" providerId="LiveId" clId="{0A1AA9F1-FE00-4051-8CE0-470FED28A189}" dt="2026-08-01T13:41:30.048" v="37" actId="1076"/>
+          <ac:spMkLst>
+            <pc:docMk/>
+            <pc:sldMk cId="0" sldId="261"/>
+            <ac:spMk id="72" creationId="{00000000-0000-0000-0000-000000000000}"/>
+          </ac:spMkLst>
+        </pc:spChg>
+      </pc:sldChg>
+      <pc:sldChg chg="modSp mod">
+        <pc:chgData name="Avinandan Patel" userId="a3bc2255e017deb0" providerId="LiveId" clId="{0A1AA9F1-FE00-4051-8CE0-470FED28A189}" dt="2026-08-01T13:41:06.612" v="31" actId="1076"/>
+        <pc:sldMkLst>
+          <pc:docMk/>
+          <pc:sldMk cId="3128756453" sldId="267"/>
+        </pc:sldMkLst>
+        <pc:spChg chg="mod">
+          <ac:chgData name="Avinandan Patel" userId="a3bc2255e017deb0" providerId="LiveId" clId="{0A1AA9F1-FE00-4051-8CE0-470FED28A189}" dt="2026-08-01T13:41:06.612" v="31" actId="1076"/>
+          <ac:spMkLst>
+            <pc:docMk/>
+            <pc:sldMk cId="3128756453" sldId="267"/>
+            <ac:spMk id="3" creationId="{29D7130C-AA7F-B576-5CE5-C0B254887283}"/>
+          </ac:spMkLst>
+        </pc:spChg>
+      </pc:sldChg>
+      <pc:sldChg chg="modSp mod">
+        <pc:chgData name="Avinandan Patel" userId="a3bc2255e017deb0" providerId="LiveId" clId="{0A1AA9F1-FE00-4051-8CE0-470FED28A189}" dt="2026-08-01T13:39:48.063" v="8" actId="1076"/>
+        <pc:sldMkLst>
+          <pc:docMk/>
+          <pc:sldMk cId="4059675188" sldId="268"/>
+        </pc:sldMkLst>
+        <pc:spChg chg="mod">
+          <ac:chgData name="Avinandan Patel" userId="a3bc2255e017deb0" providerId="LiveId" clId="{0A1AA9F1-FE00-4051-8CE0-470FED28A189}" dt="2026-08-01T13:39:37.604" v="5" actId="14100"/>
+          <ac:spMkLst>
+            <pc:docMk/>
+            <pc:sldMk cId="4059675188" sldId="268"/>
+            <ac:spMk id="2" creationId="{205710B4-74E5-37C2-2E0B-242D993B471F}"/>
+          </ac:spMkLst>
+        </pc:spChg>
+        <pc:spChg chg="mod">
+          <ac:chgData name="Avinandan Patel" userId="a3bc2255e017deb0" providerId="LiveId" clId="{0A1AA9F1-FE00-4051-8CE0-470FED28A189}" dt="2026-08-01T13:39:48.063" v="8" actId="1076"/>
+          <ac:spMkLst>
+            <pc:docMk/>
+            <pc:sldMk cId="4059675188" sldId="268"/>
+            <ac:spMk id="3" creationId="{F6D302AE-19E3-1F9D-15EA-37BD2A98A1A1}"/>
+          </ac:spMkLst>
+        </pc:spChg>
+      </pc:sldChg>
+    </pc:docChg>
+  </pc:docChgLst>
+</pc:chgInfo>
+</file>
+
 <file path=ppt/slideLayouts/slideLayout1.xml><?xml version="1.0" encoding="utf-8"?>
-<p:sldLayout xmlns:a="http://schemas.openxmlformats.org/drawingml/2006/main" xmlns:p="http://schemas.openxmlformats.org/presentationml/2006/main" xmlns:r="http://schemas.openxmlformats.org/officeDocument/2006/relationships" xmlns:p14="http://schemas.microsoft.com/office/powerpoint/2010/main" xmlns:p15="http://schemas.microsoft.com/office/powerpoint/2012/main" xmlns:mc="http://schemas.openxmlformats.org/markup-compatibility/2006" type="title" preserve="1">
+<p:sldLayout xmlns:a="http://schemas.openxmlformats.org/drawingml/2006/main" xmlns:r="http://schemas.openxmlformats.org/officeDocument/2006/relationships" xmlns:p="http://schemas.openxmlformats.org/presentationml/2006/main" type="title" preserve="1">
   <p:cSld name="Title Slide">
     <p:bg>
       <p:bgPr>
         <a:solidFill>
-          <a:srgbClr val="ffffff"/>
+          <a:srgbClr val="FFFFFF"/>
         </a:solidFill>
+        <a:effectLst/>
       </p:bgPr>
     </p:bg>
     <p:spTree>
@@ -70,9 +238,10 @@
           </a:ln>
         </p:spPr>
         <p:txBody>
-          <a:bodyPr lIns="91440" rIns="91440" tIns="45720" bIns="45720" anchor="ctr">
+          <a:bodyPr lIns="91440" tIns="45720" rIns="91440" bIns="45720" anchor="ctr">
             <a:noAutofit/>
           </a:bodyPr>
+          <a:lstStyle/>
           <a:p>
             <a:pPr indent="0" algn="ctr" defTabSz="457200">
               <a:lnSpc>
@@ -91,14 +260,6 @@
               </a:rPr>
               <a:t>Click to edit Master title style</a:t>
             </a:r>
-            <a:endParaRPr lang="en-US" sz="4400" b="0" u="none" strike="noStrike">
-              <a:solidFill>
-                <a:schemeClr val="dk1"/>
-              </a:solidFill>
-              <a:effectLst/>
-              <a:uFillTx/>
-              <a:latin typeface="Calibri"/>
-            </a:endParaRPr>
           </a:p>
         </p:txBody>
       </p:sp>
@@ -126,7 +287,7 @@
           </a:ln>
         </p:spPr>
         <p:txBody>
-          <a:bodyPr lIns="91440" rIns="91440" tIns="45720" bIns="45720" anchor="ctr">
+          <a:bodyPr lIns="91440" tIns="45720" rIns="91440" bIns="45720" anchor="ctr">
             <a:noAutofit/>
           </a:bodyPr>
           <a:lstStyle>
@@ -202,7 +363,7 @@
           </a:ln>
         </p:spPr>
         <p:txBody>
-          <a:bodyPr lIns="91440" rIns="91440" tIns="45720" bIns="45720" anchor="ctr">
+          <a:bodyPr lIns="91440" tIns="45720" rIns="91440" bIns="45720" anchor="ctr">
             <a:noAutofit/>
           </a:bodyPr>
           <a:lstStyle>
@@ -233,14 +394,6 @@
               </a:rPr>
               <a:t>&lt;footer&gt;</a:t>
             </a:r>
-            <a:endParaRPr lang="en-IN" sz="1400" b="0" u="none" strike="noStrike">
-              <a:solidFill>
-                <a:srgbClr val="000000"/>
-              </a:solidFill>
-              <a:effectLst/>
-              <a:uFillTx/>
-              <a:latin typeface="Times New Roman"/>
-            </a:endParaRPr>
           </a:p>
         </p:txBody>
       </p:sp>
@@ -268,7 +421,7 @@
           </a:ln>
         </p:spPr>
         <p:txBody>
-          <a:bodyPr lIns="91440" rIns="91440" tIns="45720" bIns="45720" anchor="ctr">
+          <a:bodyPr lIns="91440" tIns="45720" rIns="91440" bIns="45720" anchor="ctr">
             <a:noAutofit/>
           </a:bodyPr>
           <a:lstStyle>
@@ -307,7 +460,7 @@
                 <a:uFillTx/>
                 <a:latin typeface="Calibri"/>
               </a:rPr>
-              <a:t>&lt;number&gt;</a:t>
+              <a:t>‹#›</a:t>
             </a:fld>
             <a:endParaRPr lang="en-IN" sz="1200" b="0" u="none" strike="noStrike">
               <a:solidFill>
@@ -322,17 +475,21 @@
       </p:sp>
     </p:spTree>
   </p:cSld>
+  <p:clrMapOvr>
+    <a:masterClrMapping/>
+  </p:clrMapOvr>
 </p:sldLayout>
 </file>
 
 <file path=ppt/slideLayouts/slideLayout10.xml><?xml version="1.0" encoding="utf-8"?>
-<p:sldLayout xmlns:a="http://schemas.openxmlformats.org/drawingml/2006/main" xmlns:p="http://schemas.openxmlformats.org/presentationml/2006/main" xmlns:r="http://schemas.openxmlformats.org/officeDocument/2006/relationships" xmlns:p14="http://schemas.microsoft.com/office/powerpoint/2010/main" xmlns:p15="http://schemas.microsoft.com/office/powerpoint/2012/main" xmlns:mc="http://schemas.openxmlformats.org/markup-compatibility/2006" type="blank" preserve="1">
+<p:sldLayout xmlns:a="http://schemas.openxmlformats.org/drawingml/2006/main" xmlns:r="http://schemas.openxmlformats.org/officeDocument/2006/relationships" xmlns:p="http://schemas.openxmlformats.org/presentationml/2006/main" type="blank" preserve="1">
   <p:cSld name="Content with Caption">
     <p:bg>
       <p:bgPr>
         <a:solidFill>
-          <a:srgbClr val="ffffff"/>
+          <a:srgbClr val="FFFFFF"/>
         </a:solidFill>
+        <a:effectLst/>
       </p:bgPr>
     </p:bg>
     <p:spTree>
@@ -373,9 +530,10 @@
           </a:ln>
         </p:spPr>
         <p:txBody>
-          <a:bodyPr lIns="91440" rIns="91440" tIns="45720" bIns="45720" anchor="b">
+          <a:bodyPr lIns="91440" tIns="45720" rIns="91440" bIns="45720" anchor="b">
             <a:noAutofit/>
           </a:bodyPr>
+          <a:lstStyle/>
           <a:p>
             <a:pPr indent="0" defTabSz="457200">
               <a:lnSpc>
@@ -429,9 +587,10 @@
           </a:ln>
         </p:spPr>
         <p:txBody>
-          <a:bodyPr lIns="91440" rIns="91440" tIns="45720" bIns="45720" anchor="t">
+          <a:bodyPr lIns="91440" tIns="45720" rIns="91440" bIns="45720" anchor="t">
             <a:noAutofit/>
           </a:bodyPr>
+          <a:lstStyle/>
           <a:p>
             <a:pPr marL="343080" indent="-343080" defTabSz="457200">
               <a:lnSpc>
@@ -457,14 +616,6 @@
               </a:rPr>
               <a:t>Click to edit Master text styles</a:t>
             </a:r>
-            <a:endParaRPr lang="en-US" sz="3200" b="0" u="none" strike="noStrike">
-              <a:solidFill>
-                <a:schemeClr val="dk1"/>
-              </a:solidFill>
-              <a:effectLst/>
-              <a:uFillTx/>
-              <a:latin typeface="Calibri"/>
-            </a:endParaRPr>
           </a:p>
           <a:p>
             <a:pPr marL="743040" lvl="1" indent="-285840" defTabSz="457200">
@@ -491,14 +642,6 @@
               </a:rPr>
               <a:t>Second level</a:t>
             </a:r>
-            <a:endParaRPr lang="en-US" sz="2800" b="0" u="none" strike="noStrike">
-              <a:solidFill>
-                <a:schemeClr val="dk1"/>
-              </a:solidFill>
-              <a:effectLst/>
-              <a:uFillTx/>
-              <a:latin typeface="Calibri"/>
-            </a:endParaRPr>
           </a:p>
           <a:p>
             <a:pPr marL="1143000" lvl="2" indent="-228600" defTabSz="457200">
@@ -525,14 +668,6 @@
               </a:rPr>
               <a:t>Third level</a:t>
             </a:r>
-            <a:endParaRPr lang="en-US" sz="2400" b="0" u="none" strike="noStrike">
-              <a:solidFill>
-                <a:schemeClr val="dk1"/>
-              </a:solidFill>
-              <a:effectLst/>
-              <a:uFillTx/>
-              <a:latin typeface="Calibri"/>
-            </a:endParaRPr>
           </a:p>
           <a:p>
             <a:pPr marL="1600200" lvl="3" indent="-228600" defTabSz="457200">
@@ -559,14 +694,6 @@
               </a:rPr>
               <a:t>Fourth level</a:t>
             </a:r>
-            <a:endParaRPr lang="en-US" sz="2000" b="0" u="none" strike="noStrike">
-              <a:solidFill>
-                <a:schemeClr val="dk1"/>
-              </a:solidFill>
-              <a:effectLst/>
-              <a:uFillTx/>
-              <a:latin typeface="Calibri"/>
-            </a:endParaRPr>
           </a:p>
           <a:p>
             <a:pPr marL="2057400" lvl="4" indent="-228600" defTabSz="457200">
@@ -593,14 +720,6 @@
               </a:rPr>
               <a:t>Fifth level</a:t>
             </a:r>
-            <a:endParaRPr lang="en-US" sz="2000" b="0" u="none" strike="noStrike">
-              <a:solidFill>
-                <a:schemeClr val="dk1"/>
-              </a:solidFill>
-              <a:effectLst/>
-              <a:uFillTx/>
-              <a:latin typeface="Calibri"/>
-            </a:endParaRPr>
           </a:p>
         </p:txBody>
       </p:sp>
@@ -628,9 +747,10 @@
           </a:ln>
         </p:spPr>
         <p:txBody>
-          <a:bodyPr lIns="91440" rIns="91440" tIns="45720" bIns="45720" anchor="t">
+          <a:bodyPr lIns="91440" tIns="45720" rIns="91440" bIns="45720" anchor="t">
             <a:noAutofit/>
           </a:bodyPr>
+          <a:lstStyle/>
           <a:p>
             <a:pPr indent="0" defTabSz="457200">
               <a:lnSpc>
@@ -641,7 +761,7 @@
               </a:spcBef>
               <a:buNone/>
               <a:tabLst>
-                <a:tab algn="l" pos="0"/>
+                <a:tab pos="0" algn="l"/>
               </a:tabLst>
             </a:pPr>
             <a:r>
@@ -655,14 +775,6 @@
               </a:rPr>
               <a:t>Click to edit Master text styles</a:t>
             </a:r>
-            <a:endParaRPr lang="en-US" sz="1400" b="0" u="none" strike="noStrike">
-              <a:solidFill>
-                <a:schemeClr val="dk1"/>
-              </a:solidFill>
-              <a:effectLst/>
-              <a:uFillTx/>
-              <a:latin typeface="Calibri"/>
-            </a:endParaRPr>
           </a:p>
         </p:txBody>
       </p:sp>
@@ -690,7 +802,7 @@
           </a:ln>
         </p:spPr>
         <p:txBody>
-          <a:bodyPr lIns="91440" rIns="91440" tIns="45720" bIns="45720" anchor="ctr">
+          <a:bodyPr lIns="91440" tIns="45720" rIns="91440" bIns="45720" anchor="ctr">
             <a:noAutofit/>
           </a:bodyPr>
           <a:lstStyle>
@@ -766,7 +878,7 @@
           </a:ln>
         </p:spPr>
         <p:txBody>
-          <a:bodyPr lIns="91440" rIns="91440" tIns="45720" bIns="45720" anchor="ctr">
+          <a:bodyPr lIns="91440" tIns="45720" rIns="91440" bIns="45720" anchor="ctr">
             <a:noAutofit/>
           </a:bodyPr>
           <a:lstStyle>
@@ -797,14 +909,6 @@
               </a:rPr>
               <a:t>&lt;footer&gt;</a:t>
             </a:r>
-            <a:endParaRPr lang="en-IN" sz="1400" b="0" u="none" strike="noStrike">
-              <a:solidFill>
-                <a:srgbClr val="000000"/>
-              </a:solidFill>
-              <a:effectLst/>
-              <a:uFillTx/>
-              <a:latin typeface="Times New Roman"/>
-            </a:endParaRPr>
           </a:p>
         </p:txBody>
       </p:sp>
@@ -832,7 +936,7 @@
           </a:ln>
         </p:spPr>
         <p:txBody>
-          <a:bodyPr lIns="91440" rIns="91440" tIns="45720" bIns="45720" anchor="ctr">
+          <a:bodyPr lIns="91440" tIns="45720" rIns="91440" bIns="45720" anchor="ctr">
             <a:noAutofit/>
           </a:bodyPr>
           <a:lstStyle>
@@ -871,7 +975,7 @@
                 <a:uFillTx/>
                 <a:latin typeface="Calibri"/>
               </a:rPr>
-              <a:t>&lt;number&gt;</a:t>
+              <a:t>‹#›</a:t>
             </a:fld>
             <a:endParaRPr lang="en-IN" sz="1200" b="0" u="none" strike="noStrike">
               <a:solidFill>
@@ -886,17 +990,21 @@
       </p:sp>
     </p:spTree>
   </p:cSld>
+  <p:clrMapOvr>
+    <a:masterClrMapping/>
+  </p:clrMapOvr>
 </p:sldLayout>
 </file>
 
 <file path=ppt/slideLayouts/slideLayout11.xml><?xml version="1.0" encoding="utf-8"?>
-<p:sldLayout xmlns:a="http://schemas.openxmlformats.org/drawingml/2006/main" xmlns:p="http://schemas.openxmlformats.org/presentationml/2006/main" xmlns:r="http://schemas.openxmlformats.org/officeDocument/2006/relationships" xmlns:p14="http://schemas.microsoft.com/office/powerpoint/2010/main" xmlns:p15="http://schemas.microsoft.com/office/powerpoint/2012/main" xmlns:mc="http://schemas.openxmlformats.org/markup-compatibility/2006" type="blank" preserve="1">
+<p:sldLayout xmlns:a="http://schemas.openxmlformats.org/drawingml/2006/main" xmlns:r="http://schemas.openxmlformats.org/officeDocument/2006/relationships" xmlns:p="http://schemas.openxmlformats.org/presentationml/2006/main" type="blank" preserve="1">
   <p:cSld name="Picture with Caption">
     <p:bg>
       <p:bgPr>
         <a:solidFill>
-          <a:srgbClr val="ffffff"/>
+          <a:srgbClr val="FFFFFF"/>
         </a:solidFill>
+        <a:effectLst/>
       </p:bgPr>
     </p:bg>
     <p:spTree>
@@ -937,9 +1045,10 @@
           </a:ln>
         </p:spPr>
         <p:txBody>
-          <a:bodyPr lIns="91440" rIns="91440" tIns="45720" bIns="45720" anchor="b">
+          <a:bodyPr lIns="91440" tIns="45720" rIns="91440" bIns="45720" anchor="b">
             <a:noAutofit/>
           </a:bodyPr>
+          <a:lstStyle/>
           <a:p>
             <a:pPr indent="0" defTabSz="457200">
               <a:lnSpc>
@@ -993,9 +1102,10 @@
           </a:ln>
         </p:spPr>
         <p:txBody>
-          <a:bodyPr lIns="90000" rIns="90000" tIns="45000" bIns="45000" anchor="t">
+          <a:bodyPr lIns="90000" tIns="45000" rIns="90000" bIns="45000" anchor="t">
             <a:noAutofit/>
           </a:bodyPr>
+          <a:lstStyle/>
           <a:p>
             <a:pPr marL="432000" indent="-324000">
               <a:spcBef>
@@ -1019,14 +1129,6 @@
               </a:rPr>
               <a:t>Click to edit the outline text format</a:t>
             </a:r>
-            <a:endParaRPr lang="en-US" sz="3200" b="0" u="none" strike="noStrike">
-              <a:solidFill>
-                <a:schemeClr val="dk1"/>
-              </a:solidFill>
-              <a:effectLst/>
-              <a:uFillTx/>
-              <a:latin typeface="Calibri"/>
-            </a:endParaRPr>
           </a:p>
           <a:p>
             <a:pPr marL="864000" lvl="1" indent="-324000">
@@ -1051,14 +1153,6 @@
               </a:rPr>
               <a:t>Second Outline Level</a:t>
             </a:r>
-            <a:endParaRPr lang="en-US" sz="3200" b="0" u="none" strike="noStrike">
-              <a:solidFill>
-                <a:schemeClr val="dk1"/>
-              </a:solidFill>
-              <a:effectLst/>
-              <a:uFillTx/>
-              <a:latin typeface="Calibri"/>
-            </a:endParaRPr>
           </a:p>
           <a:p>
             <a:pPr marL="1296000" lvl="2" indent="-288000">
@@ -1083,14 +1177,6 @@
               </a:rPr>
               <a:t>Third Outline Level</a:t>
             </a:r>
-            <a:endParaRPr lang="en-US" sz="3200" b="0" u="none" strike="noStrike">
-              <a:solidFill>
-                <a:schemeClr val="dk1"/>
-              </a:solidFill>
-              <a:effectLst/>
-              <a:uFillTx/>
-              <a:latin typeface="Calibri"/>
-            </a:endParaRPr>
           </a:p>
           <a:p>
             <a:pPr marL="1728000" lvl="3" indent="-216000">
@@ -1115,14 +1201,6 @@
               </a:rPr>
               <a:t>Fourth Outline Level</a:t>
             </a:r>
-            <a:endParaRPr lang="en-US" sz="3200" b="0" u="none" strike="noStrike">
-              <a:solidFill>
-                <a:schemeClr val="dk1"/>
-              </a:solidFill>
-              <a:effectLst/>
-              <a:uFillTx/>
-              <a:latin typeface="Calibri"/>
-            </a:endParaRPr>
           </a:p>
           <a:p>
             <a:pPr marL="2160000" lvl="4" indent="-216000">
@@ -1147,14 +1225,6 @@
               </a:rPr>
               <a:t>Fifth Outline Level</a:t>
             </a:r>
-            <a:endParaRPr lang="en-US" sz="3200" b="0" u="none" strike="noStrike">
-              <a:solidFill>
-                <a:schemeClr val="dk1"/>
-              </a:solidFill>
-              <a:effectLst/>
-              <a:uFillTx/>
-              <a:latin typeface="Calibri"/>
-            </a:endParaRPr>
           </a:p>
           <a:p>
             <a:pPr marL="2592000" lvl="5" indent="-216000">
@@ -1179,14 +1249,6 @@
               </a:rPr>
               <a:t>Sixth Outline Level</a:t>
             </a:r>
-            <a:endParaRPr lang="en-US" sz="3200" b="0" u="none" strike="noStrike">
-              <a:solidFill>
-                <a:schemeClr val="dk1"/>
-              </a:solidFill>
-              <a:effectLst/>
-              <a:uFillTx/>
-              <a:latin typeface="Calibri"/>
-            </a:endParaRPr>
           </a:p>
           <a:p>
             <a:pPr marL="3024000" lvl="6" indent="-216000">
@@ -1211,14 +1273,6 @@
               </a:rPr>
               <a:t>Seventh Outline Level</a:t>
             </a:r>
-            <a:endParaRPr lang="en-US" sz="3200" b="0" u="none" strike="noStrike">
-              <a:solidFill>
-                <a:schemeClr val="dk1"/>
-              </a:solidFill>
-              <a:effectLst/>
-              <a:uFillTx/>
-              <a:latin typeface="Calibri"/>
-            </a:endParaRPr>
           </a:p>
         </p:txBody>
       </p:sp>
@@ -1246,9 +1300,10 @@
           </a:ln>
         </p:spPr>
         <p:txBody>
-          <a:bodyPr lIns="91440" rIns="91440" tIns="45720" bIns="45720" anchor="t">
+          <a:bodyPr lIns="91440" tIns="45720" rIns="91440" bIns="45720" anchor="t">
             <a:noAutofit/>
           </a:bodyPr>
+          <a:lstStyle/>
           <a:p>
             <a:pPr indent="0" defTabSz="457200">
               <a:lnSpc>
@@ -1259,7 +1314,7 @@
               </a:spcBef>
               <a:buNone/>
               <a:tabLst>
-                <a:tab algn="l" pos="0"/>
+                <a:tab pos="0" algn="l"/>
               </a:tabLst>
             </a:pPr>
             <a:r>
@@ -1273,14 +1328,6 @@
               </a:rPr>
               <a:t>Click to edit Master text styles</a:t>
             </a:r>
-            <a:endParaRPr lang="en-US" sz="1400" b="0" u="none" strike="noStrike">
-              <a:solidFill>
-                <a:schemeClr val="dk1"/>
-              </a:solidFill>
-              <a:effectLst/>
-              <a:uFillTx/>
-              <a:latin typeface="Calibri"/>
-            </a:endParaRPr>
           </a:p>
         </p:txBody>
       </p:sp>
@@ -1308,7 +1355,7 @@
           </a:ln>
         </p:spPr>
         <p:txBody>
-          <a:bodyPr lIns="91440" rIns="91440" tIns="45720" bIns="45720" anchor="ctr">
+          <a:bodyPr lIns="91440" tIns="45720" rIns="91440" bIns="45720" anchor="ctr">
             <a:noAutofit/>
           </a:bodyPr>
           <a:lstStyle>
@@ -1384,7 +1431,7 @@
           </a:ln>
         </p:spPr>
         <p:txBody>
-          <a:bodyPr lIns="91440" rIns="91440" tIns="45720" bIns="45720" anchor="ctr">
+          <a:bodyPr lIns="91440" tIns="45720" rIns="91440" bIns="45720" anchor="ctr">
             <a:noAutofit/>
           </a:bodyPr>
           <a:lstStyle>
@@ -1415,14 +1462,6 @@
               </a:rPr>
               <a:t>&lt;footer&gt;</a:t>
             </a:r>
-            <a:endParaRPr lang="en-IN" sz="1400" b="0" u="none" strike="noStrike">
-              <a:solidFill>
-                <a:srgbClr val="000000"/>
-              </a:solidFill>
-              <a:effectLst/>
-              <a:uFillTx/>
-              <a:latin typeface="Times New Roman"/>
-            </a:endParaRPr>
           </a:p>
         </p:txBody>
       </p:sp>
@@ -1450,7 +1489,7 @@
           </a:ln>
         </p:spPr>
         <p:txBody>
-          <a:bodyPr lIns="91440" rIns="91440" tIns="45720" bIns="45720" anchor="ctr">
+          <a:bodyPr lIns="91440" tIns="45720" rIns="91440" bIns="45720" anchor="ctr">
             <a:noAutofit/>
           </a:bodyPr>
           <a:lstStyle>
@@ -1489,7 +1528,7 @@
                 <a:uFillTx/>
                 <a:latin typeface="Calibri"/>
               </a:rPr>
-              <a:t>&lt;number&gt;</a:t>
+              <a:t>‹#›</a:t>
             </a:fld>
             <a:endParaRPr lang="en-IN" sz="1200" b="0" u="none" strike="noStrike">
               <a:solidFill>
@@ -1504,17 +1543,21 @@
       </p:sp>
     </p:spTree>
   </p:cSld>
+  <p:clrMapOvr>
+    <a:masterClrMapping/>
+  </p:clrMapOvr>
 </p:sldLayout>
 </file>
 
 <file path=ppt/slideLayouts/slideLayout2.xml><?xml version="1.0" encoding="utf-8"?>
-<p:sldLayout xmlns:a="http://schemas.openxmlformats.org/drawingml/2006/main" xmlns:p="http://schemas.openxmlformats.org/presentationml/2006/main" xmlns:r="http://schemas.openxmlformats.org/officeDocument/2006/relationships" xmlns:p14="http://schemas.microsoft.com/office/powerpoint/2010/main" xmlns:p15="http://schemas.microsoft.com/office/powerpoint/2012/main" xmlns:mc="http://schemas.openxmlformats.org/markup-compatibility/2006" type="vertTx" preserve="1">
+<p:sldLayout xmlns:a="http://schemas.openxmlformats.org/drawingml/2006/main" xmlns:r="http://schemas.openxmlformats.org/officeDocument/2006/relationships" xmlns:p="http://schemas.openxmlformats.org/presentationml/2006/main" type="vertTx" preserve="1">
   <p:cSld name="Title and Vertical Text">
     <p:bg>
       <p:bgPr>
         <a:solidFill>
-          <a:srgbClr val="ffffff"/>
+          <a:srgbClr val="FFFFFF"/>
         </a:solidFill>
+        <a:effectLst/>
       </p:bgPr>
     </p:bg>
     <p:spTree>
@@ -1555,9 +1598,10 @@
           </a:ln>
         </p:spPr>
         <p:txBody>
-          <a:bodyPr lIns="91440" rIns="91440" tIns="45720" bIns="45720" anchor="ctr">
+          <a:bodyPr lIns="91440" tIns="45720" rIns="91440" bIns="45720" anchor="ctr">
             <a:noAutofit/>
           </a:bodyPr>
+          <a:lstStyle/>
           <a:p>
             <a:pPr indent="0" algn="ctr" defTabSz="457200">
               <a:lnSpc>
@@ -1576,14 +1620,6 @@
               </a:rPr>
               <a:t>Click to edit Master title style</a:t>
             </a:r>
-            <a:endParaRPr lang="en-US" sz="4400" b="0" u="none" strike="noStrike">
-              <a:solidFill>
-                <a:schemeClr val="dk1"/>
-              </a:solidFill>
-              <a:effectLst/>
-              <a:uFillTx/>
-              <a:latin typeface="Calibri"/>
-            </a:endParaRPr>
           </a:p>
         </p:txBody>
       </p:sp>
@@ -1611,9 +1647,10 @@
           </a:ln>
         </p:spPr>
         <p:txBody>
-          <a:bodyPr lIns="91440" rIns="91440" tIns="45720" bIns="45720" anchor="t" vert="eaVert">
+          <a:bodyPr vert="eaVert" lIns="91440" tIns="45720" rIns="91440" bIns="45720" anchor="t">
             <a:noAutofit/>
           </a:bodyPr>
+          <a:lstStyle/>
           <a:p>
             <a:pPr marL="343080" indent="-343080" defTabSz="457200">
               <a:lnSpc>
@@ -1639,14 +1676,6 @@
               </a:rPr>
               <a:t>Click to edit Master text styles</a:t>
             </a:r>
-            <a:endParaRPr lang="en-US" sz="3200" b="0" u="none" strike="noStrike">
-              <a:solidFill>
-                <a:schemeClr val="dk1"/>
-              </a:solidFill>
-              <a:effectLst/>
-              <a:uFillTx/>
-              <a:latin typeface="Calibri"/>
-            </a:endParaRPr>
           </a:p>
           <a:p>
             <a:pPr marL="743040" lvl="1" indent="-285840" defTabSz="457200">
@@ -1673,14 +1702,6 @@
               </a:rPr>
               <a:t>Second level</a:t>
             </a:r>
-            <a:endParaRPr lang="en-US" sz="2800" b="0" u="none" strike="noStrike">
-              <a:solidFill>
-                <a:schemeClr val="dk1"/>
-              </a:solidFill>
-              <a:effectLst/>
-              <a:uFillTx/>
-              <a:latin typeface="Calibri"/>
-            </a:endParaRPr>
           </a:p>
           <a:p>
             <a:pPr marL="1143000" lvl="2" indent="-228600" defTabSz="457200">
@@ -1707,14 +1728,6 @@
               </a:rPr>
               <a:t>Third level</a:t>
             </a:r>
-            <a:endParaRPr lang="en-US" sz="2400" b="0" u="none" strike="noStrike">
-              <a:solidFill>
-                <a:schemeClr val="dk1"/>
-              </a:solidFill>
-              <a:effectLst/>
-              <a:uFillTx/>
-              <a:latin typeface="Calibri"/>
-            </a:endParaRPr>
           </a:p>
           <a:p>
             <a:pPr marL="1600200" lvl="3" indent="-228600" defTabSz="457200">
@@ -1741,14 +1754,6 @@
               </a:rPr>
               <a:t>Fourth level</a:t>
             </a:r>
-            <a:endParaRPr lang="en-US" sz="2000" b="0" u="none" strike="noStrike">
-              <a:solidFill>
-                <a:schemeClr val="dk1"/>
-              </a:solidFill>
-              <a:effectLst/>
-              <a:uFillTx/>
-              <a:latin typeface="Calibri"/>
-            </a:endParaRPr>
           </a:p>
           <a:p>
             <a:pPr marL="2057400" lvl="4" indent="-228600" defTabSz="457200">
@@ -1775,14 +1780,6 @@
               </a:rPr>
               <a:t>Fifth level</a:t>
             </a:r>
-            <a:endParaRPr lang="en-US" sz="2000" b="0" u="none" strike="noStrike">
-              <a:solidFill>
-                <a:schemeClr val="dk1"/>
-              </a:solidFill>
-              <a:effectLst/>
-              <a:uFillTx/>
-              <a:latin typeface="Calibri"/>
-            </a:endParaRPr>
           </a:p>
         </p:txBody>
       </p:sp>
@@ -1810,7 +1807,7 @@
           </a:ln>
         </p:spPr>
         <p:txBody>
-          <a:bodyPr lIns="91440" rIns="91440" tIns="45720" bIns="45720" anchor="ctr">
+          <a:bodyPr lIns="91440" tIns="45720" rIns="91440" bIns="45720" anchor="ctr">
             <a:noAutofit/>
           </a:bodyPr>
           <a:lstStyle>
@@ -1886,7 +1883,7 @@
           </a:ln>
         </p:spPr>
         <p:txBody>
-          <a:bodyPr lIns="91440" rIns="91440" tIns="45720" bIns="45720" anchor="ctr">
+          <a:bodyPr lIns="91440" tIns="45720" rIns="91440" bIns="45720" anchor="ctr">
             <a:noAutofit/>
           </a:bodyPr>
           <a:lstStyle>
@@ -1917,14 +1914,6 @@
               </a:rPr>
               <a:t>&lt;footer&gt;</a:t>
             </a:r>
-            <a:endParaRPr lang="en-IN" sz="1400" b="0" u="none" strike="noStrike">
-              <a:solidFill>
-                <a:srgbClr val="000000"/>
-              </a:solidFill>
-              <a:effectLst/>
-              <a:uFillTx/>
-              <a:latin typeface="Times New Roman"/>
-            </a:endParaRPr>
           </a:p>
         </p:txBody>
       </p:sp>
@@ -1952,7 +1941,7 @@
           </a:ln>
         </p:spPr>
         <p:txBody>
-          <a:bodyPr lIns="91440" rIns="91440" tIns="45720" bIns="45720" anchor="ctr">
+          <a:bodyPr lIns="91440" tIns="45720" rIns="91440" bIns="45720" anchor="ctr">
             <a:noAutofit/>
           </a:bodyPr>
           <a:lstStyle>
@@ -1991,7 +1980,7 @@
                 <a:uFillTx/>
                 <a:latin typeface="Calibri"/>
               </a:rPr>
-              <a:t>&lt;number&gt;</a:t>
+              <a:t>‹#›</a:t>
             </a:fld>
             <a:endParaRPr lang="en-IN" sz="1200" b="0" u="none" strike="noStrike">
               <a:solidFill>
@@ -2006,17 +1995,21 @@
       </p:sp>
     </p:spTree>
   </p:cSld>
+  <p:clrMapOvr>
+    <a:masterClrMapping/>
+  </p:clrMapOvr>
 </p:sldLayout>
 </file>
 
 <file path=ppt/slideLayouts/slideLayout3.xml><?xml version="1.0" encoding="utf-8"?>
-<p:sldLayout xmlns:a="http://schemas.openxmlformats.org/drawingml/2006/main" xmlns:p="http://schemas.openxmlformats.org/presentationml/2006/main" xmlns:r="http://schemas.openxmlformats.org/officeDocument/2006/relationships" xmlns:p14="http://schemas.microsoft.com/office/powerpoint/2010/main" xmlns:p15="http://schemas.microsoft.com/office/powerpoint/2012/main" xmlns:mc="http://schemas.openxmlformats.org/markup-compatibility/2006" type="vertTitleAndTx" preserve="1">
+<p:sldLayout xmlns:a="http://schemas.openxmlformats.org/drawingml/2006/main" xmlns:r="http://schemas.openxmlformats.org/officeDocument/2006/relationships" xmlns:p="http://schemas.openxmlformats.org/presentationml/2006/main" type="vertTitleAndTx" preserve="1">
   <p:cSld name="Vertical Title and Text">
     <p:bg>
       <p:bgPr>
         <a:solidFill>
-          <a:srgbClr val="ffffff"/>
+          <a:srgbClr val="FFFFFF"/>
         </a:solidFill>
+        <a:effectLst/>
       </p:bgPr>
     </p:bg>
     <p:spTree>
@@ -2057,9 +2050,10 @@
           </a:ln>
         </p:spPr>
         <p:txBody>
-          <a:bodyPr lIns="91440" rIns="91440" tIns="45720" bIns="45720" anchor="ctr" vert="eaVert">
+          <a:bodyPr vert="eaVert" lIns="91440" tIns="45720" rIns="91440" bIns="45720" anchor="ctr">
             <a:noAutofit/>
           </a:bodyPr>
+          <a:lstStyle/>
           <a:p>
             <a:pPr indent="0" algn="ctr" defTabSz="457200">
               <a:lnSpc>
@@ -2078,14 +2072,6 @@
               </a:rPr>
               <a:t>Click to edit Master title style</a:t>
             </a:r>
-            <a:endParaRPr lang="en-US" sz="4400" b="0" u="none" strike="noStrike">
-              <a:solidFill>
-                <a:schemeClr val="dk1"/>
-              </a:solidFill>
-              <a:effectLst/>
-              <a:uFillTx/>
-              <a:latin typeface="Calibri"/>
-            </a:endParaRPr>
           </a:p>
         </p:txBody>
       </p:sp>
@@ -2113,9 +2099,10 @@
           </a:ln>
         </p:spPr>
         <p:txBody>
-          <a:bodyPr lIns="91440" rIns="91440" tIns="45720" bIns="45720" anchor="t" vert="eaVert">
+          <a:bodyPr vert="eaVert" lIns="91440" tIns="45720" rIns="91440" bIns="45720" anchor="t">
             <a:noAutofit/>
           </a:bodyPr>
+          <a:lstStyle/>
           <a:p>
             <a:pPr marL="343080" indent="-343080" defTabSz="457200">
               <a:lnSpc>
@@ -2141,14 +2128,6 @@
               </a:rPr>
               <a:t>Click to edit Master text styles</a:t>
             </a:r>
-            <a:endParaRPr lang="en-US" sz="3200" b="0" u="none" strike="noStrike">
-              <a:solidFill>
-                <a:schemeClr val="dk1"/>
-              </a:solidFill>
-              <a:effectLst/>
-              <a:uFillTx/>
-              <a:latin typeface="Calibri"/>
-            </a:endParaRPr>
           </a:p>
           <a:p>
             <a:pPr marL="743040" lvl="1" indent="-285840" defTabSz="457200">
@@ -2175,14 +2154,6 @@
               </a:rPr>
               <a:t>Second level</a:t>
             </a:r>
-            <a:endParaRPr lang="en-US" sz="2800" b="0" u="none" strike="noStrike">
-              <a:solidFill>
-                <a:schemeClr val="dk1"/>
-              </a:solidFill>
-              <a:effectLst/>
-              <a:uFillTx/>
-              <a:latin typeface="Calibri"/>
-            </a:endParaRPr>
           </a:p>
           <a:p>
             <a:pPr marL="1143000" lvl="2" indent="-228600" defTabSz="457200">
@@ -2209,14 +2180,6 @@
               </a:rPr>
               <a:t>Third level</a:t>
             </a:r>
-            <a:endParaRPr lang="en-US" sz="2400" b="0" u="none" strike="noStrike">
-              <a:solidFill>
-                <a:schemeClr val="dk1"/>
-              </a:solidFill>
-              <a:effectLst/>
-              <a:uFillTx/>
-              <a:latin typeface="Calibri"/>
-            </a:endParaRPr>
           </a:p>
           <a:p>
             <a:pPr marL="1600200" lvl="3" indent="-228600" defTabSz="457200">
@@ -2243,14 +2206,6 @@
               </a:rPr>
               <a:t>Fourth level</a:t>
             </a:r>
-            <a:endParaRPr lang="en-US" sz="2000" b="0" u="none" strike="noStrike">
-              <a:solidFill>
-                <a:schemeClr val="dk1"/>
-              </a:solidFill>
-              <a:effectLst/>
-              <a:uFillTx/>
-              <a:latin typeface="Calibri"/>
-            </a:endParaRPr>
           </a:p>
           <a:p>
             <a:pPr marL="2057400" lvl="4" indent="-228600" defTabSz="457200">
@@ -2277,14 +2232,6 @@
               </a:rPr>
               <a:t>Fifth level</a:t>
             </a:r>
-            <a:endParaRPr lang="en-US" sz="2000" b="0" u="none" strike="noStrike">
-              <a:solidFill>
-                <a:schemeClr val="dk1"/>
-              </a:solidFill>
-              <a:effectLst/>
-              <a:uFillTx/>
-              <a:latin typeface="Calibri"/>
-            </a:endParaRPr>
           </a:p>
         </p:txBody>
       </p:sp>
@@ -2312,7 +2259,7 @@
           </a:ln>
         </p:spPr>
         <p:txBody>
-          <a:bodyPr lIns="91440" rIns="91440" tIns="45720" bIns="45720" anchor="ctr">
+          <a:bodyPr lIns="91440" tIns="45720" rIns="91440" bIns="45720" anchor="ctr">
             <a:noAutofit/>
           </a:bodyPr>
           <a:lstStyle>
@@ -2388,7 +2335,7 @@
           </a:ln>
         </p:spPr>
         <p:txBody>
-          <a:bodyPr lIns="91440" rIns="91440" tIns="45720" bIns="45720" anchor="ctr">
+          <a:bodyPr lIns="91440" tIns="45720" rIns="91440" bIns="45720" anchor="ctr">
             <a:noAutofit/>
           </a:bodyPr>
           <a:lstStyle>
@@ -2419,14 +2366,6 @@
               </a:rPr>
               <a:t>&lt;footer&gt;</a:t>
             </a:r>
-            <a:endParaRPr lang="en-IN" sz="1400" b="0" u="none" strike="noStrike">
-              <a:solidFill>
-                <a:srgbClr val="000000"/>
-              </a:solidFill>
-              <a:effectLst/>
-              <a:uFillTx/>
-              <a:latin typeface="Times New Roman"/>
-            </a:endParaRPr>
           </a:p>
         </p:txBody>
       </p:sp>
@@ -2454,7 +2393,7 @@
           </a:ln>
         </p:spPr>
         <p:txBody>
-          <a:bodyPr lIns="91440" rIns="91440" tIns="45720" bIns="45720" anchor="ctr">
+          <a:bodyPr lIns="91440" tIns="45720" rIns="91440" bIns="45720" anchor="ctr">
             <a:noAutofit/>
           </a:bodyPr>
           <a:lstStyle>
@@ -2493,7 +2432,7 @@
                 <a:uFillTx/>
                 <a:latin typeface="Calibri"/>
               </a:rPr>
-              <a:t>&lt;number&gt;</a:t>
+              <a:t>‹#›</a:t>
             </a:fld>
             <a:endParaRPr lang="en-IN" sz="1200" b="0" u="none" strike="noStrike">
               <a:solidFill>
@@ -2508,17 +2447,21 @@
       </p:sp>
     </p:spTree>
   </p:cSld>
+  <p:clrMapOvr>
+    <a:masterClrMapping/>
+  </p:clrMapOvr>
 </p:sldLayout>
 </file>
 
 <file path=ppt/slideLayouts/slideLayout4.xml><?xml version="1.0" encoding="utf-8"?>
-<p:sldLayout xmlns:a="http://schemas.openxmlformats.org/drawingml/2006/main" xmlns:p="http://schemas.openxmlformats.org/presentationml/2006/main" xmlns:r="http://schemas.openxmlformats.org/officeDocument/2006/relationships" xmlns:p14="http://schemas.microsoft.com/office/powerpoint/2010/main" xmlns:p15="http://schemas.microsoft.com/office/powerpoint/2012/main" xmlns:mc="http://schemas.openxmlformats.org/markup-compatibility/2006" type="obj" preserve="1">
+<p:sldLayout xmlns:a="http://schemas.openxmlformats.org/drawingml/2006/main" xmlns:r="http://schemas.openxmlformats.org/officeDocument/2006/relationships" xmlns:p="http://schemas.openxmlformats.org/presentationml/2006/main" type="obj" preserve="1">
   <p:cSld name="Title and Content">
     <p:bg>
       <p:bgPr>
         <a:solidFill>
-          <a:srgbClr val="ffffff"/>
+          <a:srgbClr val="FFFFFF"/>
         </a:solidFill>
+        <a:effectLst/>
       </p:bgPr>
     </p:bg>
     <p:spTree>
@@ -2559,9 +2502,10 @@
           </a:ln>
         </p:spPr>
         <p:txBody>
-          <a:bodyPr lIns="91440" rIns="91440" tIns="45720" bIns="45720" anchor="ctr">
+          <a:bodyPr lIns="91440" tIns="45720" rIns="91440" bIns="45720" anchor="ctr">
             <a:noAutofit/>
           </a:bodyPr>
+          <a:lstStyle/>
           <a:p>
             <a:pPr indent="0" algn="ctr" defTabSz="457200">
               <a:lnSpc>
@@ -2580,14 +2524,6 @@
               </a:rPr>
               <a:t>Click to edit Master title style</a:t>
             </a:r>
-            <a:endParaRPr lang="en-US" sz="4400" b="0" u="none" strike="noStrike">
-              <a:solidFill>
-                <a:schemeClr val="dk1"/>
-              </a:solidFill>
-              <a:effectLst/>
-              <a:uFillTx/>
-              <a:latin typeface="Calibri"/>
-            </a:endParaRPr>
           </a:p>
         </p:txBody>
       </p:sp>
@@ -2615,9 +2551,10 @@
           </a:ln>
         </p:spPr>
         <p:txBody>
-          <a:bodyPr lIns="91440" rIns="91440" tIns="45720" bIns="45720" anchor="t">
+          <a:bodyPr lIns="91440" tIns="45720" rIns="91440" bIns="45720" anchor="t">
             <a:noAutofit/>
           </a:bodyPr>
+          <a:lstStyle/>
           <a:p>
             <a:pPr marL="343080" indent="-343080" defTabSz="457200">
               <a:lnSpc>
@@ -2643,14 +2580,6 @@
               </a:rPr>
               <a:t>Click to edit Master text styles</a:t>
             </a:r>
-            <a:endParaRPr lang="en-US" sz="3200" b="0" u="none" strike="noStrike">
-              <a:solidFill>
-                <a:schemeClr val="dk1"/>
-              </a:solidFill>
-              <a:effectLst/>
-              <a:uFillTx/>
-              <a:latin typeface="Calibri"/>
-            </a:endParaRPr>
           </a:p>
           <a:p>
             <a:pPr marL="743040" lvl="1" indent="-285840" defTabSz="457200">
@@ -2677,14 +2606,6 @@
               </a:rPr>
               <a:t>Second level</a:t>
             </a:r>
-            <a:endParaRPr lang="en-US" sz="2800" b="0" u="none" strike="noStrike">
-              <a:solidFill>
-                <a:schemeClr val="dk1"/>
-              </a:solidFill>
-              <a:effectLst/>
-              <a:uFillTx/>
-              <a:latin typeface="Calibri"/>
-            </a:endParaRPr>
           </a:p>
           <a:p>
             <a:pPr marL="1143000" lvl="2" indent="-228600" defTabSz="457200">
@@ -2711,14 +2632,6 @@
               </a:rPr>
               <a:t>Third level</a:t>
             </a:r>
-            <a:endParaRPr lang="en-US" sz="2400" b="0" u="none" strike="noStrike">
-              <a:solidFill>
-                <a:schemeClr val="dk1"/>
-              </a:solidFill>
-              <a:effectLst/>
-              <a:uFillTx/>
-              <a:latin typeface="Calibri"/>
-            </a:endParaRPr>
           </a:p>
           <a:p>
             <a:pPr marL="1600200" lvl="3" indent="-228600" defTabSz="457200">
@@ -2745,14 +2658,6 @@
               </a:rPr>
               <a:t>Fourth level</a:t>
             </a:r>
-            <a:endParaRPr lang="en-US" sz="2000" b="0" u="none" strike="noStrike">
-              <a:solidFill>
-                <a:schemeClr val="dk1"/>
-              </a:solidFill>
-              <a:effectLst/>
-              <a:uFillTx/>
-              <a:latin typeface="Calibri"/>
-            </a:endParaRPr>
           </a:p>
           <a:p>
             <a:pPr marL="2057400" lvl="4" indent="-228600" defTabSz="457200">
@@ -2779,14 +2684,6 @@
               </a:rPr>
               <a:t>Fifth level</a:t>
             </a:r>
-            <a:endParaRPr lang="en-US" sz="2000" b="0" u="none" strike="noStrike">
-              <a:solidFill>
-                <a:schemeClr val="dk1"/>
-              </a:solidFill>
-              <a:effectLst/>
-              <a:uFillTx/>
-              <a:latin typeface="Calibri"/>
-            </a:endParaRPr>
           </a:p>
         </p:txBody>
       </p:sp>
@@ -2814,7 +2711,7 @@
           </a:ln>
         </p:spPr>
         <p:txBody>
-          <a:bodyPr lIns="91440" rIns="91440" tIns="45720" bIns="45720" anchor="ctr">
+          <a:bodyPr lIns="91440" tIns="45720" rIns="91440" bIns="45720" anchor="ctr">
             <a:noAutofit/>
           </a:bodyPr>
           <a:lstStyle>
@@ -2890,7 +2787,7 @@
           </a:ln>
         </p:spPr>
         <p:txBody>
-          <a:bodyPr lIns="91440" rIns="91440" tIns="45720" bIns="45720" anchor="ctr">
+          <a:bodyPr lIns="91440" tIns="45720" rIns="91440" bIns="45720" anchor="ctr">
             <a:noAutofit/>
           </a:bodyPr>
           <a:lstStyle>
@@ -2921,14 +2818,6 @@
               </a:rPr>
               <a:t>&lt;footer&gt;</a:t>
             </a:r>
-            <a:endParaRPr lang="en-IN" sz="1400" b="0" u="none" strike="noStrike">
-              <a:solidFill>
-                <a:srgbClr val="000000"/>
-              </a:solidFill>
-              <a:effectLst/>
-              <a:uFillTx/>
-              <a:latin typeface="Times New Roman"/>
-            </a:endParaRPr>
           </a:p>
         </p:txBody>
       </p:sp>
@@ -2956,7 +2845,7 @@
           </a:ln>
         </p:spPr>
         <p:txBody>
-          <a:bodyPr lIns="91440" rIns="91440" tIns="45720" bIns="45720" anchor="ctr">
+          <a:bodyPr lIns="91440" tIns="45720" rIns="91440" bIns="45720" anchor="ctr">
             <a:noAutofit/>
           </a:bodyPr>
           <a:lstStyle>
@@ -2995,7 +2884,7 @@
                 <a:uFillTx/>
                 <a:latin typeface="Calibri"/>
               </a:rPr>
-              <a:t>&lt;number&gt;</a:t>
+              <a:t>‹#›</a:t>
             </a:fld>
             <a:endParaRPr lang="en-IN" sz="1200" b="0" u="none" strike="noStrike">
               <a:solidFill>
@@ -3010,17 +2899,21 @@
       </p:sp>
     </p:spTree>
   </p:cSld>
+  <p:clrMapOvr>
+    <a:masterClrMapping/>
+  </p:clrMapOvr>
 </p:sldLayout>
 </file>
 
 <file path=ppt/slideLayouts/slideLayout5.xml><?xml version="1.0" encoding="utf-8"?>
-<p:sldLayout xmlns:a="http://schemas.openxmlformats.org/drawingml/2006/main" xmlns:p="http://schemas.openxmlformats.org/presentationml/2006/main" xmlns:r="http://schemas.openxmlformats.org/officeDocument/2006/relationships" xmlns:p14="http://schemas.microsoft.com/office/powerpoint/2010/main" xmlns:p15="http://schemas.microsoft.com/office/powerpoint/2012/main" xmlns:mc="http://schemas.openxmlformats.org/markup-compatibility/2006" type="blank" preserve="1">
+<p:sldLayout xmlns:a="http://schemas.openxmlformats.org/drawingml/2006/main" xmlns:r="http://schemas.openxmlformats.org/officeDocument/2006/relationships" xmlns:p="http://schemas.openxmlformats.org/presentationml/2006/main" type="blank" preserve="1">
   <p:cSld name="Section Header">
     <p:bg>
       <p:bgPr>
         <a:solidFill>
-          <a:srgbClr val="ffffff"/>
+          <a:srgbClr val="FFFFFF"/>
         </a:solidFill>
+        <a:effectLst/>
       </p:bgPr>
     </p:bg>
     <p:spTree>
@@ -3061,9 +2954,10 @@
           </a:ln>
         </p:spPr>
         <p:txBody>
-          <a:bodyPr lIns="91440" rIns="91440" tIns="45720" bIns="45720" anchor="t">
+          <a:bodyPr lIns="91440" tIns="45720" rIns="91440" bIns="45720" anchor="t">
             <a:noAutofit/>
           </a:bodyPr>
+          <a:lstStyle/>
           <a:p>
             <a:pPr indent="0" defTabSz="457200">
               <a:lnSpc>
@@ -3117,9 +3011,10 @@
           </a:ln>
         </p:spPr>
         <p:txBody>
-          <a:bodyPr lIns="91440" rIns="91440" tIns="45720" bIns="45720" anchor="b">
+          <a:bodyPr lIns="91440" tIns="45720" rIns="91440" bIns="45720" anchor="b">
             <a:noAutofit/>
           </a:bodyPr>
+          <a:lstStyle/>
           <a:p>
             <a:pPr indent="0" defTabSz="457200">
               <a:lnSpc>
@@ -3130,7 +3025,7 @@
               </a:spcBef>
               <a:buNone/>
               <a:tabLst>
-                <a:tab algn="l" pos="0"/>
+                <a:tab pos="0" algn="l"/>
               </a:tabLst>
             </a:pPr>
             <a:r>
@@ -3181,7 +3076,7 @@
           </a:ln>
         </p:spPr>
         <p:txBody>
-          <a:bodyPr lIns="91440" rIns="91440" tIns="45720" bIns="45720" anchor="ctr">
+          <a:bodyPr lIns="91440" tIns="45720" rIns="91440" bIns="45720" anchor="ctr">
             <a:noAutofit/>
           </a:bodyPr>
           <a:lstStyle>
@@ -3257,7 +3152,7 @@
           </a:ln>
         </p:spPr>
         <p:txBody>
-          <a:bodyPr lIns="91440" rIns="91440" tIns="45720" bIns="45720" anchor="ctr">
+          <a:bodyPr lIns="91440" tIns="45720" rIns="91440" bIns="45720" anchor="ctr">
             <a:noAutofit/>
           </a:bodyPr>
           <a:lstStyle>
@@ -3288,14 +3183,6 @@
               </a:rPr>
               <a:t>&lt;footer&gt;</a:t>
             </a:r>
-            <a:endParaRPr lang="en-IN" sz="1400" b="0" u="none" strike="noStrike">
-              <a:solidFill>
-                <a:srgbClr val="000000"/>
-              </a:solidFill>
-              <a:effectLst/>
-              <a:uFillTx/>
-              <a:latin typeface="Times New Roman"/>
-            </a:endParaRPr>
           </a:p>
         </p:txBody>
       </p:sp>
@@ -3323,7 +3210,7 @@
           </a:ln>
         </p:spPr>
         <p:txBody>
-          <a:bodyPr lIns="91440" rIns="91440" tIns="45720" bIns="45720" anchor="ctr">
+          <a:bodyPr lIns="91440" tIns="45720" rIns="91440" bIns="45720" anchor="ctr">
             <a:noAutofit/>
           </a:bodyPr>
           <a:lstStyle>
@@ -3362,7 +3249,7 @@
                 <a:uFillTx/>
                 <a:latin typeface="Calibri"/>
               </a:rPr>
-              <a:t>&lt;number&gt;</a:t>
+              <a:t>‹#›</a:t>
             </a:fld>
             <a:endParaRPr lang="en-IN" sz="1200" b="0" u="none" strike="noStrike">
               <a:solidFill>
@@ -3377,17 +3264,21 @@
       </p:sp>
     </p:spTree>
   </p:cSld>
+  <p:clrMapOvr>
+    <a:masterClrMapping/>
+  </p:clrMapOvr>
 </p:sldLayout>
 </file>
 
 <file path=ppt/slideLayouts/slideLayout6.xml><?xml version="1.0" encoding="utf-8"?>
-<p:sldLayout xmlns:a="http://schemas.openxmlformats.org/drawingml/2006/main" xmlns:p="http://schemas.openxmlformats.org/presentationml/2006/main" xmlns:r="http://schemas.openxmlformats.org/officeDocument/2006/relationships" xmlns:p14="http://schemas.microsoft.com/office/powerpoint/2010/main" xmlns:p15="http://schemas.microsoft.com/office/powerpoint/2012/main" xmlns:mc="http://schemas.openxmlformats.org/markup-compatibility/2006" type="twoObj" preserve="1">
+<p:sldLayout xmlns:a="http://schemas.openxmlformats.org/drawingml/2006/main" xmlns:r="http://schemas.openxmlformats.org/officeDocument/2006/relationships" xmlns:p="http://schemas.openxmlformats.org/presentationml/2006/main" type="twoObj" preserve="1">
   <p:cSld name="Two Content">
     <p:bg>
       <p:bgPr>
         <a:solidFill>
-          <a:srgbClr val="ffffff"/>
+          <a:srgbClr val="FFFFFF"/>
         </a:solidFill>
+        <a:effectLst/>
       </p:bgPr>
     </p:bg>
     <p:spTree>
@@ -3428,9 +3319,10 @@
           </a:ln>
         </p:spPr>
         <p:txBody>
-          <a:bodyPr lIns="91440" rIns="91440" tIns="45720" bIns="45720" anchor="ctr">
+          <a:bodyPr lIns="91440" tIns="45720" rIns="91440" bIns="45720" anchor="ctr">
             <a:noAutofit/>
           </a:bodyPr>
+          <a:lstStyle/>
           <a:p>
             <a:pPr indent="0" algn="ctr" defTabSz="457200">
               <a:lnSpc>
@@ -3449,14 +3341,6 @@
               </a:rPr>
               <a:t>Click to edit Master title style</a:t>
             </a:r>
-            <a:endParaRPr lang="en-US" sz="4400" b="0" u="none" strike="noStrike">
-              <a:solidFill>
-                <a:schemeClr val="dk1"/>
-              </a:solidFill>
-              <a:effectLst/>
-              <a:uFillTx/>
-              <a:latin typeface="Calibri"/>
-            </a:endParaRPr>
           </a:p>
         </p:txBody>
       </p:sp>
@@ -3484,9 +3368,10 @@
           </a:ln>
         </p:spPr>
         <p:txBody>
-          <a:bodyPr lIns="91440" rIns="91440" tIns="45720" bIns="45720" anchor="t">
+          <a:bodyPr lIns="91440" tIns="45720" rIns="91440" bIns="45720" anchor="t">
             <a:noAutofit/>
           </a:bodyPr>
+          <a:lstStyle/>
           <a:p>
             <a:pPr marL="343080" indent="-343080" defTabSz="457200">
               <a:lnSpc>
@@ -3512,14 +3397,6 @@
               </a:rPr>
               <a:t>Click to edit Master text styles</a:t>
             </a:r>
-            <a:endParaRPr lang="en-US" sz="2800" b="0" u="none" strike="noStrike">
-              <a:solidFill>
-                <a:schemeClr val="dk1"/>
-              </a:solidFill>
-              <a:effectLst/>
-              <a:uFillTx/>
-              <a:latin typeface="Calibri"/>
-            </a:endParaRPr>
           </a:p>
           <a:p>
             <a:pPr marL="743040" lvl="1" indent="-285840" defTabSz="457200">
@@ -3546,14 +3423,6 @@
               </a:rPr>
               <a:t>Second level</a:t>
             </a:r>
-            <a:endParaRPr lang="en-US" sz="2400" b="0" u="none" strike="noStrike">
-              <a:solidFill>
-                <a:schemeClr val="dk1"/>
-              </a:solidFill>
-              <a:effectLst/>
-              <a:uFillTx/>
-              <a:latin typeface="Calibri"/>
-            </a:endParaRPr>
           </a:p>
           <a:p>
             <a:pPr marL="1143000" lvl="2" indent="-228600" defTabSz="457200">
@@ -3580,14 +3449,6 @@
               </a:rPr>
               <a:t>Third level</a:t>
             </a:r>
-            <a:endParaRPr lang="en-US" sz="2000" b="0" u="none" strike="noStrike">
-              <a:solidFill>
-                <a:schemeClr val="dk1"/>
-              </a:solidFill>
-              <a:effectLst/>
-              <a:uFillTx/>
-              <a:latin typeface="Calibri"/>
-            </a:endParaRPr>
           </a:p>
           <a:p>
             <a:pPr marL="1600200" lvl="3" indent="-228600" defTabSz="457200">
@@ -3614,14 +3475,6 @@
               </a:rPr>
               <a:t>Fourth level</a:t>
             </a:r>
-            <a:endParaRPr lang="en-US" sz="1800" b="0" u="none" strike="noStrike">
-              <a:solidFill>
-                <a:schemeClr val="dk1"/>
-              </a:solidFill>
-              <a:effectLst/>
-              <a:uFillTx/>
-              <a:latin typeface="Calibri"/>
-            </a:endParaRPr>
           </a:p>
           <a:p>
             <a:pPr marL="2057400" lvl="4" indent="-228600" defTabSz="457200">
@@ -3648,14 +3501,6 @@
               </a:rPr>
               <a:t>Fifth level</a:t>
             </a:r>
-            <a:endParaRPr lang="en-US" sz="1800" b="0" u="none" strike="noStrike">
-              <a:solidFill>
-                <a:schemeClr val="dk1"/>
-              </a:solidFill>
-              <a:effectLst/>
-              <a:uFillTx/>
-              <a:latin typeface="Calibri"/>
-            </a:endParaRPr>
           </a:p>
         </p:txBody>
       </p:sp>
@@ -3683,9 +3528,10 @@
           </a:ln>
         </p:spPr>
         <p:txBody>
-          <a:bodyPr lIns="91440" rIns="91440" tIns="45720" bIns="45720" anchor="t">
+          <a:bodyPr lIns="91440" tIns="45720" rIns="91440" bIns="45720" anchor="t">
             <a:noAutofit/>
           </a:bodyPr>
+          <a:lstStyle/>
           <a:p>
             <a:pPr marL="343080" indent="-343080" defTabSz="457200">
               <a:lnSpc>
@@ -3711,14 +3557,6 @@
               </a:rPr>
               <a:t>Click to edit Master text styles</a:t>
             </a:r>
-            <a:endParaRPr lang="en-US" sz="2800" b="0" u="none" strike="noStrike">
-              <a:solidFill>
-                <a:schemeClr val="dk1"/>
-              </a:solidFill>
-              <a:effectLst/>
-              <a:uFillTx/>
-              <a:latin typeface="Calibri"/>
-            </a:endParaRPr>
           </a:p>
           <a:p>
             <a:pPr marL="743040" lvl="1" indent="-285840" defTabSz="457200">
@@ -3745,14 +3583,6 @@
               </a:rPr>
               <a:t>Second level</a:t>
             </a:r>
-            <a:endParaRPr lang="en-US" sz="2400" b="0" u="none" strike="noStrike">
-              <a:solidFill>
-                <a:schemeClr val="dk1"/>
-              </a:solidFill>
-              <a:effectLst/>
-              <a:uFillTx/>
-              <a:latin typeface="Calibri"/>
-            </a:endParaRPr>
           </a:p>
           <a:p>
             <a:pPr marL="1143000" lvl="2" indent="-228600" defTabSz="457200">
@@ -3779,14 +3609,6 @@
               </a:rPr>
               <a:t>Third level</a:t>
             </a:r>
-            <a:endParaRPr lang="en-US" sz="2000" b="0" u="none" strike="noStrike">
-              <a:solidFill>
-                <a:schemeClr val="dk1"/>
-              </a:solidFill>
-              <a:effectLst/>
-              <a:uFillTx/>
-              <a:latin typeface="Calibri"/>
-            </a:endParaRPr>
           </a:p>
           <a:p>
             <a:pPr marL="1600200" lvl="3" indent="-228600" defTabSz="457200">
@@ -3813,14 +3635,6 @@
               </a:rPr>
               <a:t>Fourth level</a:t>
             </a:r>
-            <a:endParaRPr lang="en-US" sz="1800" b="0" u="none" strike="noStrike">
-              <a:solidFill>
-                <a:schemeClr val="dk1"/>
-              </a:solidFill>
-              <a:effectLst/>
-              <a:uFillTx/>
-              <a:latin typeface="Calibri"/>
-            </a:endParaRPr>
           </a:p>
           <a:p>
             <a:pPr marL="2057400" lvl="4" indent="-228600" defTabSz="457200">
@@ -3847,14 +3661,6 @@
               </a:rPr>
               <a:t>Fifth level</a:t>
             </a:r>
-            <a:endParaRPr lang="en-US" sz="1800" b="0" u="none" strike="noStrike">
-              <a:solidFill>
-                <a:schemeClr val="dk1"/>
-              </a:solidFill>
-              <a:effectLst/>
-              <a:uFillTx/>
-              <a:latin typeface="Calibri"/>
-            </a:endParaRPr>
           </a:p>
         </p:txBody>
       </p:sp>
@@ -3882,7 +3688,7 @@
           </a:ln>
         </p:spPr>
         <p:txBody>
-          <a:bodyPr lIns="91440" rIns="91440" tIns="45720" bIns="45720" anchor="ctr">
+          <a:bodyPr lIns="91440" tIns="45720" rIns="91440" bIns="45720" anchor="ctr">
             <a:noAutofit/>
           </a:bodyPr>
           <a:lstStyle>
@@ -3958,7 +3764,7 @@
           </a:ln>
         </p:spPr>
         <p:txBody>
-          <a:bodyPr lIns="91440" rIns="91440" tIns="45720" bIns="45720" anchor="ctr">
+          <a:bodyPr lIns="91440" tIns="45720" rIns="91440" bIns="45720" anchor="ctr">
             <a:noAutofit/>
           </a:bodyPr>
           <a:lstStyle>
@@ -3989,14 +3795,6 @@
               </a:rPr>
               <a:t>&lt;footer&gt;</a:t>
             </a:r>
-            <a:endParaRPr lang="en-IN" sz="1400" b="0" u="none" strike="noStrike">
-              <a:solidFill>
-                <a:srgbClr val="000000"/>
-              </a:solidFill>
-              <a:effectLst/>
-              <a:uFillTx/>
-              <a:latin typeface="Times New Roman"/>
-            </a:endParaRPr>
           </a:p>
         </p:txBody>
       </p:sp>
@@ -4024,7 +3822,7 @@
           </a:ln>
         </p:spPr>
         <p:txBody>
-          <a:bodyPr lIns="91440" rIns="91440" tIns="45720" bIns="45720" anchor="ctr">
+          <a:bodyPr lIns="91440" tIns="45720" rIns="91440" bIns="45720" anchor="ctr">
             <a:noAutofit/>
           </a:bodyPr>
           <a:lstStyle>
@@ -4063,7 +3861,7 @@
                 <a:uFillTx/>
                 <a:latin typeface="Calibri"/>
               </a:rPr>
-              <a:t>&lt;number&gt;</a:t>
+              <a:t>‹#›</a:t>
             </a:fld>
             <a:endParaRPr lang="en-IN" sz="1200" b="0" u="none" strike="noStrike">
               <a:solidFill>
@@ -4078,17 +3876,21 @@
       </p:sp>
     </p:spTree>
   </p:cSld>
+  <p:clrMapOvr>
+    <a:masterClrMapping/>
+  </p:clrMapOvr>
 </p:sldLayout>
 </file>
 
 <file path=ppt/slideLayouts/slideLayout7.xml><?xml version="1.0" encoding="utf-8"?>
-<p:sldLayout xmlns:a="http://schemas.openxmlformats.org/drawingml/2006/main" xmlns:p="http://schemas.openxmlformats.org/presentationml/2006/main" xmlns:r="http://schemas.openxmlformats.org/officeDocument/2006/relationships" xmlns:p14="http://schemas.microsoft.com/office/powerpoint/2010/main" xmlns:p15="http://schemas.microsoft.com/office/powerpoint/2012/main" xmlns:mc="http://schemas.openxmlformats.org/markup-compatibility/2006" type="blank" preserve="1">
+<p:sldLayout xmlns:a="http://schemas.openxmlformats.org/drawingml/2006/main" xmlns:r="http://schemas.openxmlformats.org/officeDocument/2006/relationships" xmlns:p="http://schemas.openxmlformats.org/presentationml/2006/main" type="blank" preserve="1">
   <p:cSld name="Comparison">
     <p:bg>
       <p:bgPr>
         <a:solidFill>
-          <a:srgbClr val="ffffff"/>
+          <a:srgbClr val="FFFFFF"/>
         </a:solidFill>
+        <a:effectLst/>
       </p:bgPr>
     </p:bg>
     <p:spTree>
@@ -4129,9 +3931,10 @@
           </a:ln>
         </p:spPr>
         <p:txBody>
-          <a:bodyPr lIns="91440" rIns="91440" tIns="45720" bIns="45720" anchor="ctr">
+          <a:bodyPr lIns="91440" tIns="45720" rIns="91440" bIns="45720" anchor="ctr">
             <a:noAutofit/>
           </a:bodyPr>
+          <a:lstStyle/>
           <a:p>
             <a:pPr indent="0" algn="ctr" defTabSz="457200">
               <a:lnSpc>
@@ -4150,14 +3953,6 @@
               </a:rPr>
               <a:t>Click to edit Master title style</a:t>
             </a:r>
-            <a:endParaRPr lang="en-US" sz="4400" b="0" u="none" strike="noStrike">
-              <a:solidFill>
-                <a:schemeClr val="dk1"/>
-              </a:solidFill>
-              <a:effectLst/>
-              <a:uFillTx/>
-              <a:latin typeface="Calibri"/>
-            </a:endParaRPr>
           </a:p>
         </p:txBody>
       </p:sp>
@@ -4185,9 +3980,10 @@
           </a:ln>
         </p:spPr>
         <p:txBody>
-          <a:bodyPr lIns="91440" rIns="91440" tIns="45720" bIns="45720" anchor="b">
+          <a:bodyPr lIns="91440" tIns="45720" rIns="91440" bIns="45720" anchor="b">
             <a:noAutofit/>
           </a:bodyPr>
+          <a:lstStyle/>
           <a:p>
             <a:pPr indent="0" defTabSz="457200">
               <a:lnSpc>
@@ -4198,7 +3994,7 @@
               </a:spcBef>
               <a:buNone/>
               <a:tabLst>
-                <a:tab algn="l" pos="0"/>
+                <a:tab pos="0" algn="l"/>
               </a:tabLst>
             </a:pPr>
             <a:r>
@@ -4247,9 +4043,10 @@
           </a:ln>
         </p:spPr>
         <p:txBody>
-          <a:bodyPr lIns="91440" rIns="91440" tIns="45720" bIns="45720" anchor="t">
+          <a:bodyPr lIns="91440" tIns="45720" rIns="91440" bIns="45720" anchor="t">
             <a:noAutofit/>
           </a:bodyPr>
+          <a:lstStyle/>
           <a:p>
             <a:pPr marL="343080" indent="-343080" defTabSz="457200">
               <a:lnSpc>
@@ -4275,14 +4072,6 @@
               </a:rPr>
               <a:t>Click to edit Master text styles</a:t>
             </a:r>
-            <a:endParaRPr lang="en-US" sz="2400" b="0" u="none" strike="noStrike">
-              <a:solidFill>
-                <a:schemeClr val="dk1"/>
-              </a:solidFill>
-              <a:effectLst/>
-              <a:uFillTx/>
-              <a:latin typeface="Calibri"/>
-            </a:endParaRPr>
           </a:p>
           <a:p>
             <a:pPr marL="743040" lvl="1" indent="-285840" defTabSz="457200">
@@ -4309,14 +4098,6 @@
               </a:rPr>
               <a:t>Second level</a:t>
             </a:r>
-            <a:endParaRPr lang="en-US" sz="2000" b="0" u="none" strike="noStrike">
-              <a:solidFill>
-                <a:schemeClr val="dk1"/>
-              </a:solidFill>
-              <a:effectLst/>
-              <a:uFillTx/>
-              <a:latin typeface="Calibri"/>
-            </a:endParaRPr>
           </a:p>
           <a:p>
             <a:pPr marL="1143000" lvl="2" indent="-228600" defTabSz="457200">
@@ -4343,14 +4124,6 @@
               </a:rPr>
               <a:t>Third level</a:t>
             </a:r>
-            <a:endParaRPr lang="en-US" sz="1800" b="0" u="none" strike="noStrike">
-              <a:solidFill>
-                <a:schemeClr val="dk1"/>
-              </a:solidFill>
-              <a:effectLst/>
-              <a:uFillTx/>
-              <a:latin typeface="Calibri"/>
-            </a:endParaRPr>
           </a:p>
           <a:p>
             <a:pPr marL="1600200" lvl="3" indent="-228600" defTabSz="457200">
@@ -4377,14 +4150,6 @@
               </a:rPr>
               <a:t>Fourth level</a:t>
             </a:r>
-            <a:endParaRPr lang="en-US" sz="1600" b="0" u="none" strike="noStrike">
-              <a:solidFill>
-                <a:schemeClr val="dk1"/>
-              </a:solidFill>
-              <a:effectLst/>
-              <a:uFillTx/>
-              <a:latin typeface="Calibri"/>
-            </a:endParaRPr>
           </a:p>
           <a:p>
             <a:pPr marL="2057400" lvl="4" indent="-228600" defTabSz="457200">
@@ -4411,14 +4176,6 @@
               </a:rPr>
               <a:t>Fifth level</a:t>
             </a:r>
-            <a:endParaRPr lang="en-US" sz="1600" b="0" u="none" strike="noStrike">
-              <a:solidFill>
-                <a:schemeClr val="dk1"/>
-              </a:solidFill>
-              <a:effectLst/>
-              <a:uFillTx/>
-              <a:latin typeface="Calibri"/>
-            </a:endParaRPr>
           </a:p>
         </p:txBody>
       </p:sp>
@@ -4446,9 +4203,10 @@
           </a:ln>
         </p:spPr>
         <p:txBody>
-          <a:bodyPr lIns="91440" rIns="91440" tIns="45720" bIns="45720" anchor="b">
+          <a:bodyPr lIns="91440" tIns="45720" rIns="91440" bIns="45720" anchor="b">
             <a:noAutofit/>
           </a:bodyPr>
+          <a:lstStyle/>
           <a:p>
             <a:pPr indent="0" defTabSz="457200">
               <a:lnSpc>
@@ -4459,7 +4217,7 @@
               </a:spcBef>
               <a:buNone/>
               <a:tabLst>
-                <a:tab algn="l" pos="0"/>
+                <a:tab pos="0" algn="l"/>
               </a:tabLst>
             </a:pPr>
             <a:r>
@@ -4508,9 +4266,10 @@
           </a:ln>
         </p:spPr>
         <p:txBody>
-          <a:bodyPr lIns="91440" rIns="91440" tIns="45720" bIns="45720" anchor="t">
+          <a:bodyPr lIns="91440" tIns="45720" rIns="91440" bIns="45720" anchor="t">
             <a:noAutofit/>
           </a:bodyPr>
+          <a:lstStyle/>
           <a:p>
             <a:pPr marL="343080" indent="-343080" defTabSz="457200">
               <a:lnSpc>
@@ -4536,14 +4295,6 @@
               </a:rPr>
               <a:t>Click to edit Master text styles</a:t>
             </a:r>
-            <a:endParaRPr lang="en-US" sz="2400" b="0" u="none" strike="noStrike">
-              <a:solidFill>
-                <a:schemeClr val="dk1"/>
-              </a:solidFill>
-              <a:effectLst/>
-              <a:uFillTx/>
-              <a:latin typeface="Calibri"/>
-            </a:endParaRPr>
           </a:p>
           <a:p>
             <a:pPr marL="743040" lvl="1" indent="-285840" defTabSz="457200">
@@ -4570,14 +4321,6 @@
               </a:rPr>
               <a:t>Second level</a:t>
             </a:r>
-            <a:endParaRPr lang="en-US" sz="2000" b="0" u="none" strike="noStrike">
-              <a:solidFill>
-                <a:schemeClr val="dk1"/>
-              </a:solidFill>
-              <a:effectLst/>
-              <a:uFillTx/>
-              <a:latin typeface="Calibri"/>
-            </a:endParaRPr>
           </a:p>
           <a:p>
             <a:pPr marL="1143000" lvl="2" indent="-228600" defTabSz="457200">
@@ -4604,14 +4347,6 @@
               </a:rPr>
               <a:t>Third level</a:t>
             </a:r>
-            <a:endParaRPr lang="en-US" sz="1800" b="0" u="none" strike="noStrike">
-              <a:solidFill>
-                <a:schemeClr val="dk1"/>
-              </a:solidFill>
-              <a:effectLst/>
-              <a:uFillTx/>
-              <a:latin typeface="Calibri"/>
-            </a:endParaRPr>
           </a:p>
           <a:p>
             <a:pPr marL="1600200" lvl="3" indent="-228600" defTabSz="457200">
@@ -4638,14 +4373,6 @@
               </a:rPr>
               <a:t>Fourth level</a:t>
             </a:r>
-            <a:endParaRPr lang="en-US" sz="1600" b="0" u="none" strike="noStrike">
-              <a:solidFill>
-                <a:schemeClr val="dk1"/>
-              </a:solidFill>
-              <a:effectLst/>
-              <a:uFillTx/>
-              <a:latin typeface="Calibri"/>
-            </a:endParaRPr>
           </a:p>
           <a:p>
             <a:pPr marL="2057400" lvl="4" indent="-228600" defTabSz="457200">
@@ -4672,14 +4399,6 @@
               </a:rPr>
               <a:t>Fifth level</a:t>
             </a:r>
-            <a:endParaRPr lang="en-US" sz="1600" b="0" u="none" strike="noStrike">
-              <a:solidFill>
-                <a:schemeClr val="dk1"/>
-              </a:solidFill>
-              <a:effectLst/>
-              <a:uFillTx/>
-              <a:latin typeface="Calibri"/>
-            </a:endParaRPr>
           </a:p>
         </p:txBody>
       </p:sp>
@@ -4707,7 +4426,7 @@
           </a:ln>
         </p:spPr>
         <p:txBody>
-          <a:bodyPr lIns="91440" rIns="91440" tIns="45720" bIns="45720" anchor="ctr">
+          <a:bodyPr lIns="91440" tIns="45720" rIns="91440" bIns="45720" anchor="ctr">
             <a:noAutofit/>
           </a:bodyPr>
           <a:lstStyle>
@@ -4783,7 +4502,7 @@
           </a:ln>
         </p:spPr>
         <p:txBody>
-          <a:bodyPr lIns="91440" rIns="91440" tIns="45720" bIns="45720" anchor="ctr">
+          <a:bodyPr lIns="91440" tIns="45720" rIns="91440" bIns="45720" anchor="ctr">
             <a:noAutofit/>
           </a:bodyPr>
           <a:lstStyle>
@@ -4814,14 +4533,6 @@
               </a:rPr>
               <a:t>&lt;footer&gt;</a:t>
             </a:r>
-            <a:endParaRPr lang="en-IN" sz="1400" b="0" u="none" strike="noStrike">
-              <a:solidFill>
-                <a:srgbClr val="000000"/>
-              </a:solidFill>
-              <a:effectLst/>
-              <a:uFillTx/>
-              <a:latin typeface="Times New Roman"/>
-            </a:endParaRPr>
           </a:p>
         </p:txBody>
       </p:sp>
@@ -4849,7 +4560,7 @@
           </a:ln>
         </p:spPr>
         <p:txBody>
-          <a:bodyPr lIns="91440" rIns="91440" tIns="45720" bIns="45720" anchor="ctr">
+          <a:bodyPr lIns="91440" tIns="45720" rIns="91440" bIns="45720" anchor="ctr">
             <a:noAutofit/>
           </a:bodyPr>
           <a:lstStyle>
@@ -4888,7 +4599,7 @@
                 <a:uFillTx/>
                 <a:latin typeface="Calibri"/>
               </a:rPr>
-              <a:t>&lt;number&gt;</a:t>
+              <a:t>‹#›</a:t>
             </a:fld>
             <a:endParaRPr lang="en-IN" sz="1200" b="0" u="none" strike="noStrike">
               <a:solidFill>
@@ -4903,17 +4614,21 @@
       </p:sp>
     </p:spTree>
   </p:cSld>
+  <p:clrMapOvr>
+    <a:masterClrMapping/>
+  </p:clrMapOvr>
 </p:sldLayout>
 </file>
 
 <file path=ppt/slideLayouts/slideLayout8.xml><?xml version="1.0" encoding="utf-8"?>
-<p:sldLayout xmlns:a="http://schemas.openxmlformats.org/drawingml/2006/main" xmlns:p="http://schemas.openxmlformats.org/presentationml/2006/main" xmlns:r="http://schemas.openxmlformats.org/officeDocument/2006/relationships" xmlns:p14="http://schemas.microsoft.com/office/powerpoint/2010/main" xmlns:p15="http://schemas.microsoft.com/office/powerpoint/2012/main" xmlns:mc="http://schemas.openxmlformats.org/markup-compatibility/2006" type="titleOnly" preserve="1">
+<p:sldLayout xmlns:a="http://schemas.openxmlformats.org/drawingml/2006/main" xmlns:r="http://schemas.openxmlformats.org/officeDocument/2006/relationships" xmlns:p="http://schemas.openxmlformats.org/presentationml/2006/main" type="titleOnly" preserve="1">
   <p:cSld name="Title Only">
     <p:bg>
       <p:bgPr>
         <a:solidFill>
-          <a:srgbClr val="ffffff"/>
+          <a:srgbClr val="FFFFFF"/>
         </a:solidFill>
+        <a:effectLst/>
       </p:bgPr>
     </p:bg>
     <p:spTree>
@@ -4954,9 +4669,10 @@
           </a:ln>
         </p:spPr>
         <p:txBody>
-          <a:bodyPr lIns="91440" rIns="91440" tIns="45720" bIns="45720" anchor="ctr">
+          <a:bodyPr lIns="91440" tIns="45720" rIns="91440" bIns="45720" anchor="ctr">
             <a:noAutofit/>
           </a:bodyPr>
+          <a:lstStyle/>
           <a:p>
             <a:pPr indent="0" algn="ctr" defTabSz="457200">
               <a:lnSpc>
@@ -4975,14 +4691,6 @@
               </a:rPr>
               <a:t>Click to edit Master title style</a:t>
             </a:r>
-            <a:endParaRPr lang="en-US" sz="4400" b="0" u="none" strike="noStrike">
-              <a:solidFill>
-                <a:schemeClr val="dk1"/>
-              </a:solidFill>
-              <a:effectLst/>
-              <a:uFillTx/>
-              <a:latin typeface="Calibri"/>
-            </a:endParaRPr>
           </a:p>
         </p:txBody>
       </p:sp>
@@ -5010,7 +4718,7 @@
           </a:ln>
         </p:spPr>
         <p:txBody>
-          <a:bodyPr lIns="91440" rIns="91440" tIns="45720" bIns="45720" anchor="ctr">
+          <a:bodyPr lIns="91440" tIns="45720" rIns="91440" bIns="45720" anchor="ctr">
             <a:noAutofit/>
           </a:bodyPr>
           <a:lstStyle>
@@ -5086,7 +4794,7 @@
           </a:ln>
         </p:spPr>
         <p:txBody>
-          <a:bodyPr lIns="91440" rIns="91440" tIns="45720" bIns="45720" anchor="ctr">
+          <a:bodyPr lIns="91440" tIns="45720" rIns="91440" bIns="45720" anchor="ctr">
             <a:noAutofit/>
           </a:bodyPr>
           <a:lstStyle>
@@ -5117,14 +4825,6 @@
               </a:rPr>
               <a:t>&lt;footer&gt;</a:t>
             </a:r>
-            <a:endParaRPr lang="en-IN" sz="1400" b="0" u="none" strike="noStrike">
-              <a:solidFill>
-                <a:srgbClr val="000000"/>
-              </a:solidFill>
-              <a:effectLst/>
-              <a:uFillTx/>
-              <a:latin typeface="Times New Roman"/>
-            </a:endParaRPr>
           </a:p>
         </p:txBody>
       </p:sp>
@@ -5152,7 +4852,7 @@
           </a:ln>
         </p:spPr>
         <p:txBody>
-          <a:bodyPr lIns="91440" rIns="91440" tIns="45720" bIns="45720" anchor="ctr">
+          <a:bodyPr lIns="91440" tIns="45720" rIns="91440" bIns="45720" anchor="ctr">
             <a:noAutofit/>
           </a:bodyPr>
           <a:lstStyle>
@@ -5191,7 +4891,7 @@
                 <a:uFillTx/>
                 <a:latin typeface="Calibri"/>
               </a:rPr>
-              <a:t>&lt;number&gt;</a:t>
+              <a:t>‹#›</a:t>
             </a:fld>
             <a:endParaRPr lang="en-IN" sz="1200" b="0" u="none" strike="noStrike">
               <a:solidFill>
@@ -5228,9 +4928,10 @@
           </a:ln>
         </p:spPr>
         <p:txBody>
-          <a:bodyPr lIns="0" rIns="0" tIns="0" bIns="0" anchor="t">
+          <a:bodyPr lIns="0" tIns="0" rIns="0" bIns="0" anchor="t">
             <a:normAutofit/>
           </a:bodyPr>
+          <a:lstStyle/>
           <a:p>
             <a:pPr marL="432000" indent="-324000">
               <a:spcBef>
@@ -5254,14 +4955,6 @@
               </a:rPr>
               <a:t>Click to edit the outline text format</a:t>
             </a:r>
-            <a:endParaRPr lang="en-US" sz="3200" b="0" u="none" strike="noStrike">
-              <a:solidFill>
-                <a:schemeClr val="dk1"/>
-              </a:solidFill>
-              <a:effectLst/>
-              <a:uFillTx/>
-              <a:latin typeface="Calibri"/>
-            </a:endParaRPr>
           </a:p>
           <a:p>
             <a:pPr marL="864000" lvl="1" indent="-324000">
@@ -5286,14 +4979,6 @@
               </a:rPr>
               <a:t>Second Outline Level</a:t>
             </a:r>
-            <a:endParaRPr lang="en-US" sz="2400" b="0" u="none" strike="noStrike">
-              <a:solidFill>
-                <a:schemeClr val="dk1"/>
-              </a:solidFill>
-              <a:effectLst/>
-              <a:uFillTx/>
-              <a:latin typeface="Calibri"/>
-            </a:endParaRPr>
           </a:p>
           <a:p>
             <a:pPr marL="1296000" lvl="2" indent="-288000">
@@ -5318,14 +5003,6 @@
               </a:rPr>
               <a:t>Third Outline Level</a:t>
             </a:r>
-            <a:endParaRPr lang="en-US" sz="2000" b="0" u="none" strike="noStrike">
-              <a:solidFill>
-                <a:schemeClr val="dk1"/>
-              </a:solidFill>
-              <a:effectLst/>
-              <a:uFillTx/>
-              <a:latin typeface="Calibri"/>
-            </a:endParaRPr>
           </a:p>
           <a:p>
             <a:pPr marL="1728000" lvl="3" indent="-216000">
@@ -5350,14 +5027,6 @@
               </a:rPr>
               <a:t>Fourth Outline Level</a:t>
             </a:r>
-            <a:endParaRPr lang="en-US" sz="2000" b="0" u="none" strike="noStrike">
-              <a:solidFill>
-                <a:schemeClr val="dk1"/>
-              </a:solidFill>
-              <a:effectLst/>
-              <a:uFillTx/>
-              <a:latin typeface="Calibri"/>
-            </a:endParaRPr>
           </a:p>
           <a:p>
             <a:pPr marL="2160000" lvl="4" indent="-216000">
@@ -5382,14 +5051,6 @@
               </a:rPr>
               <a:t>Fifth Outline Level</a:t>
             </a:r>
-            <a:endParaRPr lang="en-US" sz="2000" b="0" u="none" strike="noStrike">
-              <a:solidFill>
-                <a:schemeClr val="dk1"/>
-              </a:solidFill>
-              <a:effectLst/>
-              <a:uFillTx/>
-              <a:latin typeface="Calibri"/>
-            </a:endParaRPr>
           </a:p>
           <a:p>
             <a:pPr marL="2592000" lvl="5" indent="-216000">
@@ -5414,14 +5075,6 @@
               </a:rPr>
               <a:t>Sixth Outline Level</a:t>
             </a:r>
-            <a:endParaRPr lang="en-US" sz="2000" b="0" u="none" strike="noStrike">
-              <a:solidFill>
-                <a:schemeClr val="dk1"/>
-              </a:solidFill>
-              <a:effectLst/>
-              <a:uFillTx/>
-              <a:latin typeface="Calibri"/>
-            </a:endParaRPr>
           </a:p>
           <a:p>
             <a:pPr marL="3024000" lvl="6" indent="-216000">
@@ -5446,30 +5099,26 @@
               </a:rPr>
               <a:t>Seventh Outline Level</a:t>
             </a:r>
-            <a:endParaRPr lang="en-US" sz="2000" b="0" u="none" strike="noStrike">
-              <a:solidFill>
-                <a:schemeClr val="dk1"/>
-              </a:solidFill>
-              <a:effectLst/>
-              <a:uFillTx/>
-              <a:latin typeface="Calibri"/>
-            </a:endParaRPr>
           </a:p>
         </p:txBody>
       </p:sp>
     </p:spTree>
   </p:cSld>
+  <p:clrMapOvr>
+    <a:masterClrMapping/>
+  </p:clrMapOvr>
 </p:sldLayout>
 </file>
 
 <file path=ppt/slideLayouts/slideLayout9.xml><?xml version="1.0" encoding="utf-8"?>
-<p:sldLayout xmlns:a="http://schemas.openxmlformats.org/drawingml/2006/main" xmlns:p="http://schemas.openxmlformats.org/presentationml/2006/main" xmlns:r="http://schemas.openxmlformats.org/officeDocument/2006/relationships" xmlns:p14="http://schemas.microsoft.com/office/powerpoint/2010/main" xmlns:p15="http://schemas.microsoft.com/office/powerpoint/2012/main" xmlns:mc="http://schemas.openxmlformats.org/markup-compatibility/2006" type="blank" preserve="1">
+<p:sldLayout xmlns:a="http://schemas.openxmlformats.org/drawingml/2006/main" xmlns:r="http://schemas.openxmlformats.org/officeDocument/2006/relationships" xmlns:p="http://schemas.openxmlformats.org/presentationml/2006/main" type="blank" preserve="1">
   <p:cSld name="Blank">
     <p:bg>
       <p:bgPr>
         <a:solidFill>
-          <a:srgbClr val="ffffff"/>
+          <a:srgbClr val="FFFFFF"/>
         </a:solidFill>
+        <a:effectLst/>
       </p:bgPr>
     </p:bg>
     <p:spTree>
@@ -5510,7 +5159,7 @@
           </a:ln>
         </p:spPr>
         <p:txBody>
-          <a:bodyPr lIns="91440" rIns="91440" tIns="45720" bIns="45720" anchor="ctr">
+          <a:bodyPr lIns="91440" tIns="45720" rIns="91440" bIns="45720" anchor="ctr">
             <a:noAutofit/>
           </a:bodyPr>
           <a:lstStyle>
@@ -5586,7 +5235,7 @@
           </a:ln>
         </p:spPr>
         <p:txBody>
-          <a:bodyPr lIns="91440" rIns="91440" tIns="45720" bIns="45720" anchor="ctr">
+          <a:bodyPr lIns="91440" tIns="45720" rIns="91440" bIns="45720" anchor="ctr">
             <a:noAutofit/>
           </a:bodyPr>
           <a:lstStyle>
@@ -5617,14 +5266,6 @@
               </a:rPr>
               <a:t>&lt;footer&gt;</a:t>
             </a:r>
-            <a:endParaRPr lang="en-IN" sz="1400" b="0" u="none" strike="noStrike">
-              <a:solidFill>
-                <a:srgbClr val="000000"/>
-              </a:solidFill>
-              <a:effectLst/>
-              <a:uFillTx/>
-              <a:latin typeface="Times New Roman"/>
-            </a:endParaRPr>
           </a:p>
         </p:txBody>
       </p:sp>
@@ -5652,7 +5293,7 @@
           </a:ln>
         </p:spPr>
         <p:txBody>
-          <a:bodyPr lIns="91440" rIns="91440" tIns="45720" bIns="45720" anchor="ctr">
+          <a:bodyPr lIns="91440" tIns="45720" rIns="91440" bIns="45720" anchor="ctr">
             <a:noAutofit/>
           </a:bodyPr>
           <a:lstStyle>
@@ -5691,7 +5332,7 @@
                 <a:uFillTx/>
                 <a:latin typeface="Calibri"/>
               </a:rPr>
-              <a:t>&lt;number&gt;</a:t>
+              <a:t>‹#›</a:t>
             </a:fld>
             <a:endParaRPr lang="en-IN" sz="1200" b="0" u="none" strike="noStrike">
               <a:solidFill>
@@ -5706,12 +5347,20 @@
       </p:sp>
     </p:spTree>
   </p:cSld>
+  <p:clrMapOvr>
+    <a:masterClrMapping/>
+  </p:clrMapOvr>
 </p:sldLayout>
 </file>
 
 <file path=ppt/slideMasters/slideMaster1.xml><?xml version="1.0" encoding="utf-8"?>
-<p:sldMaster xmlns:a="http://schemas.openxmlformats.org/drawingml/2006/main" xmlns:p="http://schemas.openxmlformats.org/presentationml/2006/main" xmlns:r="http://schemas.openxmlformats.org/officeDocument/2006/relationships" xmlns:p14="http://schemas.microsoft.com/office/powerpoint/2010/main" xmlns:p15="http://schemas.microsoft.com/office/powerpoint/2012/main" xmlns:mc="http://schemas.openxmlformats.org/markup-compatibility/2006">
+<p:sldMaster xmlns:a="http://schemas.openxmlformats.org/drawingml/2006/main" xmlns:r="http://schemas.openxmlformats.org/officeDocument/2006/relationships" xmlns:p="http://schemas.openxmlformats.org/presentationml/2006/main">
   <p:cSld>
+    <p:bg>
+      <p:bgRef idx="1001">
+        <a:schemeClr val="bg1"/>
+      </p:bgRef>
+    </p:bg>
     <p:spTree>
       <p:nvGrpSpPr>
         <p:cNvPr id="1" name=""/>
@@ -5730,23 +5379,303 @@
   </p:cSld>
   <p:clrMap bg1="lt1" tx1="dk1" bg2="lt2" tx2="dk2" accent1="accent1" accent2="accent2" accent3="accent3" accent4="accent4" accent5="accent5" accent6="accent6" hlink="hlink" folHlink="folHlink"/>
   <p:sldLayoutIdLst>
-    <p:sldLayoutId id="2147483649" r:id="rId2"/>
-    <p:sldLayoutId id="2147483650" r:id="rId3"/>
-    <p:sldLayoutId id="2147483651" r:id="rId4"/>
-    <p:sldLayoutId id="2147483652" r:id="rId5"/>
-    <p:sldLayoutId id="2147483653" r:id="rId6"/>
-    <p:sldLayoutId id="2147483654" r:id="rId7"/>
-    <p:sldLayoutId id="2147483655" r:id="rId8"/>
-    <p:sldLayoutId id="2147483656" r:id="rId9"/>
-    <p:sldLayoutId id="2147483657" r:id="rId10"/>
-    <p:sldLayoutId id="2147483658" r:id="rId11"/>
-    <p:sldLayoutId id="2147483659" r:id="rId12"/>
+    <p:sldLayoutId id="2147483649" r:id="rId1"/>
+    <p:sldLayoutId id="2147483650" r:id="rId2"/>
+    <p:sldLayoutId id="2147483651" r:id="rId3"/>
+    <p:sldLayoutId id="2147483652" r:id="rId4"/>
+    <p:sldLayoutId id="2147483653" r:id="rId5"/>
+    <p:sldLayoutId id="2147483654" r:id="rId6"/>
+    <p:sldLayoutId id="2147483655" r:id="rId7"/>
+    <p:sldLayoutId id="2147483656" r:id="rId8"/>
+    <p:sldLayoutId id="2147483657" r:id="rId9"/>
+    <p:sldLayoutId id="2147483658" r:id="rId10"/>
+    <p:sldLayoutId id="2147483659" r:id="rId11"/>
   </p:sldLayoutIdLst>
+  <p:txStyles>
+    <p:titleStyle>
+      <a:lvl1pPr algn="l" defTabSz="914400" rtl="0" eaLnBrk="1" latinLnBrk="0" hangingPunct="1">
+        <a:lnSpc>
+          <a:spcPct val="90000"/>
+        </a:lnSpc>
+        <a:spcBef>
+          <a:spcPct val="0"/>
+        </a:spcBef>
+        <a:buNone/>
+        <a:defRPr sz="4400" kern="1200">
+          <a:solidFill>
+            <a:schemeClr val="tx1"/>
+          </a:solidFill>
+          <a:latin typeface="+mj-lt"/>
+          <a:ea typeface="+mj-ea"/>
+          <a:cs typeface="+mj-cs"/>
+        </a:defRPr>
+      </a:lvl1pPr>
+    </p:titleStyle>
+    <p:bodyStyle>
+      <a:lvl1pPr marL="228600" indent="-228600" algn="l" defTabSz="914400" rtl="0" eaLnBrk="1" latinLnBrk="0" hangingPunct="1">
+        <a:lnSpc>
+          <a:spcPct val="90000"/>
+        </a:lnSpc>
+        <a:spcBef>
+          <a:spcPts val="1000"/>
+        </a:spcBef>
+        <a:buFont typeface="Arial" panose="020B0604020202020204" pitchFamily="34" charset="0"/>
+        <a:buChar char="•"/>
+        <a:defRPr sz="2800" kern="1200">
+          <a:solidFill>
+            <a:schemeClr val="tx1"/>
+          </a:solidFill>
+          <a:latin typeface="+mn-lt"/>
+          <a:ea typeface="+mn-ea"/>
+          <a:cs typeface="+mn-cs"/>
+        </a:defRPr>
+      </a:lvl1pPr>
+      <a:lvl2pPr marL="685800" indent="-228600" algn="l" defTabSz="914400" rtl="0" eaLnBrk="1" latinLnBrk="0" hangingPunct="1">
+        <a:lnSpc>
+          <a:spcPct val="90000"/>
+        </a:lnSpc>
+        <a:spcBef>
+          <a:spcPts val="500"/>
+        </a:spcBef>
+        <a:buFont typeface="Arial" panose="020B0604020202020204" pitchFamily="34" charset="0"/>
+        <a:buChar char="•"/>
+        <a:defRPr sz="2400" kern="1200">
+          <a:solidFill>
+            <a:schemeClr val="tx1"/>
+          </a:solidFill>
+          <a:latin typeface="+mn-lt"/>
+          <a:ea typeface="+mn-ea"/>
+          <a:cs typeface="+mn-cs"/>
+        </a:defRPr>
+      </a:lvl2pPr>
+      <a:lvl3pPr marL="1143000" indent="-228600" algn="l" defTabSz="914400" rtl="0" eaLnBrk="1" latinLnBrk="0" hangingPunct="1">
+        <a:lnSpc>
+          <a:spcPct val="90000"/>
+        </a:lnSpc>
+        <a:spcBef>
+          <a:spcPts val="500"/>
+        </a:spcBef>
+        <a:buFont typeface="Arial" panose="020B0604020202020204" pitchFamily="34" charset="0"/>
+        <a:buChar char="•"/>
+        <a:defRPr sz="2000" kern="1200">
+          <a:solidFill>
+            <a:schemeClr val="tx1"/>
+          </a:solidFill>
+          <a:latin typeface="+mn-lt"/>
+          <a:ea typeface="+mn-ea"/>
+          <a:cs typeface="+mn-cs"/>
+        </a:defRPr>
+      </a:lvl3pPr>
+      <a:lvl4pPr marL="1600200" indent="-228600" algn="l" defTabSz="914400" rtl="0" eaLnBrk="1" latinLnBrk="0" hangingPunct="1">
+        <a:lnSpc>
+          <a:spcPct val="90000"/>
+        </a:lnSpc>
+        <a:spcBef>
+          <a:spcPts val="500"/>
+        </a:spcBef>
+        <a:buFont typeface="Arial" panose="020B0604020202020204" pitchFamily="34" charset="0"/>
+        <a:buChar char="•"/>
+        <a:defRPr sz="1800" kern="1200">
+          <a:solidFill>
+            <a:schemeClr val="tx1"/>
+          </a:solidFill>
+          <a:latin typeface="+mn-lt"/>
+          <a:ea typeface="+mn-ea"/>
+          <a:cs typeface="+mn-cs"/>
+        </a:defRPr>
+      </a:lvl4pPr>
+      <a:lvl5pPr marL="2057400" indent="-228600" algn="l" defTabSz="914400" rtl="0" eaLnBrk="1" latinLnBrk="0" hangingPunct="1">
+        <a:lnSpc>
+          <a:spcPct val="90000"/>
+        </a:lnSpc>
+        <a:spcBef>
+          <a:spcPts val="500"/>
+        </a:spcBef>
+        <a:buFont typeface="Arial" panose="020B0604020202020204" pitchFamily="34" charset="0"/>
+        <a:buChar char="•"/>
+        <a:defRPr sz="1800" kern="1200">
+          <a:solidFill>
+            <a:schemeClr val="tx1"/>
+          </a:solidFill>
+          <a:latin typeface="+mn-lt"/>
+          <a:ea typeface="+mn-ea"/>
+          <a:cs typeface="+mn-cs"/>
+        </a:defRPr>
+      </a:lvl5pPr>
+      <a:lvl6pPr marL="2514600" indent="-228600" algn="l" defTabSz="914400" rtl="0" eaLnBrk="1" latinLnBrk="0" hangingPunct="1">
+        <a:lnSpc>
+          <a:spcPct val="90000"/>
+        </a:lnSpc>
+        <a:spcBef>
+          <a:spcPts val="500"/>
+        </a:spcBef>
+        <a:buFont typeface="Arial" panose="020B0604020202020204" pitchFamily="34" charset="0"/>
+        <a:buChar char="•"/>
+        <a:defRPr sz="1800" kern="1200">
+          <a:solidFill>
+            <a:schemeClr val="tx1"/>
+          </a:solidFill>
+          <a:latin typeface="+mn-lt"/>
+          <a:ea typeface="+mn-ea"/>
+          <a:cs typeface="+mn-cs"/>
+        </a:defRPr>
+      </a:lvl6pPr>
+      <a:lvl7pPr marL="2971800" indent="-228600" algn="l" defTabSz="914400" rtl="0" eaLnBrk="1" latinLnBrk="0" hangingPunct="1">
+        <a:lnSpc>
+          <a:spcPct val="90000"/>
+        </a:lnSpc>
+        <a:spcBef>
+          <a:spcPts val="500"/>
+        </a:spcBef>
+        <a:buFont typeface="Arial" panose="020B0604020202020204" pitchFamily="34" charset="0"/>
+        <a:buChar char="•"/>
+        <a:defRPr sz="1800" kern="1200">
+          <a:solidFill>
+            <a:schemeClr val="tx1"/>
+          </a:solidFill>
+          <a:latin typeface="+mn-lt"/>
+          <a:ea typeface="+mn-ea"/>
+          <a:cs typeface="+mn-cs"/>
+        </a:defRPr>
+      </a:lvl7pPr>
+      <a:lvl8pPr marL="3429000" indent="-228600" algn="l" defTabSz="914400" rtl="0" eaLnBrk="1" latinLnBrk="0" hangingPunct="1">
+        <a:lnSpc>
+          <a:spcPct val="90000"/>
+        </a:lnSpc>
+        <a:spcBef>
+          <a:spcPts val="500"/>
+        </a:spcBef>
+        <a:buFont typeface="Arial" panose="020B0604020202020204" pitchFamily="34" charset="0"/>
+        <a:buChar char="•"/>
+        <a:defRPr sz="1800" kern="1200">
+          <a:solidFill>
+            <a:schemeClr val="tx1"/>
+          </a:solidFill>
+          <a:latin typeface="+mn-lt"/>
+          <a:ea typeface="+mn-ea"/>
+          <a:cs typeface="+mn-cs"/>
+        </a:defRPr>
+      </a:lvl8pPr>
+      <a:lvl9pPr marL="3886200" indent="-228600" algn="l" defTabSz="914400" rtl="0" eaLnBrk="1" latinLnBrk="0" hangingPunct="1">
+        <a:lnSpc>
+          <a:spcPct val="90000"/>
+        </a:lnSpc>
+        <a:spcBef>
+          <a:spcPts val="500"/>
+        </a:spcBef>
+        <a:buFont typeface="Arial" panose="020B0604020202020204" pitchFamily="34" charset="0"/>
+        <a:buChar char="•"/>
+        <a:defRPr sz="1800" kern="1200">
+          <a:solidFill>
+            <a:schemeClr val="tx1"/>
+          </a:solidFill>
+          <a:latin typeface="+mn-lt"/>
+          <a:ea typeface="+mn-ea"/>
+          <a:cs typeface="+mn-cs"/>
+        </a:defRPr>
+      </a:lvl9pPr>
+    </p:bodyStyle>
+    <p:otherStyle>
+      <a:defPPr>
+        <a:defRPr lang="en-US"/>
+      </a:defPPr>
+      <a:lvl1pPr marL="0" algn="l" defTabSz="914400" rtl="0" eaLnBrk="1" latinLnBrk="0" hangingPunct="1">
+        <a:defRPr sz="1800" kern="1200">
+          <a:solidFill>
+            <a:schemeClr val="tx1"/>
+          </a:solidFill>
+          <a:latin typeface="+mn-lt"/>
+          <a:ea typeface="+mn-ea"/>
+          <a:cs typeface="+mn-cs"/>
+        </a:defRPr>
+      </a:lvl1pPr>
+      <a:lvl2pPr marL="457200" algn="l" defTabSz="914400" rtl="0" eaLnBrk="1" latinLnBrk="0" hangingPunct="1">
+        <a:defRPr sz="1800" kern="1200">
+          <a:solidFill>
+            <a:schemeClr val="tx1"/>
+          </a:solidFill>
+          <a:latin typeface="+mn-lt"/>
+          <a:ea typeface="+mn-ea"/>
+          <a:cs typeface="+mn-cs"/>
+        </a:defRPr>
+      </a:lvl2pPr>
+      <a:lvl3pPr marL="914400" algn="l" defTabSz="914400" rtl="0" eaLnBrk="1" latinLnBrk="0" hangingPunct="1">
+        <a:defRPr sz="1800" kern="1200">
+          <a:solidFill>
+            <a:schemeClr val="tx1"/>
+          </a:solidFill>
+          <a:latin typeface="+mn-lt"/>
+          <a:ea typeface="+mn-ea"/>
+          <a:cs typeface="+mn-cs"/>
+        </a:defRPr>
+      </a:lvl3pPr>
+      <a:lvl4pPr marL="1371600" algn="l" defTabSz="914400" rtl="0" eaLnBrk="1" latinLnBrk="0" hangingPunct="1">
+        <a:defRPr sz="1800" kern="1200">
+          <a:solidFill>
+            <a:schemeClr val="tx1"/>
+          </a:solidFill>
+          <a:latin typeface="+mn-lt"/>
+          <a:ea typeface="+mn-ea"/>
+          <a:cs typeface="+mn-cs"/>
+        </a:defRPr>
+      </a:lvl4pPr>
+      <a:lvl5pPr marL="1828800" algn="l" defTabSz="914400" rtl="0" eaLnBrk="1" latinLnBrk="0" hangingPunct="1">
+        <a:defRPr sz="1800" kern="1200">
+          <a:solidFill>
+            <a:schemeClr val="tx1"/>
+          </a:solidFill>
+          <a:latin typeface="+mn-lt"/>
+          <a:ea typeface="+mn-ea"/>
+          <a:cs typeface="+mn-cs"/>
+        </a:defRPr>
+      </a:lvl5pPr>
+      <a:lvl6pPr marL="2286000" algn="l" defTabSz="914400" rtl="0" eaLnBrk="1" latinLnBrk="0" hangingPunct="1">
+        <a:defRPr sz="1800" kern="1200">
+          <a:solidFill>
+            <a:schemeClr val="tx1"/>
+          </a:solidFill>
+          <a:latin typeface="+mn-lt"/>
+          <a:ea typeface="+mn-ea"/>
+          <a:cs typeface="+mn-cs"/>
+        </a:defRPr>
+      </a:lvl6pPr>
+      <a:lvl7pPr marL="2743200" algn="l" defTabSz="914400" rtl="0" eaLnBrk="1" latinLnBrk="0" hangingPunct="1">
+        <a:defRPr sz="1800" kern="1200">
+          <a:solidFill>
+            <a:schemeClr val="tx1"/>
+          </a:solidFill>
+          <a:latin typeface="+mn-lt"/>
+          <a:ea typeface="+mn-ea"/>
+          <a:cs typeface="+mn-cs"/>
+        </a:defRPr>
+      </a:lvl7pPr>
+      <a:lvl8pPr marL="3200400" algn="l" defTabSz="914400" rtl="0" eaLnBrk="1" latinLnBrk="0" hangingPunct="1">
+        <a:defRPr sz="1800" kern="1200">
+          <a:solidFill>
+            <a:schemeClr val="tx1"/>
+          </a:solidFill>
+          <a:latin typeface="+mn-lt"/>
+          <a:ea typeface="+mn-ea"/>
+          <a:cs typeface="+mn-cs"/>
+        </a:defRPr>
+      </a:lvl8pPr>
+      <a:lvl9pPr marL="3657600" algn="l" defTabSz="914400" rtl="0" eaLnBrk="1" latinLnBrk="0" hangingPunct="1">
+        <a:defRPr sz="1800" kern="1200">
+          <a:solidFill>
+            <a:schemeClr val="tx1"/>
+          </a:solidFill>
+          <a:latin typeface="+mn-lt"/>
+          <a:ea typeface="+mn-ea"/>
+          <a:cs typeface="+mn-cs"/>
+        </a:defRPr>
+      </a:lvl9pPr>
+    </p:otherStyle>
+  </p:txStyles>
 </p:sldMaster>
 </file>
 
 <file path=ppt/slides/slide1.xml><?xml version="1.0" encoding="utf-8"?>
-<p:sld xmlns:a="http://schemas.openxmlformats.org/drawingml/2006/main" xmlns:p="http://schemas.openxmlformats.org/presentationml/2006/main" xmlns:r="http://schemas.openxmlformats.org/officeDocument/2006/relationships" xmlns:p14="http://schemas.microsoft.com/office/powerpoint/2010/main" xmlns:p15="http://schemas.microsoft.com/office/powerpoint/2012/main" xmlns:mc="http://schemas.openxmlformats.org/markup-compatibility/2006">
+<p:sld xmlns:a="http://schemas.openxmlformats.org/drawingml/2006/main" xmlns:r="http://schemas.openxmlformats.org/officeDocument/2006/relationships" xmlns:p="http://schemas.openxmlformats.org/presentationml/2006/main">
   <p:cSld>
     <p:spTree>
       <p:nvGrpSpPr>
@@ -5786,9 +5715,10 @@
           </a:ln>
         </p:spPr>
         <p:txBody>
-          <a:bodyPr lIns="91440" rIns="91440" tIns="45720" bIns="45720" anchor="ctr">
-            <a:normAutofit fontScale="85000" lnSpcReduction="19999"/>
+          <a:bodyPr lIns="91440" tIns="45720" rIns="91440" bIns="45720" anchor="ctr">
+            <a:normAutofit fontScale="90000"/>
           </a:bodyPr>
+          <a:lstStyle/>
           <a:p>
             <a:pPr indent="0" algn="ctr" defTabSz="457200">
               <a:lnSpc>
@@ -5797,7 +5727,7 @@
               <a:buNone/>
             </a:pPr>
             <a:r>
-              <a:rPr lang="en-US" sz="4400" b="0" u="none" strike="noStrike">
+              <a:rPr lang="en-US" sz="4400" b="0" u="none" strike="noStrike" dirty="0">
                 <a:solidFill>
                   <a:schemeClr val="dk1"/>
                 </a:solidFill>
@@ -5808,9 +5738,9 @@
               <a:t>Team &amp; Solution Overview</a:t>
             </a:r>
             <a:br>
-              <a:rPr sz="4400"/>
+              <a:rPr sz="4400" dirty="0"/>
             </a:br>
-            <a:endParaRPr lang="en-US" sz="4400" b="0" u="none" strike="noStrike">
+            <a:endParaRPr lang="en-US" sz="4400" b="0" u="none" strike="noStrike" dirty="0">
               <a:solidFill>
                 <a:schemeClr val="dk1"/>
               </a:solidFill>
@@ -5830,7 +5760,7 @@
         <p:spPr>
           <a:xfrm>
             <a:off x="731520" y="1097280"/>
-            <a:ext cx="5486040" cy="4571640"/>
+            <a:ext cx="9647682" cy="1629762"/>
           </a:xfrm>
           <a:prstGeom prst="rect">
             <a:avLst/>
@@ -5841,15 +5771,22 @@
           </a:ln>
         </p:spPr>
         <p:style>
-          <a:lnRef idx="0"/>
-          <a:fillRef idx="0"/>
-          <a:effectRef idx="0"/>
+          <a:lnRef idx="0">
+            <a:scrgbClr r="0" g="0" b="0"/>
+          </a:lnRef>
+          <a:fillRef idx="0">
+            <a:scrgbClr r="0" g="0" b="0"/>
+          </a:fillRef>
+          <a:effectRef idx="0">
+            <a:scrgbClr r="0" g="0" b="0"/>
+          </a:effectRef>
           <a:fontRef idx="minor"/>
         </p:style>
         <p:txBody>
-          <a:bodyPr wrap="none" lIns="90000" rIns="90000" tIns="45000" bIns="45000" anchor="t">
+          <a:bodyPr wrap="none" lIns="90000" tIns="45000" rIns="90000" bIns="45000" anchor="t">
             <a:spAutoFit/>
           </a:bodyPr>
+          <a:lstStyle/>
           <a:p>
             <a:pPr defTabSz="457200">
               <a:lnSpc>
@@ -5857,17 +5794,26 @@
               </a:lnSpc>
             </a:pPr>
             <a:r>
-              <a:rPr lang="en-US" sz="2000" b="0" u="none" strike="noStrike">
-                <a:solidFill>
-                  <a:schemeClr val="dk1"/>
-                </a:solidFill>
-                <a:effectLst/>
-                <a:uFillTx/>
-                <a:latin typeface="Calibri"/>
-              </a:rPr>
-              <a:t>• Team name</a:t>
-            </a:r>
-            <a:endParaRPr lang="en-IN" sz="2000" b="0" u="none" strike="noStrike">
+              <a:rPr lang="en-US" sz="2000" b="0" u="none" strike="noStrike" dirty="0">
+                <a:solidFill>
+                  <a:schemeClr val="dk1"/>
+                </a:solidFill>
+                <a:effectLst/>
+                <a:uFillTx/>
+                <a:latin typeface="Calibri"/>
+              </a:rPr>
+              <a:t>• Team </a:t>
+            </a:r>
+            <a:r>
+              <a:rPr lang="en-US" sz="2000" dirty="0">
+                <a:solidFill>
+                  <a:schemeClr val="dk1"/>
+                </a:solidFill>
+                <a:latin typeface="Calibri"/>
+              </a:rPr>
+              <a:t>name: Infinity</a:t>
+            </a:r>
+            <a:endParaRPr lang="en-IN" sz="2000" b="0" u="none" strike="noStrike" dirty="0">
               <a:solidFill>
                 <a:srgbClr val="000000"/>
               </a:solidFill>
@@ -5883,17 +5829,39 @@
               </a:lnSpc>
             </a:pPr>
             <a:r>
-              <a:rPr lang="en-US" sz="2000" b="0" u="none" strike="noStrike">
-                <a:solidFill>
-                  <a:schemeClr val="dk1"/>
-                </a:solidFill>
-                <a:effectLst/>
-                <a:uFillTx/>
-                <a:latin typeface="Calibri"/>
-              </a:rPr>
-              <a:t>• Members</a:t>
-            </a:r>
-            <a:endParaRPr lang="en-IN" sz="2000" b="0" u="none" strike="noStrike">
+              <a:rPr lang="en-US" sz="2000" b="0" u="none" strike="noStrike" dirty="0">
+                <a:solidFill>
+                  <a:schemeClr val="dk1"/>
+                </a:solidFill>
+                <a:effectLst/>
+                <a:uFillTx/>
+                <a:latin typeface="Calibri"/>
+              </a:rPr>
+              <a:t>• Members: Avinandan Patel, Aman Rajput, Me </a:t>
+            </a:r>
+            <a:r>
+              <a:rPr lang="en-US" sz="2000" b="0" u="none" strike="noStrike" dirty="0" err="1">
+                <a:solidFill>
+                  <a:schemeClr val="dk1"/>
+                </a:solidFill>
+                <a:effectLst/>
+                <a:uFillTx/>
+                <a:latin typeface="Calibri"/>
+              </a:rPr>
+              <a:t>Me</a:t>
+            </a:r>
+            <a:r>
+              <a:rPr lang="en-US" sz="2000" b="0" u="none" strike="noStrike" dirty="0">
+                <a:solidFill>
+                  <a:schemeClr val="dk1"/>
+                </a:solidFill>
+                <a:effectLst/>
+                <a:uFillTx/>
+                <a:latin typeface="Calibri"/>
+              </a:rPr>
+              <a:t> Khaing</a:t>
+            </a:r>
+            <a:endParaRPr lang="en-IN" sz="2000" b="0" u="none" strike="noStrike" dirty="0">
               <a:solidFill>
                 <a:srgbClr val="000000"/>
               </a:solidFill>
@@ -5909,17 +5877,17 @@
               </a:lnSpc>
             </a:pPr>
             <a:r>
-              <a:rPr lang="en-US" sz="2000" b="0" u="none" strike="noStrike">
-                <a:solidFill>
-                  <a:schemeClr val="dk1"/>
-                </a:solidFill>
-                <a:effectLst/>
-                <a:uFillTx/>
-                <a:latin typeface="Calibri"/>
-              </a:rPr>
-              <a:t>• Challenge area</a:t>
-            </a:r>
-            <a:endParaRPr lang="en-IN" sz="2000" b="0" u="none" strike="noStrike">
+              <a:rPr lang="en-US" sz="2000" b="0" u="none" strike="noStrike" dirty="0">
+                <a:solidFill>
+                  <a:schemeClr val="dk1"/>
+                </a:solidFill>
+                <a:effectLst/>
+                <a:uFillTx/>
+                <a:latin typeface="Calibri"/>
+              </a:rPr>
+              <a:t>• Challenge area: To predict the districts in which students of grade 4 to 6 may fall in future</a:t>
+            </a:r>
+            <a:endParaRPr lang="en-IN" sz="2000" b="0" u="none" strike="noStrike" dirty="0">
               <a:solidFill>
                 <a:srgbClr val="000000"/>
               </a:solidFill>
@@ -5935,17 +5903,17 @@
               </a:lnSpc>
             </a:pPr>
             <a:r>
-              <a:rPr lang="en-US" sz="2000" b="0" u="none" strike="noStrike">
-                <a:solidFill>
-                  <a:schemeClr val="dk1"/>
-                </a:solidFill>
-                <a:effectLst/>
-                <a:uFillTx/>
-                <a:latin typeface="Calibri"/>
-              </a:rPr>
-              <a:t>• One-line solution</a:t>
-            </a:r>
-            <a:endParaRPr lang="en-IN" sz="2000" b="0" u="none" strike="noStrike">
+              <a:rPr lang="en-US" sz="2000" b="0" u="none" strike="noStrike" dirty="0">
+                <a:solidFill>
+                  <a:schemeClr val="dk1"/>
+                </a:solidFill>
+                <a:effectLst/>
+                <a:uFillTx/>
+                <a:latin typeface="Calibri"/>
+              </a:rPr>
+              <a:t>• One-line solution : Create a prediction model</a:t>
+            </a:r>
+            <a:endParaRPr lang="en-IN" sz="2000" b="0" u="none" strike="noStrike" dirty="0">
               <a:solidFill>
                 <a:srgbClr val="000000"/>
               </a:solidFill>
@@ -5961,17 +5929,40 @@
               </a:lnSpc>
             </a:pPr>
             <a:r>
-              <a:rPr lang="en-US" sz="2000" b="0" u="none" strike="noStrike">
-                <a:solidFill>
-                  <a:schemeClr val="dk1"/>
-                </a:solidFill>
-                <a:effectLst/>
-                <a:uFillTx/>
-                <a:latin typeface="Calibri"/>
-              </a:rPr>
-              <a:t>• Contact</a:t>
-            </a:r>
-            <a:endParaRPr lang="en-IN" sz="2000" b="0" u="none" strike="noStrike">
+              <a:rPr lang="en-US" sz="2000" b="0" u="none" strike="noStrike" dirty="0">
+                <a:solidFill>
+                  <a:schemeClr val="dk1"/>
+                </a:solidFill>
+                <a:effectLst/>
+                <a:uFillTx/>
+                <a:latin typeface="Calibri"/>
+              </a:rPr>
+              <a:t>• Contact: </a:t>
+            </a:r>
+            <a:r>
+              <a:rPr lang="en-US" sz="2000" b="0" u="none" strike="noStrike" dirty="0">
+                <a:solidFill>
+                  <a:schemeClr val="dk1"/>
+                </a:solidFill>
+                <a:effectLst/>
+                <a:uFillTx/>
+                <a:latin typeface="Calibri"/>
+                <a:hlinkClick r:id="rId2"/>
+              </a:rPr>
+              <a:t>avinandan.patel@iiitb.ac.in</a:t>
+            </a:r>
+            <a:r>
+              <a:rPr lang="en-US" sz="2000" b="0" u="none" strike="noStrike" dirty="0">
+                <a:solidFill>
+                  <a:schemeClr val="dk1"/>
+                </a:solidFill>
+                <a:effectLst/>
+                <a:uFillTx/>
+                <a:latin typeface="Calibri"/>
+              </a:rPr>
+              <a:t> </a:t>
+            </a:r>
+            <a:endParaRPr lang="en-IN" sz="2000" b="0" u="none" strike="noStrike" dirty="0">
               <a:solidFill>
                 <a:srgbClr val="000000"/>
               </a:solidFill>
@@ -6016,19 +6007,14 @@
       </p:sp>
     </p:spTree>
   </p:cSld>
-  <mc:AlternateContent>
-    <mc:Choice Requires="p14">
-      <p:transition spd="slow" p14:dur="2000"/>
-    </mc:Choice>
-    <mc:Fallback>
-      <p:transition spd="slow"/>
-    </mc:Fallback>
-  </mc:AlternateContent>
+  <p:clrMapOvr>
+    <a:masterClrMapping/>
+  </p:clrMapOvr>
 </p:sld>
 </file>
 
 <file path=ppt/slides/slide10.xml><?xml version="1.0" encoding="utf-8"?>
-<p:sld xmlns:a="http://schemas.openxmlformats.org/drawingml/2006/main" xmlns:p="http://schemas.openxmlformats.org/presentationml/2006/main" xmlns:r="http://schemas.openxmlformats.org/officeDocument/2006/relationships" xmlns:p14="http://schemas.microsoft.com/office/powerpoint/2010/main" xmlns:p15="http://schemas.microsoft.com/office/powerpoint/2012/main" xmlns:mc="http://schemas.openxmlformats.org/markup-compatibility/2006">
+<p:sld xmlns:a="http://schemas.openxmlformats.org/drawingml/2006/main" xmlns:r="http://schemas.openxmlformats.org/officeDocument/2006/relationships" xmlns:p="http://schemas.openxmlformats.org/presentationml/2006/main">
   <p:cSld>
     <p:spTree>
       <p:nvGrpSpPr>
@@ -6068,9 +6054,10 @@
           </a:ln>
         </p:spPr>
         <p:txBody>
-          <a:bodyPr lIns="91440" rIns="91440" tIns="45720" bIns="45720" anchor="ctr">
-            <a:normAutofit fontScale="85000" lnSpcReduction="19999"/>
+          <a:bodyPr lIns="91440" tIns="45720" rIns="91440" bIns="45720" anchor="ctr">
+            <a:normAutofit fontScale="90000"/>
           </a:bodyPr>
+          <a:lstStyle/>
           <a:p>
             <a:pPr indent="0" algn="ctr" defTabSz="457200">
               <a:lnSpc>
@@ -6111,8 +6098,8 @@
         </p:nvSpPr>
         <p:spPr>
           <a:xfrm>
-            <a:off x="731520" y="1097280"/>
-            <a:ext cx="5486040" cy="4571640"/>
+            <a:off x="731521" y="1097280"/>
+            <a:ext cx="10378932" cy="1937538"/>
           </a:xfrm>
           <a:prstGeom prst="rect">
             <a:avLst/>
@@ -6123,15 +6110,22 @@
           </a:ln>
         </p:spPr>
         <p:style>
-          <a:lnRef idx="0"/>
-          <a:fillRef idx="0"/>
-          <a:effectRef idx="0"/>
+          <a:lnRef idx="0">
+            <a:scrgbClr r="0" g="0" b="0"/>
+          </a:lnRef>
+          <a:fillRef idx="0">
+            <a:scrgbClr r="0" g="0" b="0"/>
+          </a:fillRef>
+          <a:effectRef idx="0">
+            <a:scrgbClr r="0" g="0" b="0"/>
+          </a:effectRef>
           <a:fontRef idx="minor"/>
         </p:style>
         <p:txBody>
-          <a:bodyPr wrap="none" lIns="90000" rIns="90000" tIns="45000" bIns="45000" anchor="t">
+          <a:bodyPr wrap="square" lIns="90000" tIns="45000" rIns="90000" bIns="45000" anchor="t">
             <a:spAutoFit/>
           </a:bodyPr>
+          <a:lstStyle/>
           <a:p>
             <a:pPr defTabSz="457200">
               <a:lnSpc>
@@ -6139,17 +6133,17 @@
               </a:lnSpc>
             </a:pPr>
             <a:r>
-              <a:rPr lang="en-US" sz="2000" b="0" u="none" strike="noStrike">
-                <a:solidFill>
-                  <a:schemeClr val="dk1"/>
-                </a:solidFill>
-                <a:effectLst/>
-                <a:uFillTx/>
-                <a:latin typeface="Calibri"/>
-              </a:rPr>
-              <a:t>• Novelty</a:t>
-            </a:r>
-            <a:endParaRPr lang="en-IN" sz="2000" b="0" u="none" strike="noStrike">
+              <a:rPr lang="en-US" sz="2000" b="0" u="none" strike="noStrike" dirty="0">
+                <a:solidFill>
+                  <a:schemeClr val="dk1"/>
+                </a:solidFill>
+                <a:effectLst/>
+                <a:uFillTx/>
+                <a:latin typeface="Calibri"/>
+              </a:rPr>
+              <a:t>• Novelty: Using Machine Learning model to predict the future grades of the students depending on changes in the data</a:t>
+            </a:r>
+            <a:endParaRPr lang="en-IN" sz="2000" b="0" u="none" strike="noStrike" dirty="0">
               <a:solidFill>
                 <a:srgbClr val="000000"/>
               </a:solidFill>
@@ -6165,17 +6159,17 @@
               </a:lnSpc>
             </a:pPr>
             <a:r>
-              <a:rPr lang="en-US" sz="2000" b="0" u="none" strike="noStrike">
-                <a:solidFill>
-                  <a:schemeClr val="dk1"/>
-                </a:solidFill>
-                <a:effectLst/>
-                <a:uFillTx/>
-                <a:latin typeface="Calibri"/>
-              </a:rPr>
-              <a:t>• Scalability</a:t>
-            </a:r>
-            <a:endParaRPr lang="en-IN" sz="2000" b="0" u="none" strike="noStrike">
+              <a:rPr lang="en-US" sz="2000" b="0" u="none" strike="noStrike" dirty="0">
+                <a:solidFill>
+                  <a:schemeClr val="dk1"/>
+                </a:solidFill>
+                <a:effectLst/>
+                <a:uFillTx/>
+                <a:latin typeface="Calibri"/>
+              </a:rPr>
+              <a:t>• Scalability: Can be scaled to other states as well if the data is available.</a:t>
+            </a:r>
+            <a:endParaRPr lang="en-IN" sz="2000" b="0" u="none" strike="noStrike" dirty="0">
               <a:solidFill>
                 <a:srgbClr val="000000"/>
               </a:solidFill>
@@ -6191,17 +6185,17 @@
               </a:lnSpc>
             </a:pPr>
             <a:r>
-              <a:rPr lang="en-US" sz="2000" b="0" u="none" strike="noStrike">
-                <a:solidFill>
-                  <a:schemeClr val="dk1"/>
-                </a:solidFill>
-                <a:effectLst/>
-                <a:uFillTx/>
-                <a:latin typeface="Calibri"/>
-              </a:rPr>
-              <a:t>• Limitations</a:t>
-            </a:r>
-            <a:endParaRPr lang="en-IN" sz="2000" b="0" u="none" strike="noStrike">
+              <a:rPr lang="en-US" sz="2000" b="0" u="none" strike="noStrike" dirty="0">
+                <a:solidFill>
+                  <a:schemeClr val="dk1"/>
+                </a:solidFill>
+                <a:effectLst/>
+                <a:uFillTx/>
+                <a:latin typeface="Calibri"/>
+              </a:rPr>
+              <a:t>• Limitations: For better predictions the data fed into the model has to be updated at regular intervals</a:t>
+            </a:r>
+            <a:endParaRPr lang="en-IN" sz="2000" b="0" u="none" strike="noStrike" dirty="0">
               <a:solidFill>
                 <a:srgbClr val="000000"/>
               </a:solidFill>
@@ -6217,17 +6211,17 @@
               </a:lnSpc>
             </a:pPr>
             <a:r>
-              <a:rPr lang="en-US" sz="2000" b="0" u="none" strike="noStrike">
-                <a:solidFill>
-                  <a:schemeClr val="dk1"/>
-                </a:solidFill>
-                <a:effectLst/>
-                <a:uFillTx/>
-                <a:latin typeface="Calibri"/>
-              </a:rPr>
-              <a:t>• Expected impact</a:t>
-            </a:r>
-            <a:endParaRPr lang="en-IN" sz="2000" b="0" u="none" strike="noStrike">
+              <a:rPr lang="en-US" sz="2000" b="0" u="none" strike="noStrike" dirty="0">
+                <a:solidFill>
+                  <a:schemeClr val="dk1"/>
+                </a:solidFill>
+                <a:effectLst/>
+                <a:uFillTx/>
+                <a:latin typeface="Calibri"/>
+              </a:rPr>
+              <a:t>• Expected impact: Better planning and efficient use of resources. </a:t>
+            </a:r>
+            <a:endParaRPr lang="en-IN" sz="2000" b="0" u="none" strike="noStrike" dirty="0">
               <a:solidFill>
                 <a:srgbClr val="000000"/>
               </a:solidFill>
@@ -6272,19 +6266,14 @@
       </p:sp>
     </p:spTree>
   </p:cSld>
-  <mc:AlternateContent>
-    <mc:Choice Requires="p14">
-      <p:transition spd="slow" p14:dur="2000"/>
-    </mc:Choice>
-    <mc:Fallback>
-      <p:transition spd="slow"/>
-    </mc:Fallback>
-  </mc:AlternateContent>
+  <p:clrMapOvr>
+    <a:masterClrMapping/>
+  </p:clrMapOvr>
 </p:sld>
 </file>
 
 <file path=ppt/slides/slide11.xml><?xml version="1.0" encoding="utf-8"?>
-<p:sld xmlns:a="http://schemas.openxmlformats.org/drawingml/2006/main" xmlns:p="http://schemas.openxmlformats.org/presentationml/2006/main" xmlns:r="http://schemas.openxmlformats.org/officeDocument/2006/relationships" xmlns:p14="http://schemas.microsoft.com/office/powerpoint/2010/main" xmlns:p15="http://schemas.microsoft.com/office/powerpoint/2012/main" xmlns:mc="http://schemas.openxmlformats.org/markup-compatibility/2006">
+<p:sld xmlns:a="http://schemas.openxmlformats.org/drawingml/2006/main" xmlns:r="http://schemas.openxmlformats.org/officeDocument/2006/relationships" xmlns:p="http://schemas.openxmlformats.org/presentationml/2006/main">
   <p:cSld>
     <p:spTree>
       <p:nvGrpSpPr>
@@ -6324,9 +6313,10 @@
           </a:ln>
         </p:spPr>
         <p:txBody>
-          <a:bodyPr lIns="91440" rIns="91440" tIns="45720" bIns="45720" anchor="ctr">
-            <a:normAutofit fontScale="85000" lnSpcReduction="19999"/>
+          <a:bodyPr lIns="91440" tIns="45720" rIns="91440" bIns="45720" anchor="ctr">
+            <a:normAutofit fontScale="90000"/>
           </a:bodyPr>
+          <a:lstStyle/>
           <a:p>
             <a:pPr indent="0" algn="ctr" defTabSz="457200">
               <a:lnSpc>
@@ -6335,7 +6325,7 @@
               <a:buNone/>
             </a:pPr>
             <a:r>
-              <a:rPr lang="en-US" sz="4400" b="0" u="none" strike="noStrike">
+              <a:rPr lang="en-US" sz="4400" b="0" u="none" strike="noStrike" dirty="0">
                 <a:solidFill>
                   <a:schemeClr val="dk1"/>
                 </a:solidFill>
@@ -6346,9 +6336,9 @@
               <a:t>Conclusion &amp; Key Takeaways</a:t>
             </a:r>
             <a:br>
-              <a:rPr sz="4400"/>
+              <a:rPr sz="4400" dirty="0"/>
             </a:br>
-            <a:endParaRPr lang="en-US" sz="4400" b="0" u="none" strike="noStrike">
+            <a:endParaRPr lang="en-US" sz="4400" b="0" u="none" strike="noStrike" dirty="0">
               <a:solidFill>
                 <a:schemeClr val="dk1"/>
               </a:solidFill>
@@ -6367,8 +6357,8 @@
         </p:nvSpPr>
         <p:spPr>
           <a:xfrm>
-            <a:off x="731520" y="1097280"/>
-            <a:ext cx="5486040" cy="4571640"/>
+            <a:off x="731522" y="1097280"/>
+            <a:ext cx="9255857" cy="2860868"/>
           </a:xfrm>
           <a:prstGeom prst="rect">
             <a:avLst/>
@@ -6379,85 +6369,37 @@
           </a:ln>
         </p:spPr>
         <p:style>
-          <a:lnRef idx="0"/>
-          <a:fillRef idx="0"/>
-          <a:effectRef idx="0"/>
+          <a:lnRef idx="0">
+            <a:scrgbClr r="0" g="0" b="0"/>
+          </a:lnRef>
+          <a:fillRef idx="0">
+            <a:scrgbClr r="0" g="0" b="0"/>
+          </a:fillRef>
+          <a:effectRef idx="0">
+            <a:scrgbClr r="0" g="0" b="0"/>
+          </a:effectRef>
           <a:fontRef idx="minor"/>
         </p:style>
         <p:txBody>
-          <a:bodyPr wrap="none" lIns="90000" rIns="90000" tIns="45000" bIns="45000" anchor="t">
+          <a:bodyPr wrap="square" lIns="90000" tIns="45000" rIns="90000" bIns="45000" anchor="t">
             <a:spAutoFit/>
           </a:bodyPr>
-          <a:p>
-            <a:pPr defTabSz="457200">
-              <a:lnSpc>
-                <a:spcPct val="100000"/>
-              </a:lnSpc>
-            </a:pPr>
-            <a:r>
-              <a:rPr lang="en-US" sz="2000" b="0" u="none" strike="noStrike">
-                <a:solidFill>
-                  <a:schemeClr val="dk1"/>
-                </a:solidFill>
-                <a:effectLst/>
-                <a:uFillTx/>
-                <a:latin typeface="Calibri"/>
-              </a:rPr>
-              <a:t>• Top takeaways</a:t>
-            </a:r>
-            <a:endParaRPr lang="en-IN" sz="2000" b="0" u="none" strike="noStrike">
-              <a:solidFill>
-                <a:srgbClr val="000000"/>
-              </a:solidFill>
-              <a:effectLst/>
-              <a:uFillTx/>
-              <a:latin typeface="Arial"/>
-            </a:endParaRPr>
-          </a:p>
-          <a:p>
-            <a:pPr defTabSz="457200">
-              <a:lnSpc>
-                <a:spcPct val="100000"/>
-              </a:lnSpc>
-            </a:pPr>
-            <a:r>
-              <a:rPr lang="en-US" sz="2000" b="0" u="none" strike="noStrike">
-                <a:solidFill>
-                  <a:schemeClr val="dk1"/>
-                </a:solidFill>
-                <a:effectLst/>
-                <a:uFillTx/>
-                <a:latin typeface="Calibri"/>
-              </a:rPr>
-              <a:t>• Next steps</a:t>
-            </a:r>
-            <a:endParaRPr lang="en-IN" sz="2000" b="0" u="none" strike="noStrike">
-              <a:solidFill>
-                <a:srgbClr val="000000"/>
-              </a:solidFill>
-              <a:effectLst/>
-              <a:uFillTx/>
-              <a:latin typeface="Arial"/>
-            </a:endParaRPr>
-          </a:p>
-          <a:p>
-            <a:pPr defTabSz="457200">
-              <a:lnSpc>
-                <a:spcPct val="100000"/>
-              </a:lnSpc>
-            </a:pPr>
-            <a:r>
-              <a:rPr lang="en-US" sz="2000" b="0" u="none" strike="noStrike">
-                <a:solidFill>
-                  <a:schemeClr val="dk1"/>
-                </a:solidFill>
-                <a:effectLst/>
-                <a:uFillTx/>
-                <a:latin typeface="Calibri"/>
-              </a:rPr>
-              <a:t>• Thank you</a:t>
-            </a:r>
-            <a:endParaRPr lang="en-IN" sz="2000" b="0" u="none" strike="noStrike">
+          <a:lstStyle/>
+          <a:p>
+            <a:pPr algn="just" defTabSz="457200">
+              <a:lnSpc>
+                <a:spcPct val="100000"/>
+              </a:lnSpc>
+            </a:pPr>
+            <a:r>
+              <a:rPr lang="en-US" sz="2000" dirty="0">
+                <a:solidFill>
+                  <a:schemeClr val="dk1"/>
+                </a:solidFill>
+              </a:rPr>
+              <a:t>This project successfully tackled the major challenge of identifying educational disparities across different regions. First, we created a flexible strategy that could be adjusted early on as needed. Using multi-class classification and feature selection validation (ANOVA and Chi-Square), this model turned complex socio-economic and infrastructure data into defined “At-Risk” levels. These risk levels range from Low to Severe, clearly showing where students need special attention. Finally, this predictive model can serve as an essential tool for data-driven management, helping to properly allocate resources, retain the best teachers, and improve student performance fairly across schools with different circumstances, all based on international standards.</a:t>
+            </a:r>
+            <a:endParaRPr lang="en-IN" sz="2000" b="0" u="none" strike="noStrike" dirty="0">
               <a:solidFill>
                 <a:srgbClr val="000000"/>
               </a:solidFill>
@@ -6502,19 +6444,14 @@
       </p:sp>
     </p:spTree>
   </p:cSld>
-  <mc:AlternateContent>
-    <mc:Choice Requires="p14">
-      <p:transition spd="slow" p14:dur="2000"/>
-    </mc:Choice>
-    <mc:Fallback>
-      <p:transition spd="slow"/>
-    </mc:Fallback>
-  </mc:AlternateContent>
+  <p:clrMapOvr>
+    <a:masterClrMapping/>
+  </p:clrMapOvr>
 </p:sld>
 </file>
 
 <file path=ppt/slides/slide2.xml><?xml version="1.0" encoding="utf-8"?>
-<p:sld xmlns:a="http://schemas.openxmlformats.org/drawingml/2006/main" xmlns:p="http://schemas.openxmlformats.org/presentationml/2006/main" xmlns:r="http://schemas.openxmlformats.org/officeDocument/2006/relationships" xmlns:p14="http://schemas.microsoft.com/office/powerpoint/2010/main" xmlns:p15="http://schemas.microsoft.com/office/powerpoint/2012/main" xmlns:mc="http://schemas.openxmlformats.org/markup-compatibility/2006">
+<p:sld xmlns:a="http://schemas.openxmlformats.org/drawingml/2006/main" xmlns:r="http://schemas.openxmlformats.org/officeDocument/2006/relationships" xmlns:p="http://schemas.openxmlformats.org/presentationml/2006/main">
   <p:cSld>
     <p:spTree>
       <p:nvGrpSpPr>
@@ -6554,9 +6491,10 @@
           </a:ln>
         </p:spPr>
         <p:txBody>
-          <a:bodyPr lIns="91440" rIns="91440" tIns="45720" bIns="45720" anchor="ctr">
-            <a:normAutofit fontScale="85000" lnSpcReduction="19999"/>
+          <a:bodyPr lIns="91440" tIns="45720" rIns="91440" bIns="45720" anchor="ctr">
+            <a:normAutofit fontScale="90000"/>
           </a:bodyPr>
+          <a:lstStyle/>
           <a:p>
             <a:pPr indent="0" algn="ctr" defTabSz="457200">
               <a:lnSpc>
@@ -6598,7 +6536,7 @@
         <p:spPr>
           <a:xfrm>
             <a:off x="731520" y="1097280"/>
-            <a:ext cx="5486040" cy="4571640"/>
+            <a:ext cx="11271204" cy="1629762"/>
           </a:xfrm>
           <a:prstGeom prst="rect">
             <a:avLst/>
@@ -6609,15 +6547,22 @@
           </a:ln>
         </p:spPr>
         <p:style>
-          <a:lnRef idx="0"/>
-          <a:fillRef idx="0"/>
-          <a:effectRef idx="0"/>
+          <a:lnRef idx="0">
+            <a:scrgbClr r="0" g="0" b="0"/>
+          </a:lnRef>
+          <a:fillRef idx="0">
+            <a:scrgbClr r="0" g="0" b="0"/>
+          </a:fillRef>
+          <a:effectRef idx="0">
+            <a:scrgbClr r="0" g="0" b="0"/>
+          </a:effectRef>
           <a:fontRef idx="minor"/>
         </p:style>
         <p:txBody>
-          <a:bodyPr wrap="none" lIns="90000" rIns="90000" tIns="45000" bIns="45000" anchor="t">
+          <a:bodyPr wrap="none" lIns="90000" tIns="45000" rIns="90000" bIns="45000" anchor="t">
             <a:spAutoFit/>
           </a:bodyPr>
+          <a:lstStyle/>
           <a:p>
             <a:pPr defTabSz="457200">
               <a:lnSpc>
@@ -6625,17 +6570,17 @@
               </a:lnSpc>
             </a:pPr>
             <a:r>
-              <a:rPr lang="en-US" sz="2000" b="0" u="none" strike="noStrike">
-                <a:solidFill>
-                  <a:schemeClr val="dk1"/>
-                </a:solidFill>
-                <a:effectLst/>
-                <a:uFillTx/>
-                <a:latin typeface="Calibri"/>
-              </a:rPr>
-              <a:t>• Educational challenge</a:t>
-            </a:r>
-            <a:endParaRPr lang="en-IN" sz="2000" b="0" u="none" strike="noStrike">
+              <a:rPr lang="en-US" sz="2000" b="0" u="none" strike="noStrike" dirty="0">
+                <a:solidFill>
+                  <a:schemeClr val="dk1"/>
+                </a:solidFill>
+                <a:effectLst/>
+                <a:uFillTx/>
+                <a:latin typeface="Calibri"/>
+              </a:rPr>
+              <a:t>• Educational challenge: To find out which districts need educational reforms in the future.</a:t>
+            </a:r>
+            <a:endParaRPr lang="en-IN" sz="2000" b="0" u="none" strike="noStrike" dirty="0">
               <a:solidFill>
                 <a:srgbClr val="000000"/>
               </a:solidFill>
@@ -6651,17 +6596,17 @@
               </a:lnSpc>
             </a:pPr>
             <a:r>
-              <a:rPr lang="en-US" sz="2000" b="0" u="none" strike="noStrike">
-                <a:solidFill>
-                  <a:schemeClr val="dk1"/>
-                </a:solidFill>
-                <a:effectLst/>
-                <a:uFillTx/>
-                <a:latin typeface="Calibri"/>
-              </a:rPr>
-              <a:t>• Objectives</a:t>
-            </a:r>
-            <a:endParaRPr lang="en-IN" sz="2000" b="0" u="none" strike="noStrike">
+              <a:rPr lang="en-US" sz="2000" b="0" u="none" strike="noStrike" dirty="0">
+                <a:solidFill>
+                  <a:schemeClr val="dk1"/>
+                </a:solidFill>
+                <a:effectLst/>
+                <a:uFillTx/>
+                <a:latin typeface="Calibri"/>
+              </a:rPr>
+              <a:t>• Objectives: To generate predictive model for early intervention.</a:t>
+            </a:r>
+            <a:endParaRPr lang="en-IN" sz="2000" b="0" u="none" strike="noStrike" dirty="0">
               <a:solidFill>
                 <a:srgbClr val="000000"/>
               </a:solidFill>
@@ -6677,24 +6622,16 @@
               </a:lnSpc>
             </a:pPr>
             <a:r>
-              <a:rPr lang="en-US" sz="2000" b="0" u="none" strike="noStrike">
-                <a:solidFill>
-                  <a:schemeClr val="dk1"/>
-                </a:solidFill>
-                <a:effectLst/>
-                <a:uFillTx/>
-                <a:latin typeface="Calibri"/>
-              </a:rPr>
-              <a:t>• Key questions</a:t>
-            </a:r>
-            <a:endParaRPr lang="en-IN" sz="2000" b="0" u="none" strike="noStrike">
-              <a:solidFill>
-                <a:srgbClr val="000000"/>
-              </a:solidFill>
-              <a:effectLst/>
-              <a:uFillTx/>
-              <a:latin typeface="Arial"/>
-            </a:endParaRPr>
+              <a:rPr lang="en-US" sz="2000" b="0" u="none" strike="noStrike" dirty="0">
+                <a:solidFill>
+                  <a:schemeClr val="dk1"/>
+                </a:solidFill>
+                <a:effectLst/>
+                <a:uFillTx/>
+                <a:latin typeface="Calibri"/>
+              </a:rPr>
+              <a:t>• Key questions: Do students in a particular district needs help with education.</a:t>
+            </a:r>
           </a:p>
           <a:p>
             <a:pPr defTabSz="457200">
@@ -6703,17 +6640,33 @@
               </a:lnSpc>
             </a:pPr>
             <a:r>
-              <a:rPr lang="en-US" sz="2000" b="0" u="none" strike="noStrike">
-                <a:solidFill>
-                  <a:schemeClr val="dk1"/>
-                </a:solidFill>
-                <a:effectLst/>
-                <a:uFillTx/>
-                <a:latin typeface="Calibri"/>
-              </a:rPr>
-              <a:t>• Why it matters</a:t>
-            </a:r>
-            <a:endParaRPr lang="en-IN" sz="2000" b="0" u="none" strike="noStrike">
+              <a:rPr lang="en-US" sz="2000" b="0" u="none" strike="noStrike" dirty="0">
+                <a:solidFill>
+                  <a:schemeClr val="dk1"/>
+                </a:solidFill>
+                <a:effectLst/>
+                <a:uFillTx/>
+                <a:latin typeface="Calibri"/>
+              </a:rPr>
+              <a:t>• Why it matters: For proper planning of distribution of resources, allocation of teachers and evaluation of </a:t>
+            </a:r>
+          </a:p>
+          <a:p>
+            <a:pPr defTabSz="457200">
+              <a:lnSpc>
+                <a:spcPct val="100000"/>
+              </a:lnSpc>
+            </a:pPr>
+            <a:r>
+              <a:rPr lang="en-US" sz="2000" dirty="0">
+                <a:solidFill>
+                  <a:schemeClr val="dk1"/>
+                </a:solidFill>
+                <a:latin typeface="Calibri"/>
+              </a:rPr>
+              <a:t>students’ performance.</a:t>
+            </a:r>
+            <a:endParaRPr lang="en-IN" sz="2000" b="0" u="none" strike="noStrike" dirty="0">
               <a:solidFill>
                 <a:srgbClr val="000000"/>
               </a:solidFill>
@@ -6758,19 +6711,14 @@
       </p:sp>
     </p:spTree>
   </p:cSld>
-  <mc:AlternateContent>
-    <mc:Choice Requires="p14">
-      <p:transition spd="slow" p14:dur="2000"/>
-    </mc:Choice>
-    <mc:Fallback>
-      <p:transition spd="slow"/>
-    </mc:Fallback>
-  </mc:AlternateContent>
+  <p:clrMapOvr>
+    <a:masterClrMapping/>
+  </p:clrMapOvr>
 </p:sld>
 </file>
 
 <file path=ppt/slides/slide3.xml><?xml version="1.0" encoding="utf-8"?>
-<p:sld xmlns:a="http://schemas.openxmlformats.org/drawingml/2006/main" xmlns:p="http://schemas.openxmlformats.org/presentationml/2006/main" xmlns:r="http://schemas.openxmlformats.org/officeDocument/2006/relationships" xmlns:p14="http://schemas.microsoft.com/office/powerpoint/2010/main" xmlns:p15="http://schemas.microsoft.com/office/powerpoint/2012/main" xmlns:mc="http://schemas.openxmlformats.org/markup-compatibility/2006">
+<p:sld xmlns:a="http://schemas.openxmlformats.org/drawingml/2006/main" xmlns:r="http://schemas.openxmlformats.org/officeDocument/2006/relationships" xmlns:p="http://schemas.openxmlformats.org/presentationml/2006/main">
   <p:cSld>
     <p:spTree>
       <p:nvGrpSpPr>
@@ -6810,9 +6758,10 @@
           </a:ln>
         </p:spPr>
         <p:txBody>
-          <a:bodyPr lIns="91440" rIns="91440" tIns="45720" bIns="45720" anchor="ctr">
-            <a:normAutofit fontScale="85000" lnSpcReduction="19999"/>
+          <a:bodyPr lIns="91440" tIns="45720" rIns="91440" bIns="45720" anchor="ctr">
+            <a:normAutofit fontScale="90000"/>
           </a:bodyPr>
+          <a:lstStyle/>
           <a:p>
             <a:pPr indent="0" algn="ctr" defTabSz="457200">
               <a:lnSpc>
@@ -6821,7 +6770,7 @@
               <a:buNone/>
             </a:pPr>
             <a:r>
-              <a:rPr lang="en-US" sz="4400" b="0" u="none" strike="noStrike">
+              <a:rPr lang="en-US" sz="4400" b="0" u="none" strike="noStrike" dirty="0">
                 <a:solidFill>
                   <a:schemeClr val="dk1"/>
                 </a:solidFill>
@@ -6832,9 +6781,9 @@
               <a:t>Dataset Understanding</a:t>
             </a:r>
             <a:br>
-              <a:rPr sz="4400"/>
+              <a:rPr sz="4400" dirty="0"/>
             </a:br>
-            <a:endParaRPr lang="en-US" sz="4400" b="0" u="none" strike="noStrike">
+            <a:endParaRPr lang="en-US" sz="4400" b="0" u="none" strike="noStrike" dirty="0">
               <a:solidFill>
                 <a:schemeClr val="dk1"/>
               </a:solidFill>
@@ -6853,8 +6802,8 @@
         </p:nvSpPr>
         <p:spPr>
           <a:xfrm>
-            <a:off x="731520" y="1097280"/>
-            <a:ext cx="5486040" cy="4571640"/>
+            <a:off x="731521" y="1097280"/>
+            <a:ext cx="10904470" cy="5938634"/>
           </a:xfrm>
           <a:prstGeom prst="rect">
             <a:avLst/>
@@ -6865,23 +6814,30 @@
           </a:ln>
         </p:spPr>
         <p:style>
-          <a:lnRef idx="0"/>
-          <a:fillRef idx="0"/>
-          <a:effectRef idx="0"/>
+          <a:lnRef idx="0">
+            <a:scrgbClr r="0" g="0" b="0"/>
+          </a:lnRef>
+          <a:fillRef idx="0">
+            <a:scrgbClr r="0" g="0" b="0"/>
+          </a:fillRef>
+          <a:effectRef idx="0">
+            <a:scrgbClr r="0" g="0" b="0"/>
+          </a:effectRef>
           <a:fontRef idx="minor"/>
         </p:style>
         <p:txBody>
-          <a:bodyPr wrap="none" lIns="90000" rIns="90000" tIns="45000" bIns="45000" anchor="t">
+          <a:bodyPr wrap="square" lIns="90000" tIns="45000" rIns="90000" bIns="45000" anchor="t">
             <a:spAutoFit/>
           </a:bodyPr>
-          <a:p>
-            <a:pPr defTabSz="457200">
-              <a:lnSpc>
-                <a:spcPct val="100000"/>
-              </a:lnSpc>
-            </a:pPr>
-            <a:r>
-              <a:rPr lang="en-US" sz="2000" b="0" u="none" strike="noStrike">
+          <a:lstStyle/>
+          <a:p>
+            <a:pPr algn="just" defTabSz="457200">
+              <a:lnSpc>
+                <a:spcPct val="100000"/>
+              </a:lnSpc>
+            </a:pPr>
+            <a:r>
+              <a:rPr lang="en-US" sz="2000" b="0" u="none" strike="noStrike" dirty="0">
                 <a:solidFill>
                   <a:schemeClr val="dk1"/>
                 </a:solidFill>
@@ -6891,7 +6847,40 @@
               </a:rPr>
               <a:t>• Dataset summary</a:t>
             </a:r>
-            <a:endParaRPr lang="en-IN" sz="2000" b="0" u="none" strike="noStrike">
+            <a:endParaRPr lang="en-US" sz="2000" dirty="0">
+              <a:solidFill>
+                <a:schemeClr val="dk1"/>
+              </a:solidFill>
+              <a:latin typeface="Calibri"/>
+            </a:endParaRPr>
+          </a:p>
+          <a:p>
+            <a:pPr algn="just" defTabSz="457200">
+              <a:lnSpc>
+                <a:spcPct val="100000"/>
+              </a:lnSpc>
+            </a:pPr>
+            <a:r>
+              <a:rPr lang="en-US" sz="2000" b="0" u="none" strike="noStrike" dirty="0">
+                <a:solidFill>
+                  <a:schemeClr val="dk1"/>
+                </a:solidFill>
+                <a:effectLst/>
+                <a:uFillTx/>
+                <a:latin typeface="Calibri"/>
+              </a:rPr>
+              <a:t>	1. </a:t>
+            </a:r>
+            <a:r>
+              <a:rPr lang="en-US" sz="2000" dirty="0">
+                <a:solidFill>
+                  <a:schemeClr val="dk1"/>
+                </a:solidFill>
+                <a:latin typeface="Calibri"/>
+              </a:rPr>
+              <a:t>Secondary dataset: master_features.csv</a:t>
+            </a:r>
+            <a:endParaRPr lang="en-IN" sz="2000" b="0" u="none" strike="noStrike" dirty="0">
               <a:solidFill>
                 <a:srgbClr val="000000"/>
               </a:solidFill>
@@ -6901,23 +6890,195 @@
             </a:endParaRPr>
           </a:p>
           <a:p>
+            <a:pPr algn="just" defTabSz="457200">
+              <a:lnSpc>
+                <a:spcPct val="100000"/>
+              </a:lnSpc>
+            </a:pPr>
+            <a:r>
+              <a:rPr lang="en-US" sz="2000" b="0" u="none" strike="noStrike" dirty="0">
+                <a:solidFill>
+                  <a:schemeClr val="dk1"/>
+                </a:solidFill>
+                <a:effectLst/>
+                <a:uFillTx/>
+                <a:latin typeface="Calibri"/>
+              </a:rPr>
+              <a:t>• Variables</a:t>
+            </a:r>
+          </a:p>
+          <a:p>
+            <a:pPr algn="just" defTabSz="457200">
+              <a:lnSpc>
+                <a:spcPct val="100000"/>
+              </a:lnSpc>
+            </a:pPr>
+            <a:r>
+              <a:rPr lang="en-US" sz="2000" dirty="0">
+                <a:solidFill>
+                  <a:schemeClr val="dk1"/>
+                </a:solidFill>
+                <a:latin typeface="Calibri"/>
+              </a:rPr>
+              <a:t>	1. Demographics(Census 2011): population, %SC/%ST, sex ratio, literacy rate 	(total/male/female),%rural population, work participation rate, occupation shares (cultivator/</a:t>
+            </a:r>
+            <a:r>
+              <a:rPr lang="en-US" sz="2000" dirty="0" err="1">
+                <a:solidFill>
+                  <a:schemeClr val="dk1"/>
+                </a:solidFill>
+                <a:latin typeface="Calibri"/>
+              </a:rPr>
+              <a:t>agri</a:t>
+            </a:r>
+            <a:r>
+              <a:rPr lang="en-US" sz="2000" dirty="0">
+                <a:solidFill>
+                  <a:schemeClr val="dk1"/>
+                </a:solidFill>
+                <a:latin typeface="Calibri"/>
+              </a:rPr>
+              <a:t> 	</a:t>
+            </a:r>
+            <a:r>
+              <a:rPr lang="en-US" sz="2000" dirty="0" err="1">
+                <a:solidFill>
+                  <a:schemeClr val="dk1"/>
+                </a:solidFill>
+                <a:latin typeface="Calibri"/>
+              </a:rPr>
+              <a:t>labourer</a:t>
+            </a:r>
+            <a:r>
+              <a:rPr lang="en-US" sz="2000" dirty="0">
+                <a:solidFill>
+                  <a:schemeClr val="dk1"/>
+                </a:solidFill>
+                <a:latin typeface="Calibri"/>
+              </a:rPr>
+              <a:t>/household industry/other)</a:t>
+            </a:r>
+          </a:p>
+          <a:p>
+            <a:pPr algn="just" defTabSz="457200">
+              <a:lnSpc>
+                <a:spcPct val="100000"/>
+              </a:lnSpc>
+            </a:pPr>
+            <a:endParaRPr lang="en-US" sz="2000" dirty="0">
+              <a:solidFill>
+                <a:schemeClr val="dk1"/>
+              </a:solidFill>
+              <a:latin typeface="Calibri"/>
+            </a:endParaRPr>
+          </a:p>
+          <a:p>
+            <a:pPr algn="just" defTabSz="457200">
+              <a:lnSpc>
+                <a:spcPct val="100000"/>
+              </a:lnSpc>
+            </a:pPr>
+            <a:r>
+              <a:rPr lang="en-US" sz="2000" dirty="0">
+                <a:solidFill>
+                  <a:schemeClr val="dk1"/>
+                </a:solidFill>
+                <a:latin typeface="Calibri"/>
+              </a:rPr>
+              <a:t>	2. </a:t>
+            </a:r>
+            <a:r>
+              <a:rPr lang="en-US" sz="2000" dirty="0">
+                <a:solidFill>
+                  <a:schemeClr val="dk1"/>
+                </a:solidFill>
+              </a:rPr>
+              <a:t>Women's health &amp; education (NFHS-5): women's literacy, schooling years, sanitation/clean 	cooking fuel/drinking water/electricity access, child anemia/wasting/underweight rates, health 	insurance coverage.</a:t>
+            </a:r>
+          </a:p>
+          <a:p>
+            <a:pPr algn="just" defTabSz="457200">
+              <a:lnSpc>
+                <a:spcPct val="100000"/>
+              </a:lnSpc>
+            </a:pPr>
+            <a:endParaRPr lang="en-US" sz="2000" dirty="0">
+              <a:solidFill>
+                <a:schemeClr val="dk1"/>
+              </a:solidFill>
+            </a:endParaRPr>
+          </a:p>
+          <a:p>
+            <a:pPr algn="just" defTabSz="457200">
+              <a:lnSpc>
+                <a:spcPct val="100000"/>
+              </a:lnSpc>
+            </a:pPr>
+            <a:r>
+              <a:rPr lang="en-US" sz="2000" dirty="0">
+                <a:solidFill>
+                  <a:schemeClr val="dk1"/>
+                </a:solidFill>
+              </a:rPr>
+              <a:t>	3. School infrastructure (UDISE-style): management type shares (state govt/aided/private/central 	govt/other), road access, </a:t>
+            </a:r>
+            <a:r>
+              <a:rPr lang="en-US" sz="2000" dirty="0" err="1">
+                <a:solidFill>
+                  <a:schemeClr val="dk1"/>
+                </a:solidFill>
+              </a:rPr>
+              <a:t>anganwadi</a:t>
+            </a:r>
+            <a:r>
+              <a:rPr lang="en-US" sz="2000" dirty="0">
+                <a:solidFill>
+                  <a:schemeClr val="dk1"/>
+                </a:solidFill>
+              </a:rPr>
+              <a:t> linkage, pre-primary section, CCE adoption, minority/CWSN 	schools, avg instructional days, grade 4-6 coverage.</a:t>
+            </a:r>
+          </a:p>
+          <a:p>
+            <a:pPr algn="just" defTabSz="457200">
+              <a:lnSpc>
+                <a:spcPct val="100000"/>
+              </a:lnSpc>
+            </a:pPr>
+            <a:endParaRPr lang="en-US" sz="2000" dirty="0">
+              <a:solidFill>
+                <a:schemeClr val="dk1"/>
+              </a:solidFill>
+            </a:endParaRPr>
+          </a:p>
+          <a:p>
+            <a:pPr algn="just" defTabSz="457200">
+              <a:lnSpc>
+                <a:spcPct val="100000"/>
+              </a:lnSpc>
+            </a:pPr>
+            <a:r>
+              <a:rPr lang="en-US" sz="2000" dirty="0">
+                <a:solidFill>
+                  <a:schemeClr val="dk1"/>
+                </a:solidFill>
+              </a:rPr>
+              <a:t>	4. Exam outcomes (SSLC): total appeared/pass, pass % (total/boys/girls), district rank								 </a:t>
+            </a:r>
+            <a:endParaRPr lang="en-US" sz="2000" dirty="0">
+              <a:solidFill>
+                <a:schemeClr val="dk1"/>
+              </a:solidFill>
+              <a:latin typeface="Calibri"/>
+            </a:endParaRPr>
+          </a:p>
+          <a:p>
             <a:pPr defTabSz="457200">
               <a:lnSpc>
                 <a:spcPct val="100000"/>
               </a:lnSpc>
             </a:pPr>
-            <a:r>
-              <a:rPr lang="en-US" sz="2000" b="0" u="none" strike="noStrike">
-                <a:solidFill>
-                  <a:schemeClr val="dk1"/>
-                </a:solidFill>
-                <a:effectLst/>
-                <a:uFillTx/>
-                <a:latin typeface="Calibri"/>
-              </a:rPr>
-              <a:t>• Variables</a:t>
-            </a:r>
-            <a:endParaRPr lang="en-IN" sz="2000" b="0" u="none" strike="noStrike">
+            <a:endParaRPr lang="en-IN" sz="2000" b="0" u="none" strike="noStrike" dirty="0">
               <a:solidFill>
                 <a:srgbClr val="000000"/>
               </a:solidFill>
@@ -6932,44 +7093,7 @@
                 <a:spcPct val="100000"/>
               </a:lnSpc>
             </a:pPr>
-            <a:r>
-              <a:rPr lang="en-US" sz="2000" b="0" u="none" strike="noStrike">
-                <a:solidFill>
-                  <a:schemeClr val="dk1"/>
-                </a:solidFill>
-                <a:effectLst/>
-                <a:uFillTx/>
-                <a:latin typeface="Calibri"/>
-              </a:rPr>
-              <a:t>• Cleaning</a:t>
-            </a:r>
-            <a:endParaRPr lang="en-IN" sz="2000" b="0" u="none" strike="noStrike">
-              <a:solidFill>
-                <a:srgbClr val="000000"/>
-              </a:solidFill>
-              <a:effectLst/>
-              <a:uFillTx/>
-              <a:latin typeface="Arial"/>
-            </a:endParaRPr>
-          </a:p>
-          <a:p>
-            <a:pPr defTabSz="457200">
-              <a:lnSpc>
-                <a:spcPct val="100000"/>
-              </a:lnSpc>
-            </a:pPr>
-            <a:r>
-              <a:rPr lang="en-US" sz="2000" b="0" u="none" strike="noStrike">
-                <a:solidFill>
-                  <a:schemeClr val="dk1"/>
-                </a:solidFill>
-                <a:effectLst/>
-                <a:uFillTx/>
-                <a:latin typeface="Calibri"/>
-              </a:rPr>
-              <a:t>• Assumptions</a:t>
-            </a:r>
-            <a:endParaRPr lang="en-IN" sz="2000" b="0" u="none" strike="noStrike">
+            <a:endParaRPr lang="en-IN" sz="2000" b="0" u="none" strike="noStrike" dirty="0">
               <a:solidFill>
                 <a:srgbClr val="000000"/>
               </a:solidFill>
@@ -7014,19 +7138,438 @@
       </p:sp>
     </p:spTree>
   </p:cSld>
-  <mc:AlternateContent>
-    <mc:Choice Requires="p14">
-      <p:transition spd="slow" p14:dur="2000"/>
-    </mc:Choice>
-    <mc:Fallback>
-      <p:transition spd="slow"/>
-    </mc:Fallback>
-  </mc:AlternateContent>
+  <p:clrMapOvr>
+    <a:masterClrMapping/>
+  </p:clrMapOvr>
 </p:sld>
 </file>
 
 <file path=ppt/slides/slide4.xml><?xml version="1.0" encoding="utf-8"?>
-<p:sld xmlns:a="http://schemas.openxmlformats.org/drawingml/2006/main" xmlns:p="http://schemas.openxmlformats.org/presentationml/2006/main" xmlns:r="http://schemas.openxmlformats.org/officeDocument/2006/relationships" xmlns:p14="http://schemas.microsoft.com/office/powerpoint/2010/main" xmlns:p15="http://schemas.microsoft.com/office/powerpoint/2012/main" xmlns:mc="http://schemas.openxmlformats.org/markup-compatibility/2006">
+<p:sld xmlns:a="http://schemas.openxmlformats.org/drawingml/2006/main" xmlns:r="http://schemas.openxmlformats.org/officeDocument/2006/relationships" xmlns:p="http://schemas.openxmlformats.org/presentationml/2006/main">
+  <p:cSld>
+    <p:spTree>
+      <p:nvGrpSpPr>
+        <p:cNvPr id="1" name=""/>
+        <p:cNvGrpSpPr/>
+        <p:nvPr/>
+      </p:nvGrpSpPr>
+      <p:grpSpPr>
+        <a:xfrm>
+          <a:off x="0" y="0"/>
+          <a:ext cx="0" cy="0"/>
+          <a:chOff x="0" y="0"/>
+          <a:chExt cx="0" cy="0"/>
+        </a:xfrm>
+      </p:grpSpPr>
+      <p:sp>
+        <p:nvSpPr>
+          <p:cNvPr id="2" name="Title 1">
+            <a:extLst>
+              <a:ext uri="{FF2B5EF4-FFF2-40B4-BE49-F238E27FC236}">
+                <a16:creationId xmlns:a16="http://schemas.microsoft.com/office/drawing/2014/main" id="{364EBA9B-D852-D3C5-23CD-E90621D3F4BC}"/>
+              </a:ext>
+            </a:extLst>
+          </p:cNvPr>
+          <p:cNvSpPr>
+            <a:spLocks noGrp="1"/>
+          </p:cNvSpPr>
+          <p:nvPr>
+            <p:ph type="title"/>
+          </p:nvPr>
+        </p:nvSpPr>
+        <p:spPr>
+          <a:xfrm>
+            <a:off x="1823884" y="245183"/>
+            <a:ext cx="8229240" cy="1142640"/>
+          </a:xfrm>
+        </p:spPr>
+        <p:txBody>
+          <a:bodyPr/>
+          <a:lstStyle/>
+          <a:p>
+            <a:pPr algn="ctr"/>
+            <a:r>
+              <a:rPr lang="en-US" sz="4000" dirty="0">
+                <a:solidFill>
+                  <a:schemeClr val="dk1"/>
+                </a:solidFill>
+              </a:rPr>
+              <a:t>Dataset Understanding</a:t>
+            </a:r>
+            <a:br>
+              <a:rPr lang="en-US" dirty="0"/>
+            </a:br>
+            <a:endParaRPr lang="en-IN" dirty="0"/>
+          </a:p>
+        </p:txBody>
+      </p:sp>
+      <p:sp>
+        <p:nvSpPr>
+          <p:cNvPr id="3" name="Text Placeholder 2">
+            <a:extLst>
+              <a:ext uri="{FF2B5EF4-FFF2-40B4-BE49-F238E27FC236}">
+                <a16:creationId xmlns:a16="http://schemas.microsoft.com/office/drawing/2014/main" id="{29D7130C-AA7F-B576-5CE5-C0B254887283}"/>
+              </a:ext>
+            </a:extLst>
+          </p:cNvPr>
+          <p:cNvSpPr>
+            <a:spLocks noGrp="1"/>
+          </p:cNvSpPr>
+          <p:nvPr>
+            <p:ph type="body"/>
+          </p:nvPr>
+        </p:nvSpPr>
+        <p:spPr>
+          <a:xfrm>
+            <a:off x="191789" y="1206954"/>
+            <a:ext cx="11493430" cy="5008298"/>
+          </a:xfrm>
+        </p:spPr>
+        <p:txBody>
+          <a:bodyPr>
+            <a:normAutofit fontScale="77500" lnSpcReduction="20000"/>
+          </a:bodyPr>
+          <a:lstStyle/>
+          <a:p>
+            <a:pPr defTabSz="457200">
+              <a:lnSpc>
+                <a:spcPct val="100000"/>
+              </a:lnSpc>
+            </a:pPr>
+            <a:r>
+              <a:rPr lang="en-US" sz="4500" dirty="0">
+                <a:solidFill>
+                  <a:schemeClr val="dk1"/>
+                </a:solidFill>
+                <a:latin typeface="+mj-lt"/>
+              </a:rPr>
+              <a:t>Cleaning </a:t>
+            </a:r>
+          </a:p>
+          <a:p>
+            <a:pPr marL="800100" lvl="1" indent="-342900" defTabSz="457200">
+              <a:lnSpc>
+                <a:spcPct val="100000"/>
+              </a:lnSpc>
+              <a:buAutoNum type="arabicPeriod"/>
+            </a:pPr>
+            <a:r>
+              <a:rPr lang="en-IN" sz="2600" dirty="0">
+                <a:solidFill>
+                  <a:srgbClr val="000000"/>
+                </a:solidFill>
+              </a:rPr>
+              <a:t>Median-imputed 4 occupation-share columns for 3 districts with no 2011 Census row (Belagavi, Belagavi </a:t>
+            </a:r>
+            <a:r>
+              <a:rPr lang="en-IN" sz="2600" dirty="0" err="1">
+                <a:solidFill>
+                  <a:srgbClr val="000000"/>
+                </a:solidFill>
+              </a:rPr>
+              <a:t>Chikkodi</a:t>
+            </a:r>
+            <a:r>
+              <a:rPr lang="en-IN" sz="2600" dirty="0">
+                <a:solidFill>
+                  <a:srgbClr val="000000"/>
+                </a:solidFill>
+              </a:rPr>
+              <a:t>, </a:t>
+            </a:r>
+            <a:r>
+              <a:rPr lang="en-IN" sz="2600" dirty="0" err="1">
+                <a:solidFill>
+                  <a:srgbClr val="000000"/>
+                </a:solidFill>
+              </a:rPr>
+              <a:t>Kalaburgi</a:t>
+            </a:r>
+            <a:r>
+              <a:rPr lang="en-IN" sz="2600" dirty="0">
+                <a:solidFill>
+                  <a:srgbClr val="000000"/>
+                </a:solidFill>
+              </a:rPr>
+              <a:t>), renormalized to sum to 100%, flagged via </a:t>
+            </a:r>
+            <a:r>
+              <a:rPr lang="en-IN" sz="2600" dirty="0" err="1">
+                <a:solidFill>
+                  <a:srgbClr val="000000"/>
+                </a:solidFill>
+              </a:rPr>
+              <a:t>census_occupation_imputed</a:t>
+            </a:r>
+            <a:r>
+              <a:rPr lang="en-IN" sz="2600" dirty="0">
+                <a:solidFill>
+                  <a:srgbClr val="000000"/>
+                </a:solidFill>
+              </a:rPr>
+              <a:t> </a:t>
+            </a:r>
+            <a:r>
+              <a:rPr lang="en-IN" sz="2600" dirty="0" err="1">
+                <a:solidFill>
+                  <a:srgbClr val="000000"/>
+                </a:solidFill>
+              </a:rPr>
+              <a:t>boolean</a:t>
+            </a:r>
+            <a:r>
+              <a:rPr lang="en-IN" sz="2600" dirty="0">
+                <a:solidFill>
+                  <a:srgbClr val="000000"/>
+                </a:solidFill>
+              </a:rPr>
+              <a:t> — no other Census columns imputed</a:t>
+            </a:r>
+          </a:p>
+          <a:p>
+            <a:pPr marL="800100" lvl="1" indent="-342900" defTabSz="457200">
+              <a:lnSpc>
+                <a:spcPct val="100000"/>
+              </a:lnSpc>
+              <a:buAutoNum type="arabicPeriod"/>
+            </a:pPr>
+            <a:r>
+              <a:rPr lang="en-IN" sz="2600" dirty="0">
+                <a:solidFill>
+                  <a:srgbClr val="000000"/>
+                </a:solidFill>
+              </a:rPr>
+              <a:t>Verified UDISE+ school management codes against official DCF documents; corrected to the official 5-group split (state govt/aided/private/central govt/other)</a:t>
+            </a:r>
+          </a:p>
+          <a:p>
+            <a:pPr marL="800100" lvl="1" indent="-342900" defTabSz="457200">
+              <a:lnSpc>
+                <a:spcPct val="100000"/>
+              </a:lnSpc>
+              <a:buAutoNum type="arabicPeriod"/>
+            </a:pPr>
+            <a:endParaRPr lang="en-IN" sz="3200" dirty="0">
+              <a:solidFill>
+                <a:srgbClr val="000000"/>
+              </a:solidFill>
+            </a:endParaRPr>
+          </a:p>
+          <a:p>
+            <a:pPr defTabSz="457200">
+              <a:lnSpc>
+                <a:spcPct val="100000"/>
+              </a:lnSpc>
+            </a:pPr>
+            <a:r>
+              <a:rPr lang="en-US" sz="4000" dirty="0">
+                <a:solidFill>
+                  <a:schemeClr val="dk1"/>
+                </a:solidFill>
+              </a:rPr>
+              <a:t>Assumptions</a:t>
+            </a:r>
+          </a:p>
+          <a:p>
+            <a:pPr marL="0" indent="0" defTabSz="457200">
+              <a:lnSpc>
+                <a:spcPct val="100000"/>
+              </a:lnSpc>
+              <a:buNone/>
+            </a:pPr>
+            <a:r>
+              <a:rPr lang="en-US" sz="3200" dirty="0">
+                <a:solidFill>
+                  <a:schemeClr val="dk1"/>
+                </a:solidFill>
+              </a:rPr>
+              <a:t>	</a:t>
+            </a:r>
+            <a:r>
+              <a:rPr lang="en-US" sz="2600" dirty="0">
+                <a:solidFill>
+                  <a:schemeClr val="dk1"/>
+                </a:solidFill>
+              </a:rPr>
+              <a:t>Imputed columns (3 districts only: Belagavi, Belagavi </a:t>
+            </a:r>
+            <a:r>
+              <a:rPr lang="en-US" sz="2600" dirty="0" err="1">
+                <a:solidFill>
+                  <a:schemeClr val="dk1"/>
+                </a:solidFill>
+              </a:rPr>
+              <a:t>Chikkodi</a:t>
+            </a:r>
+            <a:r>
+              <a:rPr lang="en-US" sz="2600" dirty="0">
+                <a:solidFill>
+                  <a:schemeClr val="dk1"/>
+                </a:solidFill>
+              </a:rPr>
+              <a:t>, </a:t>
+            </a:r>
+            <a:r>
+              <a:rPr lang="en-US" sz="2600" dirty="0" err="1">
+                <a:solidFill>
+                  <a:schemeClr val="dk1"/>
+                </a:solidFill>
+              </a:rPr>
+              <a:t>Kalaburgi</a:t>
+            </a:r>
+            <a:r>
+              <a:rPr lang="en-US" sz="2600" dirty="0">
+                <a:solidFill>
+                  <a:schemeClr val="dk1"/>
+                </a:solidFill>
+              </a:rPr>
+              <a:t> — no 2011 Census row 	existed 	for 	these):</a:t>
+            </a:r>
+          </a:p>
+          <a:p>
+            <a:pPr marL="914400" lvl="1" indent="-457200" defTabSz="457200">
+              <a:lnSpc>
+                <a:spcPct val="100000"/>
+              </a:lnSpc>
+              <a:buFont typeface="+mj-lt"/>
+              <a:buAutoNum type="arabicPeriod"/>
+            </a:pPr>
+            <a:r>
+              <a:rPr lang="en-US" sz="2600" dirty="0" err="1">
+                <a:solidFill>
+                  <a:schemeClr val="dk1"/>
+                </a:solidFill>
+              </a:rPr>
+              <a:t>census_pct_cultivator_worker</a:t>
+            </a:r>
+            <a:endParaRPr lang="en-US" sz="2600" dirty="0">
+              <a:solidFill>
+                <a:schemeClr val="dk1"/>
+              </a:solidFill>
+            </a:endParaRPr>
+          </a:p>
+          <a:p>
+            <a:pPr marL="914400" lvl="1" indent="-457200" defTabSz="457200">
+              <a:lnSpc>
+                <a:spcPct val="100000"/>
+              </a:lnSpc>
+              <a:buFont typeface="+mj-lt"/>
+              <a:buAutoNum type="arabicPeriod"/>
+            </a:pPr>
+            <a:r>
+              <a:rPr lang="en-US" sz="2600" dirty="0" err="1">
+                <a:solidFill>
+                  <a:schemeClr val="dk1"/>
+                </a:solidFill>
+              </a:rPr>
+              <a:t>scensus_pct_agri_labourer_workers</a:t>
+            </a:r>
+            <a:endParaRPr lang="en-US" sz="2600" dirty="0">
+              <a:solidFill>
+                <a:schemeClr val="dk1"/>
+              </a:solidFill>
+            </a:endParaRPr>
+          </a:p>
+          <a:p>
+            <a:pPr marL="914400" lvl="1" indent="-457200" defTabSz="457200">
+              <a:lnSpc>
+                <a:spcPct val="100000"/>
+              </a:lnSpc>
+              <a:buFont typeface="+mj-lt"/>
+              <a:buAutoNum type="arabicPeriod"/>
+            </a:pPr>
+            <a:r>
+              <a:rPr lang="en-US" sz="2600" dirty="0" err="1">
+                <a:solidFill>
+                  <a:schemeClr val="dk1"/>
+                </a:solidFill>
+              </a:rPr>
+              <a:t>census_pct_household_industry_workers</a:t>
+            </a:r>
+            <a:endParaRPr lang="en-US" sz="2600" dirty="0">
+              <a:solidFill>
+                <a:schemeClr val="dk1"/>
+              </a:solidFill>
+            </a:endParaRPr>
+          </a:p>
+          <a:p>
+            <a:pPr marL="914400" lvl="1" indent="-457200" defTabSz="457200">
+              <a:lnSpc>
+                <a:spcPct val="100000"/>
+              </a:lnSpc>
+              <a:buFont typeface="+mj-lt"/>
+              <a:buAutoNum type="arabicPeriod"/>
+            </a:pPr>
+            <a:r>
+              <a:rPr lang="en-US" sz="2600" dirty="0" err="1">
+                <a:solidFill>
+                  <a:schemeClr val="dk1"/>
+                </a:solidFill>
+              </a:rPr>
+              <a:t>census_pct_other_workers</a:t>
+            </a:r>
+            <a:endParaRPr lang="en-US" sz="2600" dirty="0">
+              <a:solidFill>
+                <a:schemeClr val="dk1"/>
+              </a:solidFill>
+            </a:endParaRPr>
+          </a:p>
+          <a:p>
+            <a:pPr marL="457200" lvl="1" defTabSz="457200">
+              <a:lnSpc>
+                <a:spcPct val="100000"/>
+              </a:lnSpc>
+            </a:pPr>
+            <a:endParaRPr lang="en-US" sz="2600" dirty="0">
+              <a:solidFill>
+                <a:schemeClr val="dk1"/>
+              </a:solidFill>
+            </a:endParaRPr>
+          </a:p>
+          <a:p>
+            <a:pPr marL="0" indent="0" defTabSz="457200">
+              <a:lnSpc>
+                <a:spcPct val="100000"/>
+              </a:lnSpc>
+              <a:buNone/>
+            </a:pPr>
+            <a:r>
+              <a:rPr lang="en-US" sz="2600" dirty="0">
+                <a:solidFill>
+                  <a:schemeClr val="dk1"/>
+                </a:solidFill>
+              </a:rPr>
+              <a:t>	Method: cross-district median (from the other 28 districts), then proportionally renormalized so the 4 	shares sum to exactly 100% per row.</a:t>
+            </a:r>
+            <a:endParaRPr lang="en-IN" sz="2600" dirty="0">
+              <a:solidFill>
+                <a:srgbClr val="000000"/>
+              </a:solidFill>
+            </a:endParaRPr>
+          </a:p>
+          <a:p>
+            <a:pPr marL="0" indent="0">
+              <a:buNone/>
+            </a:pPr>
+            <a:endParaRPr lang="en-IN" dirty="0"/>
+          </a:p>
+        </p:txBody>
+      </p:sp>
+    </p:spTree>
+    <p:extLst>
+      <p:ext uri="{BB962C8B-B14F-4D97-AF65-F5344CB8AC3E}">
+        <p14:creationId xmlns:p14="http://schemas.microsoft.com/office/powerpoint/2010/main" val="3128756453"/>
+      </p:ext>
+    </p:extLst>
+  </p:cSld>
+  <p:clrMapOvr>
+    <a:masterClrMapping/>
+  </p:clrMapOvr>
+</p:sld>
+</file>
+
+<file path=ppt/slides/slide5.xml><?xml version="1.0" encoding="utf-8"?>
+<p:sld xmlns:a="http://schemas.openxmlformats.org/drawingml/2006/main" xmlns:r="http://schemas.openxmlformats.org/officeDocument/2006/relationships" xmlns:p="http://schemas.openxmlformats.org/presentationml/2006/main">
   <p:cSld>
     <p:spTree>
       <p:nvGrpSpPr>
@@ -7066,9 +7609,10 @@
           </a:ln>
         </p:spPr>
         <p:txBody>
-          <a:bodyPr lIns="91440" rIns="91440" tIns="45720" bIns="45720" anchor="ctr">
-            <a:normAutofit fontScale="85000" lnSpcReduction="19999"/>
+          <a:bodyPr lIns="91440" tIns="45720" rIns="91440" bIns="45720" anchor="ctr">
+            <a:normAutofit fontScale="90000"/>
           </a:bodyPr>
+          <a:lstStyle/>
           <a:p>
             <a:pPr indent="0" algn="ctr" defTabSz="457200">
               <a:lnSpc>
@@ -7109,8 +7653,8 @@
         </p:nvSpPr>
         <p:spPr>
           <a:xfrm>
-            <a:off x="731520" y="1097280"/>
-            <a:ext cx="5486040" cy="4571640"/>
+            <a:off x="141593" y="1097280"/>
+            <a:ext cx="11342484" cy="2553091"/>
           </a:xfrm>
           <a:prstGeom prst="rect">
             <a:avLst/>
@@ -7121,15 +7665,22 @@
           </a:ln>
         </p:spPr>
         <p:style>
-          <a:lnRef idx="0"/>
-          <a:fillRef idx="0"/>
-          <a:effectRef idx="0"/>
+          <a:lnRef idx="0">
+            <a:scrgbClr r="0" g="0" b="0"/>
+          </a:lnRef>
+          <a:fillRef idx="0">
+            <a:scrgbClr r="0" g="0" b="0"/>
+          </a:fillRef>
+          <a:effectRef idx="0">
+            <a:scrgbClr r="0" g="0" b="0"/>
+          </a:effectRef>
           <a:fontRef idx="minor"/>
         </p:style>
         <p:txBody>
-          <a:bodyPr wrap="none" lIns="90000" rIns="90000" tIns="45000" bIns="45000" anchor="t">
+          <a:bodyPr wrap="square" lIns="90000" tIns="45000" rIns="90000" bIns="45000" anchor="t">
             <a:spAutoFit/>
           </a:bodyPr>
+          <a:lstStyle/>
           <a:p>
             <a:pPr defTabSz="457200">
               <a:lnSpc>
@@ -7137,17 +7688,42 @@
               </a:lnSpc>
             </a:pPr>
             <a:r>
-              <a:rPr lang="en-US" sz="2000" b="0" u="none" strike="noStrike">
-                <a:solidFill>
-                  <a:schemeClr val="dk1"/>
-                </a:solidFill>
-                <a:effectLst/>
-                <a:uFillTx/>
-                <a:latin typeface="Calibri"/>
-              </a:rPr>
-              <a:t>• Workflow</a:t>
-            </a:r>
-            <a:endParaRPr lang="en-IN" sz="2000" b="0" u="none" strike="noStrike">
+              <a:rPr lang="en-US" sz="2000" b="0" u="none" strike="noStrike" dirty="0">
+                <a:solidFill>
+                  <a:schemeClr val="dk1"/>
+                </a:solidFill>
+                <a:effectLst/>
+                <a:uFillTx/>
+                <a:latin typeface="Calibri"/>
+              </a:rPr>
+              <a:t>• Workflow: Collection of data fro</a:t>
+            </a:r>
+            <a:r>
+              <a:rPr lang="en-US" sz="2000" dirty="0">
+                <a:solidFill>
+                  <a:schemeClr val="dk1"/>
+                </a:solidFill>
+                <a:latin typeface="Calibri"/>
+              </a:rPr>
+              <a:t>m the relevant government sites, Cleaning of the data, merging the data in to a single master csv,</a:t>
+            </a:r>
+          </a:p>
+          <a:p>
+            <a:pPr defTabSz="457200">
+              <a:lnSpc>
+                <a:spcPct val="100000"/>
+              </a:lnSpc>
+            </a:pPr>
+            <a:r>
+              <a:rPr lang="en-US" sz="2000" dirty="0">
+                <a:solidFill>
+                  <a:schemeClr val="dk1"/>
+                </a:solidFill>
+                <a:latin typeface="Calibri"/>
+              </a:rPr>
+              <a:t>Joining the secondary master dataset with the primary dataset, training the prediction model, testing the model and evaluation </a:t>
+            </a:r>
+            <a:endParaRPr lang="en-IN" sz="2000" b="0" u="none" strike="noStrike" dirty="0">
               <a:solidFill>
                 <a:srgbClr val="000000"/>
               </a:solidFill>
@@ -7163,17 +7739,17 @@
               </a:lnSpc>
             </a:pPr>
             <a:r>
-              <a:rPr lang="en-US" sz="2000" b="0" u="none" strike="noStrike">
-                <a:solidFill>
-                  <a:schemeClr val="dk1"/>
-                </a:solidFill>
-                <a:effectLst/>
-                <a:uFillTx/>
-                <a:latin typeface="Calibri"/>
-              </a:rPr>
-              <a:t>• Methods</a:t>
-            </a:r>
-            <a:endParaRPr lang="en-IN" sz="2000" b="0" u="none" strike="noStrike">
+              <a:rPr lang="en-US" sz="2000" b="0" u="none" strike="noStrike" dirty="0">
+                <a:solidFill>
+                  <a:schemeClr val="dk1"/>
+                </a:solidFill>
+                <a:effectLst/>
+                <a:uFillTx/>
+                <a:latin typeface="Calibri"/>
+              </a:rPr>
+              <a:t>• Methods: Feature Selection using Anova and chi square. Anova for numerical Feature and chi square for categorical feature.</a:t>
+            </a:r>
+            <a:endParaRPr lang="en-IN" sz="2000" b="0" u="none" strike="noStrike" dirty="0">
               <a:solidFill>
                 <a:srgbClr val="000000"/>
               </a:solidFill>
@@ -7189,17 +7765,17 @@
               </a:lnSpc>
             </a:pPr>
             <a:r>
-              <a:rPr lang="en-US" sz="2000" b="0" u="none" strike="noStrike">
-                <a:solidFill>
-                  <a:schemeClr val="dk1"/>
-                </a:solidFill>
-                <a:effectLst/>
-                <a:uFillTx/>
-                <a:latin typeface="Calibri"/>
-              </a:rPr>
-              <a:t>• Models</a:t>
-            </a:r>
-            <a:endParaRPr lang="en-IN" sz="2000" b="0" u="none" strike="noStrike">
+              <a:rPr lang="en-US" sz="2000" b="0" u="none" strike="noStrike" dirty="0">
+                <a:solidFill>
+                  <a:schemeClr val="dk1"/>
+                </a:solidFill>
+                <a:effectLst/>
+                <a:uFillTx/>
+                <a:latin typeface="Calibri"/>
+              </a:rPr>
+              <a:t>• Models: Logistic Regression, Decision Tree, Random Forest, Hyperparameter Tuning for Random Forest. </a:t>
+            </a:r>
+            <a:endParaRPr lang="en-IN" sz="2000" b="0" u="none" strike="noStrike" dirty="0">
               <a:solidFill>
                 <a:srgbClr val="000000"/>
               </a:solidFill>
@@ -7215,17 +7791,17 @@
               </a:lnSpc>
             </a:pPr>
             <a:r>
-              <a:rPr lang="en-US" sz="2000" b="0" u="none" strike="noStrike">
-                <a:solidFill>
-                  <a:schemeClr val="dk1"/>
-                </a:solidFill>
-                <a:effectLst/>
-                <a:uFillTx/>
-                <a:latin typeface="Calibri"/>
-              </a:rPr>
-              <a:t>• Validation</a:t>
-            </a:r>
-            <a:endParaRPr lang="en-IN" sz="2000" b="0" u="none" strike="noStrike">
+              <a:rPr lang="en-US" sz="2000" b="0" u="none" strike="noStrike" dirty="0">
+                <a:solidFill>
+                  <a:schemeClr val="dk1"/>
+                </a:solidFill>
+                <a:effectLst/>
+                <a:uFillTx/>
+                <a:latin typeface="Calibri"/>
+              </a:rPr>
+              <a:t>• Validation: We have used 2025 data as unseen data, used the Cross Validation technique</a:t>
+            </a:r>
+            <a:endParaRPr lang="en-IN" sz="2000" b="0" u="none" strike="noStrike" dirty="0">
               <a:solidFill>
                 <a:srgbClr val="000000"/>
               </a:solidFill>
@@ -7270,19 +7846,1687 @@
       </p:sp>
     </p:spTree>
   </p:cSld>
-  <mc:AlternateContent>
-    <mc:Choice Requires="p14">
-      <p:transition spd="slow" p14:dur="2000"/>
-    </mc:Choice>
-    <mc:Fallback>
-      <p:transition spd="slow"/>
-    </mc:Fallback>
-  </mc:AlternateContent>
+  <p:clrMapOvr>
+    <a:masterClrMapping/>
+  </p:clrMapOvr>
 </p:sld>
 </file>
 
-<file path=ppt/slides/slide5.xml><?xml version="1.0" encoding="utf-8"?>
-<p:sld xmlns:a="http://schemas.openxmlformats.org/drawingml/2006/main" xmlns:p="http://schemas.openxmlformats.org/presentationml/2006/main" xmlns:r="http://schemas.openxmlformats.org/officeDocument/2006/relationships" xmlns:p14="http://schemas.microsoft.com/office/powerpoint/2010/main" xmlns:p15="http://schemas.microsoft.com/office/powerpoint/2012/main" xmlns:mc="http://schemas.openxmlformats.org/markup-compatibility/2006">
+<file path=ppt/slides/slide6.xml><?xml version="1.0" encoding="utf-8"?>
+<p:sld xmlns:a="http://schemas.openxmlformats.org/drawingml/2006/main" xmlns:r="http://schemas.openxmlformats.org/officeDocument/2006/relationships" xmlns:p="http://schemas.openxmlformats.org/presentationml/2006/main">
+  <p:cSld>
+    <p:bg>
+      <p:bgPr>
+        <a:solidFill>
+          <a:schemeClr val="bg1"/>
+        </a:solidFill>
+        <a:effectLst/>
+      </p:bgPr>
+    </p:bg>
+    <p:spTree>
+      <p:nvGrpSpPr>
+        <p:cNvPr id="1" name=""/>
+        <p:cNvGrpSpPr/>
+        <p:nvPr/>
+      </p:nvGrpSpPr>
+      <p:grpSpPr>
+        <a:xfrm>
+          <a:off x="0" y="0"/>
+          <a:ext cx="0" cy="0"/>
+          <a:chOff x="0" y="0"/>
+          <a:chExt cx="0" cy="0"/>
+        </a:xfrm>
+      </p:grpSpPr>
+      <p:sp useBgFill="1">
+        <p:nvSpPr>
+          <p:cNvPr id="84" name="Rectangle 83">
+            <a:extLst>
+              <a:ext uri="{FF2B5EF4-FFF2-40B4-BE49-F238E27FC236}">
+                <a16:creationId xmlns:a16="http://schemas.microsoft.com/office/drawing/2014/main" id="{743AA782-23D1-4521-8CAD-47662984AA08}"/>
+              </a:ext>
+              <a:ext uri="{C183D7F6-B498-43B3-948B-1728B52AA6E4}">
+                <adec:decorative xmlns:adec="http://schemas.microsoft.com/office/drawing/2017/decorative" val="1"/>
+              </a:ext>
+            </a:extLst>
+          </p:cNvPr>
+          <p:cNvSpPr>
+            <a:spLocks noGrp="1" noRot="1" noChangeAspect="1" noMove="1" noResize="1" noEditPoints="1" noAdjustHandles="1" noChangeArrowheads="1" noChangeShapeType="1" noTextEdit="1"/>
+          </p:cNvSpPr>
+          <p:nvPr>
+            <p:extLst>
+              <p:ext uri="{386F3935-93C4-4BCD-93E2-E3B085C9AB24}">
+                <p16:designElem xmlns:p16="http://schemas.microsoft.com/office/powerpoint/2015/main" val="1"/>
+              </p:ext>
+            </p:extLst>
+          </p:nvPr>
+        </p:nvSpPr>
+        <p:spPr>
+          <a:xfrm>
+            <a:off x="0" y="0"/>
+            <a:ext cx="12192000" cy="6858000"/>
+          </a:xfrm>
+          <a:prstGeom prst="rect">
+            <a:avLst/>
+          </a:prstGeom>
+          <a:ln>
+            <a:noFill/>
+          </a:ln>
+        </p:spPr>
+        <p:style>
+          <a:lnRef idx="2">
+            <a:schemeClr val="accent1">
+              <a:shade val="50000"/>
+            </a:schemeClr>
+          </a:lnRef>
+          <a:fillRef idx="1">
+            <a:schemeClr val="accent1"/>
+          </a:fillRef>
+          <a:effectRef idx="0">
+            <a:schemeClr val="accent1"/>
+          </a:effectRef>
+          <a:fontRef idx="minor">
+            <a:schemeClr val="lt1"/>
+          </a:fontRef>
+        </p:style>
+        <p:txBody>
+          <a:bodyPr rtlCol="0" anchor="ctr"/>
+          <a:lstStyle/>
+          <a:p>
+            <a:pPr algn="ctr"/>
+            <a:endParaRPr lang="en-US"/>
+          </a:p>
+        </p:txBody>
+      </p:sp>
+      <p:sp>
+        <p:nvSpPr>
+          <p:cNvPr id="68" name="PlaceHolder 1"/>
+          <p:cNvSpPr>
+            <a:spLocks noGrp="1"/>
+          </p:cNvSpPr>
+          <p:nvPr>
+            <p:ph type="title"/>
+          </p:nvPr>
+        </p:nvSpPr>
+        <p:spPr>
+          <a:xfrm>
+            <a:off x="630936" y="640080"/>
+            <a:ext cx="4818888" cy="1481328"/>
+          </a:xfrm>
+          <a:prstGeom prst="rect">
+            <a:avLst/>
+          </a:prstGeom>
+        </p:spPr>
+        <p:txBody>
+          <a:bodyPr vert="horz" lIns="91440" tIns="45720" rIns="91440" bIns="45720" rtlCol="0" anchor="b">
+            <a:normAutofit/>
+          </a:bodyPr>
+          <a:lstStyle/>
+          <a:p>
+            <a:pPr indent="0"/>
+            <a:r>
+              <a:rPr lang="en-US" sz="5000" b="0" u="none" strike="noStrike" kern="1200">
+                <a:solidFill>
+                  <a:schemeClr val="tx1"/>
+                </a:solidFill>
+                <a:effectLst/>
+                <a:uFillTx/>
+                <a:latin typeface="+mj-lt"/>
+                <a:ea typeface="+mj-ea"/>
+                <a:cs typeface="+mj-cs"/>
+              </a:rPr>
+              <a:t>Key Insight 1</a:t>
+            </a:r>
+            <a:br>
+              <a:rPr lang="en-US" sz="5000" kern="1200">
+                <a:solidFill>
+                  <a:schemeClr val="tx1"/>
+                </a:solidFill>
+                <a:latin typeface="+mj-lt"/>
+                <a:ea typeface="+mj-ea"/>
+                <a:cs typeface="+mj-cs"/>
+              </a:rPr>
+            </a:br>
+            <a:endParaRPr lang="en-US" sz="5000" b="0" u="none" strike="noStrike" kern="1200">
+              <a:solidFill>
+                <a:schemeClr val="tx1"/>
+              </a:solidFill>
+              <a:effectLst/>
+              <a:uFillTx/>
+              <a:latin typeface="+mj-lt"/>
+              <a:ea typeface="+mj-ea"/>
+              <a:cs typeface="+mj-cs"/>
+            </a:endParaRPr>
+          </a:p>
+        </p:txBody>
+      </p:sp>
+      <p:sp>
+        <p:nvSpPr>
+          <p:cNvPr id="86" name="sketch line">
+            <a:extLst>
+              <a:ext uri="{FF2B5EF4-FFF2-40B4-BE49-F238E27FC236}">
+                <a16:creationId xmlns:a16="http://schemas.microsoft.com/office/drawing/2014/main" id="{71877DBC-BB60-40F0-AC93-2ACDBAAE60CE}"/>
+              </a:ext>
+              <a:ext uri="{C183D7F6-B498-43B3-948B-1728B52AA6E4}">
+                <adec:decorative xmlns:adec="http://schemas.microsoft.com/office/drawing/2017/decorative" val="1"/>
+              </a:ext>
+            </a:extLst>
+          </p:cNvPr>
+          <p:cNvSpPr>
+            <a:spLocks noGrp="1" noRot="1" noChangeAspect="1" noMove="1" noResize="1" noEditPoints="1" noAdjustHandles="1" noChangeArrowheads="1" noChangeShapeType="1" noTextEdit="1"/>
+          </p:cNvSpPr>
+          <p:nvPr>
+            <p:extLst>
+              <p:ext uri="{386F3935-93C4-4BCD-93E2-E3B085C9AB24}">
+                <p16:designElem xmlns:p16="http://schemas.microsoft.com/office/powerpoint/2015/main" val="1"/>
+              </p:ext>
+            </p:extLst>
+          </p:nvPr>
+        </p:nvSpPr>
+        <p:spPr>
+          <a:xfrm>
+            <a:off x="643278" y="2372868"/>
+            <a:ext cx="3255095" cy="18288"/>
+          </a:xfrm>
+          <a:custGeom>
+            <a:avLst/>
+            <a:gdLst>
+              <a:gd name="csX0" fmla="*/ 0 w 3255095"/>
+              <a:gd name="csY0" fmla="*/ 0 h 18288"/>
+              <a:gd name="csX1" fmla="*/ 618468 w 3255095"/>
+              <a:gd name="csY1" fmla="*/ 0 h 18288"/>
+              <a:gd name="csX2" fmla="*/ 1269487 w 3255095"/>
+              <a:gd name="csY2" fmla="*/ 0 h 18288"/>
+              <a:gd name="csX3" fmla="*/ 1953057 w 3255095"/>
+              <a:gd name="csY3" fmla="*/ 0 h 18288"/>
+              <a:gd name="csX4" fmla="*/ 2636627 w 3255095"/>
+              <a:gd name="csY4" fmla="*/ 0 h 18288"/>
+              <a:gd name="csX5" fmla="*/ 3255095 w 3255095"/>
+              <a:gd name="csY5" fmla="*/ 0 h 18288"/>
+              <a:gd name="csX6" fmla="*/ 3255095 w 3255095"/>
+              <a:gd name="csY6" fmla="*/ 18288 h 18288"/>
+              <a:gd name="csX7" fmla="*/ 2538974 w 3255095"/>
+              <a:gd name="csY7" fmla="*/ 18288 h 18288"/>
+              <a:gd name="csX8" fmla="*/ 1822853 w 3255095"/>
+              <a:gd name="csY8" fmla="*/ 18288 h 18288"/>
+              <a:gd name="csX9" fmla="*/ 1171834 w 3255095"/>
+              <a:gd name="csY9" fmla="*/ 18288 h 18288"/>
+              <a:gd name="csX10" fmla="*/ 0 w 3255095"/>
+              <a:gd name="csY10" fmla="*/ 18288 h 18288"/>
+              <a:gd name="csX11" fmla="*/ 0 w 3255095"/>
+              <a:gd name="csY11" fmla="*/ 0 h 18288"/>
+            </a:gdLst>
+            <a:ahLst/>
+            <a:cxnLst>
+              <a:cxn ang="0">
+                <a:pos x="csX0" y="csY0"/>
+              </a:cxn>
+              <a:cxn ang="0">
+                <a:pos x="csX1" y="csY1"/>
+              </a:cxn>
+              <a:cxn ang="0">
+                <a:pos x="csX2" y="csY2"/>
+              </a:cxn>
+              <a:cxn ang="0">
+                <a:pos x="csX3" y="csY3"/>
+              </a:cxn>
+              <a:cxn ang="0">
+                <a:pos x="csX4" y="csY4"/>
+              </a:cxn>
+              <a:cxn ang="0">
+                <a:pos x="csX5" y="csY5"/>
+              </a:cxn>
+              <a:cxn ang="0">
+                <a:pos x="csX6" y="csY6"/>
+              </a:cxn>
+              <a:cxn ang="0">
+                <a:pos x="csX7" y="csY7"/>
+              </a:cxn>
+              <a:cxn ang="0">
+                <a:pos x="csX8" y="csY8"/>
+              </a:cxn>
+              <a:cxn ang="0">
+                <a:pos x="csX9" y="csY9"/>
+              </a:cxn>
+              <a:cxn ang="0">
+                <a:pos x="csX10" y="csY10"/>
+              </a:cxn>
+              <a:cxn ang="0">
+                <a:pos x="csX11" y="csY11"/>
+              </a:cxn>
+            </a:cxnLst>
+            <a:rect l="l" t="t" r="r" b="b"/>
+            <a:pathLst>
+              <a:path w="3255095" h="18288" fill="none" extrusionOk="0">
+                <a:moveTo>
+                  <a:pt x="0" y="0"/>
+                </a:moveTo>
+                <a:cubicBezTo>
+                  <a:pt x="240201" y="-22123"/>
+                  <a:pt x="462021" y="-19623"/>
+                  <a:pt x="618468" y="0"/>
+                </a:cubicBezTo>
+                <a:cubicBezTo>
+                  <a:pt x="774915" y="19623"/>
+                  <a:pt x="974734" y="2035"/>
+                  <a:pt x="1269487" y="0"/>
+                </a:cubicBezTo>
+                <a:cubicBezTo>
+                  <a:pt x="1564240" y="-2035"/>
+                  <a:pt x="1733579" y="10639"/>
+                  <a:pt x="1953057" y="0"/>
+                </a:cubicBezTo>
+                <a:cubicBezTo>
+                  <a:pt x="2172535" y="-10639"/>
+                  <a:pt x="2453962" y="14018"/>
+                  <a:pt x="2636627" y="0"/>
+                </a:cubicBezTo>
+                <a:cubicBezTo>
+                  <a:pt x="2819292" y="-14018"/>
+                  <a:pt x="3121375" y="5399"/>
+                  <a:pt x="3255095" y="0"/>
+                </a:cubicBezTo>
+                <a:cubicBezTo>
+                  <a:pt x="3254386" y="8157"/>
+                  <a:pt x="3254682" y="12125"/>
+                  <a:pt x="3255095" y="18288"/>
+                </a:cubicBezTo>
+                <a:cubicBezTo>
+                  <a:pt x="3088545" y="23203"/>
+                  <a:pt x="2687475" y="7419"/>
+                  <a:pt x="2538974" y="18288"/>
+                </a:cubicBezTo>
+                <a:cubicBezTo>
+                  <a:pt x="2390473" y="29157"/>
+                  <a:pt x="2137381" y="-8959"/>
+                  <a:pt x="1822853" y="18288"/>
+                </a:cubicBezTo>
+                <a:cubicBezTo>
+                  <a:pt x="1508325" y="45535"/>
+                  <a:pt x="1466437" y="20385"/>
+                  <a:pt x="1171834" y="18288"/>
+                </a:cubicBezTo>
+                <a:cubicBezTo>
+                  <a:pt x="877231" y="16191"/>
+                  <a:pt x="561097" y="37643"/>
+                  <a:pt x="0" y="18288"/>
+                </a:cubicBezTo>
+                <a:cubicBezTo>
+                  <a:pt x="-46" y="12483"/>
+                  <a:pt x="-203" y="6491"/>
+                  <a:pt x="0" y="0"/>
+                </a:cubicBezTo>
+                <a:close/>
+              </a:path>
+              <a:path w="3255095" h="18288" stroke="0" extrusionOk="0">
+                <a:moveTo>
+                  <a:pt x="0" y="0"/>
+                </a:moveTo>
+                <a:cubicBezTo>
+                  <a:pt x="291965" y="19429"/>
+                  <a:pt x="363155" y="8568"/>
+                  <a:pt x="618468" y="0"/>
+                </a:cubicBezTo>
+                <a:cubicBezTo>
+                  <a:pt x="873781" y="-8568"/>
+                  <a:pt x="904459" y="-19505"/>
+                  <a:pt x="1171834" y="0"/>
+                </a:cubicBezTo>
+                <a:cubicBezTo>
+                  <a:pt x="1439209" y="19505"/>
+                  <a:pt x="1744369" y="9790"/>
+                  <a:pt x="1887955" y="0"/>
+                </a:cubicBezTo>
+                <a:cubicBezTo>
+                  <a:pt x="2031541" y="-9790"/>
+                  <a:pt x="2346378" y="21240"/>
+                  <a:pt x="2506423" y="0"/>
+                </a:cubicBezTo>
+                <a:cubicBezTo>
+                  <a:pt x="2666468" y="-21240"/>
+                  <a:pt x="2990257" y="30414"/>
+                  <a:pt x="3255095" y="0"/>
+                </a:cubicBezTo>
+                <a:cubicBezTo>
+                  <a:pt x="3254831" y="4493"/>
+                  <a:pt x="3255479" y="9472"/>
+                  <a:pt x="3255095" y="18288"/>
+                </a:cubicBezTo>
+                <a:cubicBezTo>
+                  <a:pt x="3120743" y="16690"/>
+                  <a:pt x="2759628" y="42462"/>
+                  <a:pt x="2604076" y="18288"/>
+                </a:cubicBezTo>
+                <a:cubicBezTo>
+                  <a:pt x="2448524" y="-5886"/>
+                  <a:pt x="2184336" y="19599"/>
+                  <a:pt x="1887955" y="18288"/>
+                </a:cubicBezTo>
+                <a:cubicBezTo>
+                  <a:pt x="1591574" y="16977"/>
+                  <a:pt x="1548845" y="6870"/>
+                  <a:pt x="1334589" y="18288"/>
+                </a:cubicBezTo>
+                <a:cubicBezTo>
+                  <a:pt x="1120333" y="29706"/>
+                  <a:pt x="996014" y="9662"/>
+                  <a:pt x="683570" y="18288"/>
+                </a:cubicBezTo>
+                <a:cubicBezTo>
+                  <a:pt x="371126" y="26914"/>
+                  <a:pt x="198687" y="16167"/>
+                  <a:pt x="0" y="18288"/>
+                </a:cubicBezTo>
+                <a:cubicBezTo>
+                  <a:pt x="843" y="9577"/>
+                  <a:pt x="371" y="6900"/>
+                  <a:pt x="0" y="0"/>
+                </a:cubicBezTo>
+                <a:close/>
+              </a:path>
+            </a:pathLst>
+          </a:custGeom>
+          <a:solidFill>
+            <a:schemeClr val="accent2"/>
+          </a:solidFill>
+          <a:ln w="38100" cap="rnd">
+            <a:solidFill>
+              <a:schemeClr val="accent2"/>
+            </a:solidFill>
+            <a:round/>
+            <a:extLst>
+              <a:ext uri="{C807C97D-BFC1-408E-A445-0C87EB9F89A2}">
+                <ask:lineSketchStyleProps xmlns:ask="http://schemas.microsoft.com/office/drawing/2018/sketchyshapes" sd="1219033472">
+                  <a:prstGeom prst="rect">
+                    <a:avLst/>
+                  </a:prstGeom>
+                  <ask:type>
+                    <ask:lineSketchFreehand/>
+                  </ask:type>
+                </ask:lineSketchStyleProps>
+              </a:ext>
+            </a:extLst>
+          </a:ln>
+        </p:spPr>
+        <p:style>
+          <a:lnRef idx="2">
+            <a:schemeClr val="accent1">
+              <a:shade val="50000"/>
+            </a:schemeClr>
+          </a:lnRef>
+          <a:fillRef idx="1">
+            <a:schemeClr val="accent1"/>
+          </a:fillRef>
+          <a:effectRef idx="0">
+            <a:schemeClr val="accent1"/>
+          </a:effectRef>
+          <a:fontRef idx="minor">
+            <a:schemeClr val="lt1"/>
+          </a:fontRef>
+        </p:style>
+        <p:txBody>
+          <a:bodyPr rtlCol="0" anchor="ctr"/>
+          <a:lstStyle/>
+          <a:p>
+            <a:pPr algn="ctr"/>
+            <a:endParaRPr lang="en-US"/>
+          </a:p>
+        </p:txBody>
+      </p:sp>
+      <p:sp>
+        <p:nvSpPr>
+          <p:cNvPr id="70" name="EvalFooter"/>
+          <p:cNvSpPr txBox="1"/>
+          <p:nvPr/>
+        </p:nvSpPr>
+        <p:spPr>
+          <a:xfrm>
+            <a:off x="630936" y="2580894"/>
+            <a:ext cx="4818888" cy="3547872"/>
+          </a:xfrm>
+          <a:prstGeom prst="rect">
+            <a:avLst/>
+          </a:prstGeom>
+        </p:spPr>
+        <p:txBody>
+          <a:bodyPr vert="horz" lIns="91440" tIns="45720" rIns="91440" bIns="45720" rtlCol="0" anchor="t">
+            <a:normAutofit fontScale="92500" lnSpcReduction="20000"/>
+          </a:bodyPr>
+          <a:lstStyle/>
+          <a:p>
+            <a:pPr algn="just"/>
+            <a:r>
+              <a:rPr lang="en-US" dirty="0"/>
+              <a:t>By analyzing the data in depth, we see distinctive geographic trends depending on the location. Western and southern regions of countries (the 'left' side of the map) show higher quality levels compared to the southern, eastern, and northern regions (the 'right' side of the map). Using ANOVA to examine this pattern confirms that key quality indicators like girls' practical reading skills, sanitation, and school building quality are really important. Historically, western countries have done better in specific economic and profit-related categories, which aligns with the model’s original 'Score' being higher. So, according to the data, regional development differences matter, and countries on the 'left' side can be placed at higher quality levels within the current framework.</a:t>
+            </a:r>
+            <a:endParaRPr lang="en-IN" dirty="0"/>
+          </a:p>
+        </p:txBody>
+      </p:sp>
+      <p:pic>
+        <p:nvPicPr>
+          <p:cNvPr id="3" name="Picture 2">
+            <a:extLst>
+              <a:ext uri="{FF2B5EF4-FFF2-40B4-BE49-F238E27FC236}">
+                <a16:creationId xmlns:a16="http://schemas.microsoft.com/office/drawing/2014/main" id="{2AF71DC5-3E43-B442-8E4C-104BD0EBD41B}"/>
+              </a:ext>
+            </a:extLst>
+          </p:cNvPr>
+          <p:cNvPicPr>
+            <a:picLocks noChangeAspect="1"/>
+          </p:cNvPicPr>
+          <p:nvPr/>
+        </p:nvPicPr>
+        <p:blipFill>
+          <a:blip r:embed="rId2">
+            <a:extLst>
+              <a:ext uri="{28A0092B-C50C-407E-A947-70E740481C1C}">
+                <a14:useLocalDpi xmlns:a14="http://schemas.microsoft.com/office/drawing/2010/main" val="0"/>
+              </a:ext>
+            </a:extLst>
+          </a:blip>
+          <a:srcRect r="916"/>
+          <a:stretch>
+            <a:fillRect/>
+          </a:stretch>
+        </p:blipFill>
+        <p:spPr>
+          <a:xfrm>
+            <a:off x="6403672" y="640080"/>
+            <a:ext cx="4849719" cy="5577840"/>
+          </a:xfrm>
+          <a:prstGeom prst="rect">
+            <a:avLst/>
+          </a:prstGeom>
+        </p:spPr>
+      </p:pic>
+    </p:spTree>
+  </p:cSld>
+  <p:clrMapOvr>
+    <a:masterClrMapping/>
+  </p:clrMapOvr>
+</p:sld>
+</file>
+
+<file path=ppt/slides/slide7.xml><?xml version="1.0" encoding="utf-8"?>
+<p:sld xmlns:a="http://schemas.openxmlformats.org/drawingml/2006/main" xmlns:r="http://schemas.openxmlformats.org/officeDocument/2006/relationships" xmlns:p="http://schemas.openxmlformats.org/presentationml/2006/main">
+  <p:cSld>
+    <p:bg>
+      <p:bgPr>
+        <a:solidFill>
+          <a:schemeClr val="bg1"/>
+        </a:solidFill>
+        <a:effectLst/>
+      </p:bgPr>
+    </p:bg>
+    <p:spTree>
+      <p:nvGrpSpPr>
+        <p:cNvPr id="1" name=""/>
+        <p:cNvGrpSpPr/>
+        <p:nvPr/>
+      </p:nvGrpSpPr>
+      <p:grpSpPr>
+        <a:xfrm>
+          <a:off x="0" y="0"/>
+          <a:ext cx="0" cy="0"/>
+          <a:chOff x="0" y="0"/>
+          <a:chExt cx="0" cy="0"/>
+        </a:xfrm>
+      </p:grpSpPr>
+      <p:sp useBgFill="1">
+        <p:nvSpPr>
+          <p:cNvPr id="77" name="Rectangle 76">
+            <a:extLst>
+              <a:ext uri="{FF2B5EF4-FFF2-40B4-BE49-F238E27FC236}">
+                <a16:creationId xmlns:a16="http://schemas.microsoft.com/office/drawing/2014/main" id="{2B97F24A-32CE-4C1C-A50D-3016B394DCFB}"/>
+              </a:ext>
+              <a:ext uri="{C183D7F6-B498-43B3-948B-1728B52AA6E4}">
+                <adec:decorative xmlns:adec="http://schemas.microsoft.com/office/drawing/2017/decorative" val="1"/>
+              </a:ext>
+            </a:extLst>
+          </p:cNvPr>
+          <p:cNvSpPr>
+            <a:spLocks noGrp="1" noRot="1" noChangeAspect="1" noMove="1" noResize="1" noEditPoints="1" noAdjustHandles="1" noChangeArrowheads="1" noChangeShapeType="1" noTextEdit="1"/>
+          </p:cNvSpPr>
+          <p:nvPr>
+            <p:extLst>
+              <p:ext uri="{386F3935-93C4-4BCD-93E2-E3B085C9AB24}">
+                <p16:designElem xmlns:p16="http://schemas.microsoft.com/office/powerpoint/2015/main" val="1"/>
+              </p:ext>
+            </p:extLst>
+          </p:nvPr>
+        </p:nvSpPr>
+        <p:spPr>
+          <a:xfrm>
+            <a:off x="0" y="0"/>
+            <a:ext cx="12192000" cy="6858000"/>
+          </a:xfrm>
+          <a:prstGeom prst="rect">
+            <a:avLst/>
+          </a:prstGeom>
+          <a:ln>
+            <a:noFill/>
+          </a:ln>
+        </p:spPr>
+        <p:style>
+          <a:lnRef idx="2">
+            <a:schemeClr val="accent1">
+              <a:shade val="50000"/>
+            </a:schemeClr>
+          </a:lnRef>
+          <a:fillRef idx="1">
+            <a:schemeClr val="accent1"/>
+          </a:fillRef>
+          <a:effectRef idx="0">
+            <a:schemeClr val="accent1"/>
+          </a:effectRef>
+          <a:fontRef idx="minor">
+            <a:schemeClr val="lt1"/>
+          </a:fontRef>
+        </p:style>
+        <p:txBody>
+          <a:bodyPr rtlCol="0" anchor="ctr"/>
+          <a:lstStyle/>
+          <a:p>
+            <a:pPr algn="ctr"/>
+            <a:endParaRPr lang="en-US"/>
+          </a:p>
+        </p:txBody>
+      </p:sp>
+      <p:sp>
+        <p:nvSpPr>
+          <p:cNvPr id="70" name="PlaceHolder 1"/>
+          <p:cNvSpPr>
+            <a:spLocks noGrp="1"/>
+          </p:cNvSpPr>
+          <p:nvPr>
+            <p:ph type="title"/>
+          </p:nvPr>
+        </p:nvSpPr>
+        <p:spPr>
+          <a:xfrm>
+            <a:off x="630936" y="639520"/>
+            <a:ext cx="3429000" cy="1719072"/>
+          </a:xfrm>
+          <a:prstGeom prst="rect">
+            <a:avLst/>
+          </a:prstGeom>
+        </p:spPr>
+        <p:txBody>
+          <a:bodyPr vert="horz" lIns="91440" tIns="45720" rIns="91440" bIns="45720" rtlCol="0" anchor="b">
+            <a:normAutofit/>
+          </a:bodyPr>
+          <a:lstStyle/>
+          <a:p>
+            <a:pPr indent="0"/>
+            <a:r>
+              <a:rPr lang="en-US" sz="4600" b="0" u="none" strike="noStrike" kern="1200" dirty="0">
+                <a:solidFill>
+                  <a:schemeClr val="tx1"/>
+                </a:solidFill>
+                <a:effectLst/>
+                <a:uFillTx/>
+                <a:latin typeface="+mj-lt"/>
+                <a:ea typeface="+mj-ea"/>
+                <a:cs typeface="+mj-cs"/>
+              </a:rPr>
+              <a:t>Key Insight 2</a:t>
+            </a:r>
+            <a:br>
+              <a:rPr lang="en-US" sz="4600" kern="1200" dirty="0">
+                <a:solidFill>
+                  <a:schemeClr val="tx1"/>
+                </a:solidFill>
+                <a:latin typeface="+mj-lt"/>
+                <a:ea typeface="+mj-ea"/>
+                <a:cs typeface="+mj-cs"/>
+              </a:rPr>
+            </a:br>
+            <a:endParaRPr lang="en-US" sz="4600" b="0" u="none" strike="noStrike" kern="1200" dirty="0">
+              <a:solidFill>
+                <a:schemeClr val="tx1"/>
+              </a:solidFill>
+              <a:effectLst/>
+              <a:uFillTx/>
+              <a:latin typeface="+mj-lt"/>
+              <a:ea typeface="+mj-ea"/>
+              <a:cs typeface="+mj-cs"/>
+            </a:endParaRPr>
+          </a:p>
+        </p:txBody>
+      </p:sp>
+      <p:sp>
+        <p:nvSpPr>
+          <p:cNvPr id="79" name="sketch line">
+            <a:extLst>
+              <a:ext uri="{FF2B5EF4-FFF2-40B4-BE49-F238E27FC236}">
+                <a16:creationId xmlns:a16="http://schemas.microsoft.com/office/drawing/2014/main" id="{CD8B4F24-440B-49E9-B85D-733523DC064B}"/>
+              </a:ext>
+              <a:ext uri="{C183D7F6-B498-43B3-948B-1728B52AA6E4}">
+                <adec:decorative xmlns:adec="http://schemas.microsoft.com/office/drawing/2017/decorative" val="1"/>
+              </a:ext>
+            </a:extLst>
+          </p:cNvPr>
+          <p:cNvSpPr>
+            <a:spLocks noGrp="1" noRot="1" noChangeAspect="1" noMove="1" noResize="1" noEditPoints="1" noAdjustHandles="1" noChangeArrowheads="1" noChangeShapeType="1" noTextEdit="1"/>
+          </p:cNvSpPr>
+          <p:nvPr>
+            <p:extLst>
+              <p:ext uri="{386F3935-93C4-4BCD-93E2-E3B085C9AB24}">
+                <p16:designElem xmlns:p16="http://schemas.microsoft.com/office/powerpoint/2015/main" val="1"/>
+              </p:ext>
+            </p:extLst>
+          </p:nvPr>
+        </p:nvSpPr>
+        <p:spPr>
+          <a:xfrm>
+            <a:off x="643278" y="2573756"/>
+            <a:ext cx="3255095" cy="18288"/>
+          </a:xfrm>
+          <a:custGeom>
+            <a:avLst/>
+            <a:gdLst>
+              <a:gd name="csX0" fmla="*/ 0 w 3255095"/>
+              <a:gd name="csY0" fmla="*/ 0 h 18288"/>
+              <a:gd name="csX1" fmla="*/ 618468 w 3255095"/>
+              <a:gd name="csY1" fmla="*/ 0 h 18288"/>
+              <a:gd name="csX2" fmla="*/ 1269487 w 3255095"/>
+              <a:gd name="csY2" fmla="*/ 0 h 18288"/>
+              <a:gd name="csX3" fmla="*/ 1953057 w 3255095"/>
+              <a:gd name="csY3" fmla="*/ 0 h 18288"/>
+              <a:gd name="csX4" fmla="*/ 2636627 w 3255095"/>
+              <a:gd name="csY4" fmla="*/ 0 h 18288"/>
+              <a:gd name="csX5" fmla="*/ 3255095 w 3255095"/>
+              <a:gd name="csY5" fmla="*/ 0 h 18288"/>
+              <a:gd name="csX6" fmla="*/ 3255095 w 3255095"/>
+              <a:gd name="csY6" fmla="*/ 18288 h 18288"/>
+              <a:gd name="csX7" fmla="*/ 2538974 w 3255095"/>
+              <a:gd name="csY7" fmla="*/ 18288 h 18288"/>
+              <a:gd name="csX8" fmla="*/ 1822853 w 3255095"/>
+              <a:gd name="csY8" fmla="*/ 18288 h 18288"/>
+              <a:gd name="csX9" fmla="*/ 1171834 w 3255095"/>
+              <a:gd name="csY9" fmla="*/ 18288 h 18288"/>
+              <a:gd name="csX10" fmla="*/ 0 w 3255095"/>
+              <a:gd name="csY10" fmla="*/ 18288 h 18288"/>
+              <a:gd name="csX11" fmla="*/ 0 w 3255095"/>
+              <a:gd name="csY11" fmla="*/ 0 h 18288"/>
+            </a:gdLst>
+            <a:ahLst/>
+            <a:cxnLst>
+              <a:cxn ang="0">
+                <a:pos x="csX0" y="csY0"/>
+              </a:cxn>
+              <a:cxn ang="0">
+                <a:pos x="csX1" y="csY1"/>
+              </a:cxn>
+              <a:cxn ang="0">
+                <a:pos x="csX2" y="csY2"/>
+              </a:cxn>
+              <a:cxn ang="0">
+                <a:pos x="csX3" y="csY3"/>
+              </a:cxn>
+              <a:cxn ang="0">
+                <a:pos x="csX4" y="csY4"/>
+              </a:cxn>
+              <a:cxn ang="0">
+                <a:pos x="csX5" y="csY5"/>
+              </a:cxn>
+              <a:cxn ang="0">
+                <a:pos x="csX6" y="csY6"/>
+              </a:cxn>
+              <a:cxn ang="0">
+                <a:pos x="csX7" y="csY7"/>
+              </a:cxn>
+              <a:cxn ang="0">
+                <a:pos x="csX8" y="csY8"/>
+              </a:cxn>
+              <a:cxn ang="0">
+                <a:pos x="csX9" y="csY9"/>
+              </a:cxn>
+              <a:cxn ang="0">
+                <a:pos x="csX10" y="csY10"/>
+              </a:cxn>
+              <a:cxn ang="0">
+                <a:pos x="csX11" y="csY11"/>
+              </a:cxn>
+            </a:cxnLst>
+            <a:rect l="l" t="t" r="r" b="b"/>
+            <a:pathLst>
+              <a:path w="3255095" h="18288" fill="none" extrusionOk="0">
+                <a:moveTo>
+                  <a:pt x="0" y="0"/>
+                </a:moveTo>
+                <a:cubicBezTo>
+                  <a:pt x="240201" y="-22123"/>
+                  <a:pt x="462021" y="-19623"/>
+                  <a:pt x="618468" y="0"/>
+                </a:cubicBezTo>
+                <a:cubicBezTo>
+                  <a:pt x="774915" y="19623"/>
+                  <a:pt x="974734" y="2035"/>
+                  <a:pt x="1269487" y="0"/>
+                </a:cubicBezTo>
+                <a:cubicBezTo>
+                  <a:pt x="1564240" y="-2035"/>
+                  <a:pt x="1733579" y="10639"/>
+                  <a:pt x="1953057" y="0"/>
+                </a:cubicBezTo>
+                <a:cubicBezTo>
+                  <a:pt x="2172535" y="-10639"/>
+                  <a:pt x="2453962" y="14018"/>
+                  <a:pt x="2636627" y="0"/>
+                </a:cubicBezTo>
+                <a:cubicBezTo>
+                  <a:pt x="2819292" y="-14018"/>
+                  <a:pt x="3121375" y="5399"/>
+                  <a:pt x="3255095" y="0"/>
+                </a:cubicBezTo>
+                <a:cubicBezTo>
+                  <a:pt x="3254386" y="8157"/>
+                  <a:pt x="3254682" y="12125"/>
+                  <a:pt x="3255095" y="18288"/>
+                </a:cubicBezTo>
+                <a:cubicBezTo>
+                  <a:pt x="3088545" y="23203"/>
+                  <a:pt x="2687475" y="7419"/>
+                  <a:pt x="2538974" y="18288"/>
+                </a:cubicBezTo>
+                <a:cubicBezTo>
+                  <a:pt x="2390473" y="29157"/>
+                  <a:pt x="2137381" y="-8959"/>
+                  <a:pt x="1822853" y="18288"/>
+                </a:cubicBezTo>
+                <a:cubicBezTo>
+                  <a:pt x="1508325" y="45535"/>
+                  <a:pt x="1466437" y="20385"/>
+                  <a:pt x="1171834" y="18288"/>
+                </a:cubicBezTo>
+                <a:cubicBezTo>
+                  <a:pt x="877231" y="16191"/>
+                  <a:pt x="561097" y="37643"/>
+                  <a:pt x="0" y="18288"/>
+                </a:cubicBezTo>
+                <a:cubicBezTo>
+                  <a:pt x="-46" y="12483"/>
+                  <a:pt x="-203" y="6491"/>
+                  <a:pt x="0" y="0"/>
+                </a:cubicBezTo>
+                <a:close/>
+              </a:path>
+              <a:path w="3255095" h="18288" stroke="0" extrusionOk="0">
+                <a:moveTo>
+                  <a:pt x="0" y="0"/>
+                </a:moveTo>
+                <a:cubicBezTo>
+                  <a:pt x="291965" y="19429"/>
+                  <a:pt x="363155" y="8568"/>
+                  <a:pt x="618468" y="0"/>
+                </a:cubicBezTo>
+                <a:cubicBezTo>
+                  <a:pt x="873781" y="-8568"/>
+                  <a:pt x="904459" y="-19505"/>
+                  <a:pt x="1171834" y="0"/>
+                </a:cubicBezTo>
+                <a:cubicBezTo>
+                  <a:pt x="1439209" y="19505"/>
+                  <a:pt x="1744369" y="9790"/>
+                  <a:pt x="1887955" y="0"/>
+                </a:cubicBezTo>
+                <a:cubicBezTo>
+                  <a:pt x="2031541" y="-9790"/>
+                  <a:pt x="2346378" y="21240"/>
+                  <a:pt x="2506423" y="0"/>
+                </a:cubicBezTo>
+                <a:cubicBezTo>
+                  <a:pt x="2666468" y="-21240"/>
+                  <a:pt x="2990257" y="30414"/>
+                  <a:pt x="3255095" y="0"/>
+                </a:cubicBezTo>
+                <a:cubicBezTo>
+                  <a:pt x="3254831" y="4493"/>
+                  <a:pt x="3255479" y="9472"/>
+                  <a:pt x="3255095" y="18288"/>
+                </a:cubicBezTo>
+                <a:cubicBezTo>
+                  <a:pt x="3120743" y="16690"/>
+                  <a:pt x="2759628" y="42462"/>
+                  <a:pt x="2604076" y="18288"/>
+                </a:cubicBezTo>
+                <a:cubicBezTo>
+                  <a:pt x="2448524" y="-5886"/>
+                  <a:pt x="2184336" y="19599"/>
+                  <a:pt x="1887955" y="18288"/>
+                </a:cubicBezTo>
+                <a:cubicBezTo>
+                  <a:pt x="1591574" y="16977"/>
+                  <a:pt x="1548845" y="6870"/>
+                  <a:pt x="1334589" y="18288"/>
+                </a:cubicBezTo>
+                <a:cubicBezTo>
+                  <a:pt x="1120333" y="29706"/>
+                  <a:pt x="996014" y="9662"/>
+                  <a:pt x="683570" y="18288"/>
+                </a:cubicBezTo>
+                <a:cubicBezTo>
+                  <a:pt x="371126" y="26914"/>
+                  <a:pt x="198687" y="16167"/>
+                  <a:pt x="0" y="18288"/>
+                </a:cubicBezTo>
+                <a:cubicBezTo>
+                  <a:pt x="843" y="9577"/>
+                  <a:pt x="371" y="6900"/>
+                  <a:pt x="0" y="0"/>
+                </a:cubicBezTo>
+                <a:close/>
+              </a:path>
+            </a:pathLst>
+          </a:custGeom>
+          <a:solidFill>
+            <a:schemeClr val="accent2"/>
+          </a:solidFill>
+          <a:ln w="38100" cap="rnd">
+            <a:solidFill>
+              <a:schemeClr val="accent2"/>
+            </a:solidFill>
+            <a:round/>
+            <a:extLst>
+              <a:ext uri="{C807C97D-BFC1-408E-A445-0C87EB9F89A2}">
+                <ask:lineSketchStyleProps xmlns:ask="http://schemas.microsoft.com/office/drawing/2018/sketchyshapes" sd="1219033472">
+                  <a:prstGeom prst="rect">
+                    <a:avLst/>
+                  </a:prstGeom>
+                  <ask:type>
+                    <ask:lineSketchFreehand/>
+                  </ask:type>
+                </ask:lineSketchStyleProps>
+              </a:ext>
+            </a:extLst>
+          </a:ln>
+        </p:spPr>
+        <p:style>
+          <a:lnRef idx="2">
+            <a:schemeClr val="accent1">
+              <a:shade val="50000"/>
+            </a:schemeClr>
+          </a:lnRef>
+          <a:fillRef idx="1">
+            <a:schemeClr val="accent1"/>
+          </a:fillRef>
+          <a:effectRef idx="0">
+            <a:schemeClr val="accent1"/>
+          </a:effectRef>
+          <a:fontRef idx="minor">
+            <a:schemeClr val="lt1"/>
+          </a:fontRef>
+        </p:style>
+        <p:txBody>
+          <a:bodyPr rtlCol="0" anchor="ctr"/>
+          <a:lstStyle/>
+          <a:p>
+            <a:pPr algn="ctr"/>
+            <a:endParaRPr lang="en-US"/>
+          </a:p>
+        </p:txBody>
+      </p:sp>
+      <p:sp>
+        <p:nvSpPr>
+          <p:cNvPr id="72" name="EvalFooter"/>
+          <p:cNvSpPr txBox="1"/>
+          <p:nvPr/>
+        </p:nvSpPr>
+        <p:spPr>
+          <a:xfrm>
+            <a:off x="333756" y="2807208"/>
+            <a:ext cx="4023360" cy="3995928"/>
+          </a:xfrm>
+          <a:prstGeom prst="rect">
+            <a:avLst/>
+          </a:prstGeom>
+        </p:spPr>
+        <p:txBody>
+          <a:bodyPr vert="horz" lIns="91440" tIns="45720" rIns="91440" bIns="45720" rtlCol="0" anchor="t">
+            <a:normAutofit fontScale="85000" lnSpcReduction="20000"/>
+          </a:bodyPr>
+          <a:lstStyle/>
+          <a:p>
+            <a:pPr algn="just"/>
+            <a:r>
+              <a:rPr lang="en-IN" dirty="0"/>
+              <a:t>The feature selection process for this model utilized two distinct statistical methodologies to evaluate the importance of variables based on their data type. For </a:t>
+            </a:r>
+            <a:r>
+              <a:rPr lang="en-IN" b="1" dirty="0"/>
+              <a:t>numerical features</a:t>
+            </a:r>
+            <a:r>
+              <a:rPr lang="en-IN" dirty="0"/>
+              <a:t>, represented on the left side in </a:t>
+            </a:r>
+            <a:r>
+              <a:rPr lang="en-IN" b="1" dirty="0"/>
+              <a:t>red</a:t>
+            </a:r>
+            <a:r>
+              <a:rPr lang="en-IN" dirty="0"/>
+              <a:t>, an </a:t>
+            </a:r>
+            <a:r>
+              <a:rPr lang="en-IN" b="1" dirty="0"/>
+              <a:t>ANOVA</a:t>
+            </a:r>
+            <a:r>
+              <a:rPr lang="en-IN" dirty="0"/>
+              <a:t> (Analysis of Variance) F-score was applied to determine how strongly each continuous variable correlates with the target labels. Meanwhile, for the </a:t>
+            </a:r>
+            <a:r>
+              <a:rPr lang="en-IN" b="1" dirty="0"/>
+              <a:t>categorical features</a:t>
+            </a:r>
+            <a:r>
+              <a:rPr lang="en-IN" dirty="0"/>
+              <a:t> on the right side (typically represented in </a:t>
+            </a:r>
+            <a:r>
+              <a:rPr lang="en-IN" b="1" dirty="0"/>
+              <a:t>blue</a:t>
+            </a:r>
+            <a:r>
+              <a:rPr lang="en-IN" dirty="0"/>
+              <a:t>), a </a:t>
+            </a:r>
+            <a:r>
+              <a:rPr lang="en-IN" b="1" dirty="0"/>
+              <a:t>Chi-Square</a:t>
+            </a:r>
+            <a:r>
+              <a:rPr lang="en-IN" dirty="0"/>
+              <a:t> test was employed to measure the dependency between discrete categories and the output. By applying these tailored statistical tests, the analysis ensures that both types of data are accurately ranked, providing a comprehensive view of which factors—whether they are measurements like literacy rates or categories like school management types—have the most significant impact on the final results.</a:t>
+            </a:r>
+          </a:p>
+          <a:p>
+            <a:pPr marL="285750" indent="-285750" algn="just">
+              <a:buFont typeface="Arial" panose="020B0604020202020204" pitchFamily="34" charset="0"/>
+              <a:buChar char="•"/>
+            </a:pPr>
+            <a:r>
+              <a:rPr lang="en-IN" dirty="0"/>
+              <a:t>Response: At risk flag</a:t>
+            </a:r>
+          </a:p>
+          <a:p>
+            <a:pPr>
+              <a:lnSpc>
+                <a:spcPct val="90000"/>
+              </a:lnSpc>
+              <a:spcAft>
+                <a:spcPts val="600"/>
+              </a:spcAft>
+              <a:defRPr sz="1000"/>
+            </a:pPr>
+            <a:endParaRPr lang="en-US" dirty="0"/>
+          </a:p>
+        </p:txBody>
+      </p:sp>
+      <p:pic>
+        <p:nvPicPr>
+          <p:cNvPr id="3" name="Picture 2">
+            <a:extLst>
+              <a:ext uri="{FF2B5EF4-FFF2-40B4-BE49-F238E27FC236}">
+                <a16:creationId xmlns:a16="http://schemas.microsoft.com/office/drawing/2014/main" id="{74352FA4-88B0-025E-D99E-DBBA7AAB0559}"/>
+              </a:ext>
+            </a:extLst>
+          </p:cNvPr>
+          <p:cNvPicPr>
+            <a:picLocks noChangeAspect="1"/>
+          </p:cNvPicPr>
+          <p:nvPr/>
+        </p:nvPicPr>
+        <p:blipFill>
+          <a:blip r:embed="rId2">
+            <a:extLst>
+              <a:ext uri="{28A0092B-C50C-407E-A947-70E740481C1C}">
+                <a14:useLocalDpi xmlns:a14="http://schemas.microsoft.com/office/drawing/2010/main" val="0"/>
+              </a:ext>
+            </a:extLst>
+          </a:blip>
+          <a:stretch>
+            <a:fillRect/>
+          </a:stretch>
+        </p:blipFill>
+        <p:spPr>
+          <a:xfrm>
+            <a:off x="4654296" y="1566526"/>
+            <a:ext cx="6903720" cy="3745268"/>
+          </a:xfrm>
+          <a:prstGeom prst="rect">
+            <a:avLst/>
+          </a:prstGeom>
+        </p:spPr>
+      </p:pic>
+    </p:spTree>
+  </p:cSld>
+  <p:clrMapOvr>
+    <a:masterClrMapping/>
+  </p:clrMapOvr>
+</p:sld>
+</file>
+
+<file path=ppt/slides/slide8.xml><?xml version="1.0" encoding="utf-8"?>
+<p:sld xmlns:a="http://schemas.openxmlformats.org/drawingml/2006/main" xmlns:r="http://schemas.openxmlformats.org/officeDocument/2006/relationships" xmlns:p="http://schemas.openxmlformats.org/presentationml/2006/main">
+  <p:cSld>
+    <p:bg>
+      <p:bgPr>
+        <a:solidFill>
+          <a:schemeClr val="bg1"/>
+        </a:solidFill>
+        <a:effectLst/>
+      </p:bgPr>
+    </p:bg>
+    <p:spTree>
+      <p:nvGrpSpPr>
+        <p:cNvPr id="1" name=""/>
+        <p:cNvGrpSpPr/>
+        <p:nvPr/>
+      </p:nvGrpSpPr>
+      <p:grpSpPr>
+        <a:xfrm>
+          <a:off x="0" y="0"/>
+          <a:ext cx="0" cy="0"/>
+          <a:chOff x="0" y="0"/>
+          <a:chExt cx="0" cy="0"/>
+        </a:xfrm>
+      </p:grpSpPr>
+      <p:sp useBgFill="1">
+        <p:nvSpPr>
+          <p:cNvPr id="79" name="Rectangle 78">
+            <a:extLst>
+              <a:ext uri="{FF2B5EF4-FFF2-40B4-BE49-F238E27FC236}">
+                <a16:creationId xmlns:a16="http://schemas.microsoft.com/office/drawing/2014/main" id="{0550F5B9-399F-4FAD-AE6C-ED65F9A43A74}"/>
+              </a:ext>
+              <a:ext uri="{C183D7F6-B498-43B3-948B-1728B52AA6E4}">
+                <adec:decorative xmlns:adec="http://schemas.microsoft.com/office/drawing/2017/decorative" val="1"/>
+              </a:ext>
+            </a:extLst>
+          </p:cNvPr>
+          <p:cNvSpPr>
+            <a:spLocks noGrp="1" noRot="1" noChangeAspect="1" noMove="1" noResize="1" noEditPoints="1" noAdjustHandles="1" noChangeArrowheads="1" noChangeShapeType="1" noTextEdit="1"/>
+          </p:cNvSpPr>
+          <p:nvPr>
+            <p:extLst>
+              <p:ext uri="{386F3935-93C4-4BCD-93E2-E3B085C9AB24}">
+                <p16:designElem xmlns:p16="http://schemas.microsoft.com/office/powerpoint/2015/main" val="1"/>
+              </p:ext>
+            </p:extLst>
+          </p:nvPr>
+        </p:nvSpPr>
+        <p:spPr>
+          <a:xfrm>
+            <a:off x="0" y="0"/>
+            <a:ext cx="12192000" cy="6858000"/>
+          </a:xfrm>
+          <a:prstGeom prst="rect">
+            <a:avLst/>
+          </a:prstGeom>
+          <a:ln>
+            <a:noFill/>
+          </a:ln>
+        </p:spPr>
+        <p:style>
+          <a:lnRef idx="2">
+            <a:schemeClr val="accent1">
+              <a:shade val="50000"/>
+            </a:schemeClr>
+          </a:lnRef>
+          <a:fillRef idx="1">
+            <a:schemeClr val="accent1"/>
+          </a:fillRef>
+          <a:effectRef idx="0">
+            <a:schemeClr val="accent1"/>
+          </a:effectRef>
+          <a:fontRef idx="minor">
+            <a:schemeClr val="lt1"/>
+          </a:fontRef>
+        </p:style>
+        <p:txBody>
+          <a:bodyPr rtlCol="0" anchor="ctr"/>
+          <a:lstStyle/>
+          <a:p>
+            <a:pPr algn="ctr"/>
+            <a:endParaRPr lang="en-US"/>
+          </a:p>
+        </p:txBody>
+      </p:sp>
+      <p:sp useBgFill="1">
+        <p:nvSpPr>
+          <p:cNvPr id="81" name="Rectangle 80">
+            <a:extLst>
+              <a:ext uri="{FF2B5EF4-FFF2-40B4-BE49-F238E27FC236}">
+                <a16:creationId xmlns:a16="http://schemas.microsoft.com/office/drawing/2014/main" id="{C062E60F-5CD4-4268-8359-8076634680E5}"/>
+              </a:ext>
+              <a:ext uri="{C183D7F6-B498-43B3-948B-1728B52AA6E4}">
+                <adec:decorative xmlns:adec="http://schemas.microsoft.com/office/drawing/2017/decorative" val="1"/>
+              </a:ext>
+            </a:extLst>
+          </p:cNvPr>
+          <p:cNvSpPr>
+            <a:spLocks noGrp="1" noRot="1" noChangeAspect="1" noMove="1" noResize="1" noEditPoints="1" noAdjustHandles="1" noChangeArrowheads="1" noChangeShapeType="1" noTextEdit="1"/>
+          </p:cNvSpPr>
+          <p:nvPr>
+            <p:extLst>
+              <p:ext uri="{386F3935-93C4-4BCD-93E2-E3B085C9AB24}">
+                <p16:designElem xmlns:p16="http://schemas.microsoft.com/office/powerpoint/2015/main" val="1"/>
+              </p:ext>
+            </p:extLst>
+          </p:nvPr>
+        </p:nvSpPr>
+        <p:spPr>
+          <a:xfrm>
+            <a:off x="554416" y="288350"/>
+            <a:ext cx="11167447" cy="2089317"/>
+          </a:xfrm>
+          <a:prstGeom prst="rect">
+            <a:avLst/>
+          </a:prstGeom>
+          <a:ln w="12700">
+            <a:solidFill>
+              <a:srgbClr val="DEDEDE"/>
+            </a:solidFill>
+          </a:ln>
+          <a:effectLst>
+            <a:outerShdw blurRad="50800" dist="38100" dir="2700000" algn="tl" rotWithShape="0">
+              <a:schemeClr val="bg2">
+                <a:lumMod val="85000"/>
+                <a:alpha val="50000"/>
+              </a:schemeClr>
+            </a:outerShdw>
+          </a:effectLst>
+        </p:spPr>
+        <p:style>
+          <a:lnRef idx="2">
+            <a:schemeClr val="accent1">
+              <a:shade val="50000"/>
+            </a:schemeClr>
+          </a:lnRef>
+          <a:fillRef idx="1">
+            <a:schemeClr val="accent1"/>
+          </a:fillRef>
+          <a:effectRef idx="0">
+            <a:schemeClr val="accent1"/>
+          </a:effectRef>
+          <a:fontRef idx="minor">
+            <a:schemeClr val="lt1"/>
+          </a:fontRef>
+        </p:style>
+        <p:txBody>
+          <a:bodyPr rtlCol="0" anchor="ctr"/>
+          <a:lstStyle/>
+          <a:p>
+            <a:pPr marL="0" marR="0" lvl="0" indent="0" algn="ctr" defTabSz="914400" rtl="0" eaLnBrk="1" fontAlgn="auto" latinLnBrk="0" hangingPunct="1">
+              <a:lnSpc>
+                <a:spcPct val="100000"/>
+              </a:lnSpc>
+              <a:spcBef>
+                <a:spcPts val="0"/>
+              </a:spcBef>
+              <a:spcAft>
+                <a:spcPts val="0"/>
+              </a:spcAft>
+              <a:buClrTx/>
+              <a:buSzTx/>
+              <a:buFontTx/>
+              <a:buNone/>
+              <a:tabLst/>
+              <a:defRPr/>
+            </a:pPr>
+            <a:endParaRPr kumimoji="0" lang="en-US" sz="1800" b="0" i="0" u="none" strike="noStrike" kern="1200" cap="none" spc="0" normalizeH="0" baseline="0" noProof="0">
+              <a:ln>
+                <a:noFill/>
+              </a:ln>
+              <a:solidFill>
+                <a:prstClr val="white"/>
+              </a:solidFill>
+              <a:effectLst/>
+              <a:uLnTx/>
+              <a:uFillTx/>
+              <a:latin typeface="Calibri" panose="020F0502020204030204"/>
+              <a:ea typeface="+mn-ea"/>
+              <a:cs typeface="+mn-cs"/>
+            </a:endParaRPr>
+          </a:p>
+        </p:txBody>
+      </p:sp>
+      <p:sp>
+        <p:nvSpPr>
+          <p:cNvPr id="72" name="PlaceHolder 1"/>
+          <p:cNvSpPr>
+            <a:spLocks noGrp="1"/>
+          </p:cNvSpPr>
+          <p:nvPr>
+            <p:ph type="title"/>
+          </p:nvPr>
+        </p:nvSpPr>
+        <p:spPr>
+          <a:xfrm>
+            <a:off x="841248" y="510047"/>
+            <a:ext cx="3300984" cy="1645920"/>
+          </a:xfrm>
+          <a:prstGeom prst="rect">
+            <a:avLst/>
+          </a:prstGeom>
+        </p:spPr>
+        <p:txBody>
+          <a:bodyPr vert="horz" lIns="91440" tIns="45720" rIns="91440" bIns="45720" rtlCol="0" anchor="ctr">
+            <a:normAutofit/>
+          </a:bodyPr>
+          <a:lstStyle/>
+          <a:p>
+            <a:pPr indent="0"/>
+            <a:r>
+              <a:rPr lang="en-US" sz="2800" b="0" u="none" strike="noStrike" dirty="0">
+                <a:effectLst/>
+                <a:uFillTx/>
+              </a:rPr>
+              <a:t>Predictive model</a:t>
+            </a:r>
+            <a:br>
+              <a:rPr lang="en-US" sz="2800" dirty="0"/>
+            </a:br>
+            <a:endParaRPr lang="en-US" sz="2800" b="0" u="none" strike="noStrike" dirty="0">
+              <a:effectLst/>
+              <a:uFillTx/>
+            </a:endParaRPr>
+          </a:p>
+        </p:txBody>
+      </p:sp>
+      <p:sp>
+        <p:nvSpPr>
+          <p:cNvPr id="89" name="Rectangle 88">
+            <a:extLst>
+              <a:ext uri="{FF2B5EF4-FFF2-40B4-BE49-F238E27FC236}">
+                <a16:creationId xmlns:a16="http://schemas.microsoft.com/office/drawing/2014/main" id="{BB341EC3-1810-4D33-BA3F-E2D0AA0ECFB6}"/>
+              </a:ext>
+              <a:ext uri="{C183D7F6-B498-43B3-948B-1728B52AA6E4}">
+                <adec:decorative xmlns:adec="http://schemas.microsoft.com/office/drawing/2017/decorative" val="1"/>
+              </a:ext>
+            </a:extLst>
+          </p:cNvPr>
+          <p:cNvSpPr>
+            <a:spLocks noGrp="1" noRot="1" noChangeAspect="1" noMove="1" noResize="1" noEditPoints="1" noAdjustHandles="1" noChangeArrowheads="1" noChangeShapeType="1" noTextEdit="1"/>
+          </p:cNvSpPr>
+          <p:nvPr>
+            <p:extLst>
+              <p:ext uri="{386F3935-93C4-4BCD-93E2-E3B085C9AB24}">
+                <p16:designElem xmlns:p16="http://schemas.microsoft.com/office/powerpoint/2015/main" val="1"/>
+              </p:ext>
+            </p:extLst>
+          </p:nvPr>
+        </p:nvSpPr>
+        <p:spPr>
+          <a:xfrm>
+            <a:off x="490408" y="980964"/>
+            <a:ext cx="128016" cy="704088"/>
+          </a:xfrm>
+          <a:prstGeom prst="rect">
+            <a:avLst/>
+          </a:prstGeom>
+          <a:solidFill>
+            <a:schemeClr val="accent2"/>
+          </a:solidFill>
+          <a:ln>
+            <a:noFill/>
+          </a:ln>
+        </p:spPr>
+        <p:style>
+          <a:lnRef idx="2">
+            <a:schemeClr val="accent1">
+              <a:shade val="50000"/>
+            </a:schemeClr>
+          </a:lnRef>
+          <a:fillRef idx="1">
+            <a:schemeClr val="accent1"/>
+          </a:fillRef>
+          <a:effectRef idx="0">
+            <a:schemeClr val="accent1"/>
+          </a:effectRef>
+          <a:fontRef idx="minor">
+            <a:schemeClr val="lt1"/>
+          </a:fontRef>
+        </p:style>
+        <p:txBody>
+          <a:bodyPr rtlCol="0" anchor="ctr"/>
+          <a:lstStyle/>
+          <a:p>
+            <a:pPr marL="0" marR="0" lvl="0" indent="0" algn="ctr" defTabSz="914400" rtl="0" eaLnBrk="1" fontAlgn="auto" latinLnBrk="0" hangingPunct="1">
+              <a:lnSpc>
+                <a:spcPct val="100000"/>
+              </a:lnSpc>
+              <a:spcBef>
+                <a:spcPts val="0"/>
+              </a:spcBef>
+              <a:spcAft>
+                <a:spcPts val="0"/>
+              </a:spcAft>
+              <a:buClrTx/>
+              <a:buSzTx/>
+              <a:buFontTx/>
+              <a:buNone/>
+              <a:tabLst/>
+              <a:defRPr/>
+            </a:pPr>
+            <a:endParaRPr kumimoji="0" lang="en-US" sz="1800" b="0" i="0" u="none" strike="noStrike" kern="1200" cap="none" spc="0" normalizeH="0" baseline="0" noProof="0" dirty="0">
+              <a:ln>
+                <a:noFill/>
+              </a:ln>
+              <a:solidFill>
+                <a:prstClr val="white"/>
+              </a:solidFill>
+              <a:effectLst/>
+              <a:uLnTx/>
+              <a:uFillTx/>
+              <a:latin typeface="Calibri" panose="020F0502020204030204"/>
+              <a:ea typeface="+mn-ea"/>
+              <a:cs typeface="+mn-cs"/>
+            </a:endParaRPr>
+          </a:p>
+        </p:txBody>
+      </p:sp>
+      <p:sp>
+        <p:nvSpPr>
+          <p:cNvPr id="90" name="Rectangle 89">
+            <a:extLst>
+              <a:ext uri="{FF2B5EF4-FFF2-40B4-BE49-F238E27FC236}">
+                <a16:creationId xmlns:a16="http://schemas.microsoft.com/office/drawing/2014/main" id="{10127CDE-2B99-47A8-BB3C-7D17519105E0}"/>
+              </a:ext>
+              <a:ext uri="{C183D7F6-B498-43B3-948B-1728B52AA6E4}">
+                <adec:decorative xmlns:adec="http://schemas.microsoft.com/office/drawing/2017/decorative" val="1"/>
+              </a:ext>
+            </a:extLst>
+          </p:cNvPr>
+          <p:cNvSpPr>
+            <a:spLocks noGrp="1" noRot="1" noChangeAspect="1" noMove="1" noResize="1" noEditPoints="1" noAdjustHandles="1" noChangeArrowheads="1" noChangeShapeType="1" noTextEdit="1"/>
+          </p:cNvSpPr>
+          <p:nvPr>
+            <p:extLst>
+              <p:ext uri="{386F3935-93C4-4BCD-93E2-E3B085C9AB24}">
+                <p16:designElem xmlns:p16="http://schemas.microsoft.com/office/powerpoint/2015/main" val="1"/>
+              </p:ext>
+            </p:extLst>
+          </p:nvPr>
+        </p:nvSpPr>
+        <p:spPr>
+          <a:xfrm rot="5400000">
+            <a:off x="3610864" y="1323863"/>
+            <a:ext cx="1463040" cy="18288"/>
+          </a:xfrm>
+          <a:prstGeom prst="rect">
+            <a:avLst/>
+          </a:prstGeom>
+          <a:solidFill>
+            <a:srgbClr val="D5D5D5"/>
+          </a:solidFill>
+          <a:ln w="3175">
+            <a:noFill/>
+          </a:ln>
+          <a:effectLst/>
+        </p:spPr>
+        <p:style>
+          <a:lnRef idx="2">
+            <a:schemeClr val="accent1">
+              <a:shade val="50000"/>
+            </a:schemeClr>
+          </a:lnRef>
+          <a:fillRef idx="1">
+            <a:schemeClr val="accent1"/>
+          </a:fillRef>
+          <a:effectRef idx="0">
+            <a:schemeClr val="accent1"/>
+          </a:effectRef>
+          <a:fontRef idx="minor">
+            <a:schemeClr val="lt1"/>
+          </a:fontRef>
+        </p:style>
+        <p:txBody>
+          <a:bodyPr rtlCol="0" anchor="ctr"/>
+          <a:lstStyle/>
+          <a:p>
+            <a:pPr marL="0" marR="0" lvl="0" indent="0" algn="ctr" defTabSz="914400" rtl="0" eaLnBrk="1" fontAlgn="auto" latinLnBrk="0" hangingPunct="1">
+              <a:lnSpc>
+                <a:spcPct val="100000"/>
+              </a:lnSpc>
+              <a:spcBef>
+                <a:spcPts val="0"/>
+              </a:spcBef>
+              <a:spcAft>
+                <a:spcPts val="0"/>
+              </a:spcAft>
+              <a:buClrTx/>
+              <a:buSzTx/>
+              <a:buFontTx/>
+              <a:buNone/>
+              <a:tabLst/>
+              <a:defRPr/>
+            </a:pPr>
+            <a:endParaRPr kumimoji="0" lang="en-US" sz="1800" b="0" i="0" u="none" strike="noStrike" kern="1200" cap="none" spc="0" normalizeH="0" baseline="0" noProof="0">
+              <a:ln>
+                <a:noFill/>
+              </a:ln>
+              <a:solidFill>
+                <a:prstClr val="white"/>
+              </a:solidFill>
+              <a:effectLst/>
+              <a:uLnTx/>
+              <a:uFillTx/>
+              <a:latin typeface="Calibri" panose="020F0502020204030204"/>
+              <a:ea typeface="+mn-ea"/>
+              <a:cs typeface="+mn-cs"/>
+            </a:endParaRPr>
+          </a:p>
+        </p:txBody>
+      </p:sp>
+      <p:sp>
+        <p:nvSpPr>
+          <p:cNvPr id="74" name="EvalFooter"/>
+          <p:cNvSpPr txBox="1"/>
+          <p:nvPr/>
+        </p:nvSpPr>
+        <p:spPr>
+          <a:xfrm>
+            <a:off x="4581144" y="408374"/>
+            <a:ext cx="6797366" cy="1969293"/>
+          </a:xfrm>
+          <a:prstGeom prst="rect">
+            <a:avLst/>
+          </a:prstGeom>
+        </p:spPr>
+        <p:txBody>
+          <a:bodyPr vert="horz" lIns="91440" tIns="45720" rIns="91440" bIns="45720" rtlCol="0" anchor="ctr">
+            <a:normAutofit fontScale="92500" lnSpcReduction="10000"/>
+          </a:bodyPr>
+          <a:lstStyle/>
+          <a:p>
+            <a:r>
+              <a:rPr lang="en-IN" dirty="0"/>
+              <a:t>The project utilized a </a:t>
+            </a:r>
+            <a:r>
+              <a:rPr lang="en-IN" b="1" dirty="0"/>
+              <a:t>multi-class classification</a:t>
+            </a:r>
+            <a:r>
+              <a:rPr lang="en-IN" dirty="0"/>
+              <a:t> approach to </a:t>
+            </a:r>
+            <a:r>
+              <a:rPr lang="en-IN" dirty="0" err="1"/>
+              <a:t>analyze</a:t>
+            </a:r>
+            <a:r>
+              <a:rPr lang="en-IN" dirty="0"/>
+              <a:t> the data. </a:t>
+            </a:r>
+          </a:p>
+          <a:p>
+            <a:r>
+              <a:rPr lang="en-IN" dirty="0"/>
+              <a:t>Three primary machine learning models were tested: </a:t>
+            </a:r>
+            <a:r>
+              <a:rPr lang="en-IN" b="1" dirty="0"/>
+              <a:t>Logistic Regression, Random Forest, and Decision Tree.</a:t>
+            </a:r>
+            <a:r>
+              <a:rPr lang="en-IN" dirty="0"/>
+              <a:t> To optimize the results, hyperparameter tuning was conducted using </a:t>
+            </a:r>
+            <a:r>
+              <a:rPr lang="en-IN" b="1" dirty="0" err="1"/>
+              <a:t>RandomizedCV</a:t>
+            </a:r>
+            <a:r>
+              <a:rPr lang="en-IN" b="1" dirty="0"/>
+              <a:t> Search on Random Forest model.</a:t>
+            </a:r>
+            <a:r>
+              <a:rPr lang="en-IN" dirty="0"/>
+              <a:t> Among the models tested, the </a:t>
+            </a:r>
+            <a:r>
+              <a:rPr lang="en-IN" b="1" dirty="0"/>
+              <a:t>Random Forest</a:t>
+            </a:r>
+            <a:r>
+              <a:rPr lang="en-IN" dirty="0"/>
+              <a:t> algorithm yielded the highest performance, achieving an accuracy of </a:t>
+            </a:r>
+            <a:r>
+              <a:rPr lang="en-IN" b="1" dirty="0"/>
+              <a:t>31%</a:t>
+            </a:r>
+            <a:r>
+              <a:rPr lang="en-IN" dirty="0"/>
+              <a:t>. </a:t>
+            </a:r>
+            <a:endParaRPr lang="en-US" sz="1000" dirty="0"/>
+          </a:p>
+        </p:txBody>
+      </p:sp>
+      <p:pic>
+        <p:nvPicPr>
+          <p:cNvPr id="7" name="Picture 6">
+            <a:extLst>
+              <a:ext uri="{FF2B5EF4-FFF2-40B4-BE49-F238E27FC236}">
+                <a16:creationId xmlns:a16="http://schemas.microsoft.com/office/drawing/2014/main" id="{464BF544-356B-9F28-62D4-66635EC02A34}"/>
+              </a:ext>
+            </a:extLst>
+          </p:cNvPr>
+          <p:cNvPicPr>
+            <a:picLocks noChangeAspect="1"/>
+          </p:cNvPicPr>
+          <p:nvPr/>
+        </p:nvPicPr>
+        <p:blipFill>
+          <a:blip r:embed="rId2" cstate="print">
+            <a:extLst>
+              <a:ext uri="{28A0092B-C50C-407E-A947-70E740481C1C}">
+                <a14:useLocalDpi xmlns:a14="http://schemas.microsoft.com/office/drawing/2010/main" val="0"/>
+              </a:ext>
+            </a:extLst>
+          </a:blip>
+          <a:stretch>
+            <a:fillRect/>
+          </a:stretch>
+        </p:blipFill>
+        <p:spPr>
+          <a:xfrm>
+            <a:off x="880636" y="2606462"/>
+            <a:ext cx="2938744" cy="3639312"/>
+          </a:xfrm>
+          <a:prstGeom prst="rect">
+            <a:avLst/>
+          </a:prstGeom>
+        </p:spPr>
+      </p:pic>
+      <p:pic>
+        <p:nvPicPr>
+          <p:cNvPr id="5" name="Picture 4">
+            <a:extLst>
+              <a:ext uri="{FF2B5EF4-FFF2-40B4-BE49-F238E27FC236}">
+                <a16:creationId xmlns:a16="http://schemas.microsoft.com/office/drawing/2014/main" id="{2DCAA203-5EED-84DA-560D-F0CF2B3E11C0}"/>
+              </a:ext>
+            </a:extLst>
+          </p:cNvPr>
+          <p:cNvPicPr>
+            <a:picLocks noChangeAspect="1"/>
+          </p:cNvPicPr>
+          <p:nvPr/>
+        </p:nvPicPr>
+        <p:blipFill>
+          <a:blip r:embed="rId3">
+            <a:extLst>
+              <a:ext uri="{28A0092B-C50C-407E-A947-70E740481C1C}">
+                <a14:useLocalDpi xmlns:a14="http://schemas.microsoft.com/office/drawing/2010/main" val="0"/>
+              </a:ext>
+            </a:extLst>
+          </a:blip>
+          <a:stretch>
+            <a:fillRect/>
+          </a:stretch>
+        </p:blipFill>
+        <p:spPr>
+          <a:xfrm>
+            <a:off x="4347599" y="3108833"/>
+            <a:ext cx="3584448" cy="2634569"/>
+          </a:xfrm>
+          <a:prstGeom prst="rect">
+            <a:avLst/>
+          </a:prstGeom>
+        </p:spPr>
+      </p:pic>
+      <p:pic>
+        <p:nvPicPr>
+          <p:cNvPr id="3" name="Picture 2">
+            <a:extLst>
+              <a:ext uri="{FF2B5EF4-FFF2-40B4-BE49-F238E27FC236}">
+                <a16:creationId xmlns:a16="http://schemas.microsoft.com/office/drawing/2014/main" id="{513383AB-A24D-4852-830E-6CABA6D280BD}"/>
+              </a:ext>
+            </a:extLst>
+          </p:cNvPr>
+          <p:cNvPicPr>
+            <a:picLocks noChangeAspect="1"/>
+          </p:cNvPicPr>
+          <p:nvPr/>
+        </p:nvPicPr>
+        <p:blipFill>
+          <a:blip r:embed="rId4">
+            <a:extLst>
+              <a:ext uri="{28A0092B-C50C-407E-A947-70E740481C1C}">
+                <a14:useLocalDpi xmlns:a14="http://schemas.microsoft.com/office/drawing/2010/main" val="0"/>
+              </a:ext>
+            </a:extLst>
+          </a:blip>
+          <a:stretch>
+            <a:fillRect/>
+          </a:stretch>
+        </p:blipFill>
+        <p:spPr>
+          <a:xfrm>
+            <a:off x="8137415" y="3525525"/>
+            <a:ext cx="3584448" cy="1801185"/>
+          </a:xfrm>
+          <a:prstGeom prst="rect">
+            <a:avLst/>
+          </a:prstGeom>
+        </p:spPr>
+      </p:pic>
+    </p:spTree>
+  </p:cSld>
+  <p:clrMapOvr>
+    <a:masterClrMapping/>
+  </p:clrMapOvr>
+</p:sld>
+</file>
+
+<file path=ppt/slides/slide9.xml><?xml version="1.0" encoding="utf-8"?>
+<p:sld xmlns:a="http://schemas.openxmlformats.org/drawingml/2006/main" xmlns:r="http://schemas.openxmlformats.org/officeDocument/2006/relationships" xmlns:p="http://schemas.openxmlformats.org/presentationml/2006/main">
   <p:cSld>
     <p:spTree>
       <p:nvGrpSpPr>
@@ -7300,7 +9544,13 @@
       </p:grpSpPr>
       <p:sp>
         <p:nvSpPr>
-          <p:cNvPr id="68" name="PlaceHolder 1"/>
+          <p:cNvPr id="2" name="Title 1">
+            <a:extLst>
+              <a:ext uri="{FF2B5EF4-FFF2-40B4-BE49-F238E27FC236}">
+                <a16:creationId xmlns:a16="http://schemas.microsoft.com/office/drawing/2014/main" id="{205710B4-74E5-37C2-2E0B-242D993B471F}"/>
+              </a:ext>
+            </a:extLst>
+          </p:cNvPr>
           <p:cNvSpPr>
             <a:spLocks noGrp="1"/>
           </p:cNvSpPr>
@@ -7310,1281 +9560,311 @@
         </p:nvSpPr>
         <p:spPr>
           <a:xfrm>
-            <a:off x="1828800" y="226080"/>
-            <a:ext cx="8229240" cy="1142640"/>
+            <a:off x="457199" y="274680"/>
+            <a:ext cx="10141889" cy="1142640"/>
           </a:xfrm>
-          <a:prstGeom prst="rect">
-            <a:avLst/>
-          </a:prstGeom>
-          <a:noFill/>
-          <a:ln w="0">
-            <a:noFill/>
-          </a:ln>
         </p:spPr>
         <p:txBody>
-          <a:bodyPr lIns="91440" rIns="91440" tIns="45720" bIns="45720" anchor="ctr">
-            <a:normAutofit fontScale="85000" lnSpcReduction="19999"/>
-          </a:bodyPr>
-          <a:p>
-            <a:pPr indent="0" algn="ctr" defTabSz="457200">
-              <a:lnSpc>
-                <a:spcPct val="100000"/>
-              </a:lnSpc>
-              <a:buNone/>
-            </a:pPr>
-            <a:r>
-              <a:rPr lang="en-US" sz="4400" b="0" u="none" strike="noStrike">
-                <a:solidFill>
-                  <a:schemeClr val="dk1"/>
-                </a:solidFill>
-                <a:effectLst/>
-                <a:uFillTx/>
-                <a:latin typeface="Calibri"/>
-              </a:rPr>
-              <a:t>Key Insight 1</a:t>
+          <a:bodyPr/>
+          <a:lstStyle/>
+          <a:p>
+            <a:r>
+              <a:rPr lang="en-US" sz="4000" dirty="0"/>
+              <a:t>Predictive model cont’d</a:t>
             </a:r>
             <a:br>
-              <a:rPr sz="4400"/>
+              <a:rPr lang="en-US" sz="4000" dirty="0"/>
             </a:br>
-            <a:endParaRPr lang="en-US" sz="4400" b="0" u="none" strike="noStrike">
-              <a:solidFill>
-                <a:schemeClr val="dk1"/>
-              </a:solidFill>
-              <a:effectLst/>
-              <a:uFillTx/>
-              <a:latin typeface="Calibri"/>
-            </a:endParaRPr>
+            <a:r>
+              <a:rPr lang="en-US" sz="4000" dirty="0"/>
+              <a:t>Details of response features</a:t>
+            </a:r>
+            <a:endParaRPr lang="en-IN" sz="4000" dirty="0"/>
           </a:p>
         </p:txBody>
       </p:sp>
-      <p:sp>
-        <p:nvSpPr>
-          <p:cNvPr id="69" name="TextBox 4"/>
-          <p:cNvSpPr/>
-          <p:nvPr/>
-        </p:nvSpPr>
-        <p:spPr>
-          <a:xfrm>
-            <a:off x="731520" y="1097280"/>
-            <a:ext cx="5486040" cy="4571640"/>
-          </a:xfrm>
-          <a:prstGeom prst="rect">
-            <a:avLst/>
-          </a:prstGeom>
-          <a:noFill/>
-          <a:ln w="0">
-            <a:noFill/>
-          </a:ln>
-        </p:spPr>
-        <p:style>
-          <a:lnRef idx="0"/>
-          <a:fillRef idx="0"/>
-          <a:effectRef idx="0"/>
-          <a:fontRef idx="minor"/>
-        </p:style>
-        <p:txBody>
-          <a:bodyPr wrap="none" lIns="90000" rIns="90000" tIns="45000" bIns="45000" anchor="t">
-            <a:spAutoFit/>
-          </a:bodyPr>
-          <a:p>
-            <a:pPr defTabSz="457200">
-              <a:lnSpc>
-                <a:spcPct val="100000"/>
-              </a:lnSpc>
-            </a:pPr>
-            <a:r>
-              <a:rPr lang="en-US" sz="2000" b="0" u="none" strike="noStrike">
-                <a:solidFill>
-                  <a:schemeClr val="dk1"/>
-                </a:solidFill>
-                <a:effectLst/>
-                <a:uFillTx/>
-                <a:latin typeface="Calibri"/>
-              </a:rPr>
-              <a:t>• Finding</a:t>
-            </a:r>
-            <a:endParaRPr lang="en-IN" sz="2000" b="0" u="none" strike="noStrike">
-              <a:solidFill>
-                <a:srgbClr val="000000"/>
-              </a:solidFill>
-              <a:effectLst/>
-              <a:uFillTx/>
-              <a:latin typeface="Arial"/>
-            </a:endParaRPr>
-          </a:p>
-          <a:p>
-            <a:pPr defTabSz="457200">
-              <a:lnSpc>
-                <a:spcPct val="100000"/>
-              </a:lnSpc>
-            </a:pPr>
-            <a:r>
-              <a:rPr lang="en-US" sz="2000" b="0" u="none" strike="noStrike">
-                <a:solidFill>
-                  <a:schemeClr val="dk1"/>
-                </a:solidFill>
-                <a:effectLst/>
-                <a:uFillTx/>
-                <a:latin typeface="Calibri"/>
-              </a:rPr>
-              <a:t>• Evidence</a:t>
-            </a:r>
-            <a:endParaRPr lang="en-IN" sz="2000" b="0" u="none" strike="noStrike">
-              <a:solidFill>
-                <a:srgbClr val="000000"/>
-              </a:solidFill>
-              <a:effectLst/>
-              <a:uFillTx/>
-              <a:latin typeface="Arial"/>
-            </a:endParaRPr>
-          </a:p>
-          <a:p>
-            <a:pPr defTabSz="457200">
-              <a:lnSpc>
-                <a:spcPct val="100000"/>
-              </a:lnSpc>
-            </a:pPr>
-            <a:r>
-              <a:rPr lang="en-US" sz="2000" b="0" u="none" strike="noStrike">
-                <a:solidFill>
-                  <a:schemeClr val="dk1"/>
-                </a:solidFill>
-                <a:effectLst/>
-                <a:uFillTx/>
-                <a:latin typeface="Calibri"/>
-              </a:rPr>
-              <a:t>• Interpretation</a:t>
-            </a:r>
-            <a:endParaRPr lang="en-IN" sz="2000" b="0" u="none" strike="noStrike">
-              <a:solidFill>
-                <a:srgbClr val="000000"/>
-              </a:solidFill>
-              <a:effectLst/>
-              <a:uFillTx/>
-              <a:latin typeface="Arial"/>
-            </a:endParaRPr>
-          </a:p>
-        </p:txBody>
-      </p:sp>
-      <p:sp>
-        <p:nvSpPr>
-          <p:cNvPr id="70" name="EvalFooter"/>
-          <p:cNvSpPr txBox="1"/>
-          <p:nvPr/>
-        </p:nvSpPr>
-        <p:spPr>
-          <a:xfrm>
-            <a:off x="457200" y="6217920"/>
-            <a:ext cx="8229600" cy="246221"/>
-          </a:xfrm>
-          <a:prstGeom prst="rect">
-            <a:avLst/>
-          </a:prstGeom>
-          <a:noFill/>
-        </p:spPr>
-        <p:txBody>
-          <a:bodyPr wrap="square">
-            <a:normAutofit/>
-          </a:bodyPr>
-          <a:lstStyle/>
-          <a:p>
-            <a:pPr>
-              <a:defRPr sz="1000"/>
-            </a:pPr>
-            <a:r>
-              <a:rPr lang="en-US" sz="1000" dirty="0"/>
-              <a:t>Evaluation: Depth of analysis | Policy relevance | Cross-dataset analysis | Innovation | Clarity of insights | Visualisation &amp; presentation</a:t>
-            </a:r>
-          </a:p>
-        </p:txBody>
-      </p:sp>
+      <mc:AlternateContent xmlns:mc="http://schemas.openxmlformats.org/markup-compatibility/2006">
+        <mc:Choice xmlns:a14="http://schemas.microsoft.com/office/drawing/2010/main" Requires="a14">
+          <p:sp>
+            <p:nvSpPr>
+              <p:cNvPr id="3" name="Text Placeholder 2">
+                <a:extLst>
+                  <a:ext uri="{FF2B5EF4-FFF2-40B4-BE49-F238E27FC236}">
+                    <a16:creationId xmlns:a16="http://schemas.microsoft.com/office/drawing/2014/main" id="{F6D302AE-19E3-1F9D-15EA-37BD2A98A1A1}"/>
+                  </a:ext>
+                </a:extLst>
+              </p:cNvPr>
+              <p:cNvSpPr>
+                <a:spLocks noGrp="1"/>
+              </p:cNvSpPr>
+              <p:nvPr>
+                <p:ph type="body"/>
+              </p:nvPr>
+            </p:nvSpPr>
+            <p:spPr>
+              <a:xfrm>
+                <a:off x="457199" y="2079266"/>
+                <a:ext cx="11056289" cy="2882347"/>
+              </a:xfrm>
+            </p:spPr>
+            <p:txBody>
+              <a:bodyPr>
+                <a:normAutofit fontScale="55000" lnSpcReduction="20000"/>
+              </a:bodyPr>
+              <a:lstStyle/>
+              <a:p>
+                <a:r>
+                  <a:rPr lang="en-IN" dirty="0"/>
+                  <a:t>To translate these results into actionable insights, an </a:t>
+                </a:r>
+                <a:r>
+                  <a:rPr lang="en-IN" b="1" dirty="0"/>
+                  <a:t>"At-Risk Flag"</a:t>
+                </a:r>
+                <a:r>
+                  <a:rPr lang="en-IN" dirty="0"/>
+                  <a:t> was created based on a calculated </a:t>
+                </a:r>
+                <a:r>
+                  <a:rPr lang="en-IN" b="1" dirty="0"/>
+                  <a:t>Competency Score</a:t>
+                </a:r>
+                <a:r>
+                  <a:rPr lang="en-IN" dirty="0"/>
+                  <a:t>. This score is used to categorize subjects into four distinct risk levels based on the following thresholds:</a:t>
+                </a:r>
+              </a:p>
+              <a:p>
+                <a:pPr lvl="0"/>
+                <a:r>
+                  <a:rPr lang="en-IN" b="1" dirty="0"/>
+                  <a:t>Severe Risk:</a:t>
+                </a:r>
+                <a:r>
+                  <a:rPr lang="en-IN" dirty="0"/>
+                  <a:t> Score </a:t>
+                </a:r>
+                <a14:m>
+                  <m:oMath xmlns:m="http://schemas.openxmlformats.org/officeDocument/2006/math">
+                    <m:r>
+                      <a:rPr lang="en-IN">
+                        <a:latin typeface="Cambria Math" panose="02040503050406030204" pitchFamily="18" charset="0"/>
+                      </a:rPr>
+                      <m:t>≤</m:t>
+                    </m:r>
+                  </m:oMath>
+                </a14:m>
+                <a:r>
+                  <a:rPr lang="en-IN" dirty="0"/>
+                  <a:t> 0.25</a:t>
+                </a:r>
+              </a:p>
+              <a:p>
+                <a:pPr lvl="0"/>
+                <a:r>
+                  <a:rPr lang="en-IN" b="1" dirty="0"/>
+                  <a:t>High Risk:</a:t>
+                </a:r>
+                <a:r>
+                  <a:rPr lang="en-IN" dirty="0"/>
+                  <a:t> 0.25 &lt; Score </a:t>
+                </a:r>
+                <a14:m>
+                  <m:oMath xmlns:m="http://schemas.openxmlformats.org/officeDocument/2006/math">
+                    <m:r>
+                      <a:rPr lang="en-IN">
+                        <a:latin typeface="Cambria Math" panose="02040503050406030204" pitchFamily="18" charset="0"/>
+                      </a:rPr>
+                      <m:t>≤</m:t>
+                    </m:r>
+                  </m:oMath>
+                </a14:m>
+                <a:r>
+                  <a:rPr lang="en-IN" dirty="0"/>
+                  <a:t> 0.50</a:t>
+                </a:r>
+              </a:p>
+              <a:p>
+                <a:pPr lvl="0"/>
+                <a:r>
+                  <a:rPr lang="en-IN" b="1" dirty="0"/>
+                  <a:t>Moderate Risk:</a:t>
+                </a:r>
+                <a:r>
+                  <a:rPr lang="en-IN" dirty="0"/>
+                  <a:t> 0.50 &lt; Score </a:t>
+                </a:r>
+                <a14:m>
+                  <m:oMath xmlns:m="http://schemas.openxmlformats.org/officeDocument/2006/math">
+                    <m:r>
+                      <a:rPr lang="en-IN">
+                        <a:latin typeface="Cambria Math" panose="02040503050406030204" pitchFamily="18" charset="0"/>
+                      </a:rPr>
+                      <m:t>≤</m:t>
+                    </m:r>
+                  </m:oMath>
+                </a14:m>
+                <a:r>
+                  <a:rPr lang="en-IN" dirty="0"/>
+                  <a:t>0.75</a:t>
+                </a:r>
+              </a:p>
+              <a:p>
+                <a:pPr lvl="0"/>
+                <a:r>
+                  <a:rPr lang="en-IN" b="1" dirty="0"/>
+                  <a:t>Low Risk:</a:t>
+                </a:r>
+                <a:r>
+                  <a:rPr lang="en-IN" dirty="0"/>
+                  <a:t> 0.75 &lt; Score </a:t>
+                </a:r>
+                <a14:m>
+                  <m:oMath xmlns:m="http://schemas.openxmlformats.org/officeDocument/2006/math">
+                    <m:r>
+                      <a:rPr lang="en-IN">
+                        <a:latin typeface="Cambria Math" panose="02040503050406030204" pitchFamily="18" charset="0"/>
+                      </a:rPr>
+                      <m:t>≤</m:t>
+                    </m:r>
+                  </m:oMath>
+                </a14:m>
+                <a:r>
+                  <a:rPr lang="en-IN" dirty="0"/>
+                  <a:t>1.00</a:t>
+                </a:r>
+              </a:p>
+              <a:p>
+                <a:pPr marL="0" indent="0">
+                  <a:buNone/>
+                </a:pPr>
+                <a:br>
+                  <a:rPr lang="en-IN" dirty="0"/>
+                </a:br>
+                <a:endParaRPr lang="en-IN" dirty="0"/>
+              </a:p>
+              <a:p>
+                <a:pPr lvl="0"/>
+                <a:endParaRPr lang="en-IN" dirty="0"/>
+              </a:p>
+              <a:p>
+                <a:pPr marL="514350" indent="-514350">
+                  <a:buFont typeface="+mj-lt"/>
+                  <a:buAutoNum type="arabicPeriod"/>
+                </a:pPr>
+                <a:endParaRPr lang="en-IN" dirty="0"/>
+              </a:p>
+              <a:p>
+                <a:pPr marL="0" indent="0">
+                  <a:buNone/>
+                </a:pPr>
+                <a:endParaRPr lang="en-IN" dirty="0"/>
+              </a:p>
+              <a:p>
+                <a:pPr marL="0" indent="0">
+                  <a:buNone/>
+                </a:pPr>
+                <a:endParaRPr lang="en-IN" dirty="0"/>
+              </a:p>
+              <a:p>
+                <a:endParaRPr lang="en-IN" dirty="0"/>
+              </a:p>
+            </p:txBody>
+          </p:sp>
+        </mc:Choice>
+        <mc:Fallback>
+          <p:sp>
+            <p:nvSpPr>
+              <p:cNvPr id="3" name="Text Placeholder 2">
+                <a:extLst>
+                  <a:ext uri="{FF2B5EF4-FFF2-40B4-BE49-F238E27FC236}">
+                    <a16:creationId xmlns:a16="http://schemas.microsoft.com/office/drawing/2014/main" id="{F6D302AE-19E3-1F9D-15EA-37BD2A98A1A1}"/>
+                  </a:ext>
+                </a:extLst>
+              </p:cNvPr>
+              <p:cNvSpPr>
+                <a:spLocks noGrp="1" noRot="1" noChangeAspect="1" noMove="1" noResize="1" noEditPoints="1" noAdjustHandles="1" noChangeArrowheads="1" noChangeShapeType="1" noTextEdit="1"/>
+              </p:cNvSpPr>
+              <p:nvPr>
+                <p:ph type="body"/>
+              </p:nvPr>
+            </p:nvSpPr>
+            <p:spPr>
+              <a:xfrm>
+                <a:off x="457199" y="2079266"/>
+                <a:ext cx="11056289" cy="2882347"/>
+              </a:xfrm>
+              <a:blipFill>
+                <a:blip r:embed="rId2"/>
+                <a:stretch>
+                  <a:fillRect l="-827" t="-18816"/>
+                </a:stretch>
+              </a:blipFill>
+            </p:spPr>
+            <p:txBody>
+              <a:bodyPr/>
+              <a:lstStyle/>
+              <a:p>
+                <a:r>
+                  <a:rPr lang="en-IN">
+                    <a:noFill/>
+                  </a:rPr>
+                  <a:t> </a:t>
+                </a:r>
+              </a:p>
+            </p:txBody>
+          </p:sp>
+        </mc:Fallback>
+      </mc:AlternateContent>
     </p:spTree>
+    <p:extLst>
+      <p:ext uri="{BB962C8B-B14F-4D97-AF65-F5344CB8AC3E}">
+        <p14:creationId xmlns:p14="http://schemas.microsoft.com/office/powerpoint/2010/main" val="4059675188"/>
+      </p:ext>
+    </p:extLst>
   </p:cSld>
-  <mc:AlternateContent>
-    <mc:Choice Requires="p14">
-      <p:transition spd="slow" p14:dur="2000"/>
-    </mc:Choice>
-    <mc:Fallback>
-      <p:transition spd="slow"/>
-    </mc:Fallback>
-  </mc:AlternateContent>
-</p:sld>
-</file>
-
-<file path=ppt/slides/slide6.xml><?xml version="1.0" encoding="utf-8"?>
-<p:sld xmlns:a="http://schemas.openxmlformats.org/drawingml/2006/main" xmlns:p="http://schemas.openxmlformats.org/presentationml/2006/main" xmlns:r="http://schemas.openxmlformats.org/officeDocument/2006/relationships" xmlns:p14="http://schemas.microsoft.com/office/powerpoint/2010/main" xmlns:p15="http://schemas.microsoft.com/office/powerpoint/2012/main" xmlns:mc="http://schemas.openxmlformats.org/markup-compatibility/2006">
-  <p:cSld>
-    <p:spTree>
-      <p:nvGrpSpPr>
-        <p:cNvPr id="1" name=""/>
-        <p:cNvGrpSpPr/>
-        <p:nvPr/>
-      </p:nvGrpSpPr>
-      <p:grpSpPr>
-        <a:xfrm>
-          <a:off x="0" y="0"/>
-          <a:ext cx="0" cy="0"/>
-          <a:chOff x="0" y="0"/>
-          <a:chExt cx="0" cy="0"/>
-        </a:xfrm>
-      </p:grpSpPr>
-      <p:sp>
-        <p:nvSpPr>
-          <p:cNvPr id="70" name="PlaceHolder 1"/>
-          <p:cNvSpPr>
-            <a:spLocks noGrp="1"/>
-          </p:cNvSpPr>
-          <p:nvPr>
-            <p:ph type="title"/>
-          </p:nvPr>
-        </p:nvSpPr>
-        <p:spPr>
-          <a:xfrm>
-            <a:off x="1828800" y="226080"/>
-            <a:ext cx="8229240" cy="1142640"/>
-          </a:xfrm>
-          <a:prstGeom prst="rect">
-            <a:avLst/>
-          </a:prstGeom>
-          <a:noFill/>
-          <a:ln w="0">
-            <a:noFill/>
-          </a:ln>
-        </p:spPr>
-        <p:txBody>
-          <a:bodyPr lIns="91440" rIns="91440" tIns="45720" bIns="45720" anchor="ctr">
-            <a:normAutofit fontScale="85000" lnSpcReduction="19999"/>
-          </a:bodyPr>
-          <a:p>
-            <a:pPr indent="0" algn="ctr" defTabSz="457200">
-              <a:lnSpc>
-                <a:spcPct val="100000"/>
-              </a:lnSpc>
-              <a:buNone/>
-            </a:pPr>
-            <a:r>
-              <a:rPr lang="en-US" sz="4400" b="0" u="none" strike="noStrike">
-                <a:solidFill>
-                  <a:schemeClr val="dk1"/>
-                </a:solidFill>
-                <a:effectLst/>
-                <a:uFillTx/>
-                <a:latin typeface="Calibri"/>
-              </a:rPr>
-              <a:t>Key Insight 2</a:t>
-            </a:r>
-            <a:br>
-              <a:rPr sz="4400"/>
-            </a:br>
-            <a:endParaRPr lang="en-US" sz="4400" b="0" u="none" strike="noStrike">
-              <a:solidFill>
-                <a:schemeClr val="dk1"/>
-              </a:solidFill>
-              <a:effectLst/>
-              <a:uFillTx/>
-              <a:latin typeface="Calibri"/>
-            </a:endParaRPr>
-          </a:p>
-        </p:txBody>
-      </p:sp>
-      <p:sp>
-        <p:nvSpPr>
-          <p:cNvPr id="71" name="TextBox 4"/>
-          <p:cNvSpPr/>
-          <p:nvPr/>
-        </p:nvSpPr>
-        <p:spPr>
-          <a:xfrm>
-            <a:off x="731520" y="1097280"/>
-            <a:ext cx="5486040" cy="4571640"/>
-          </a:xfrm>
-          <a:prstGeom prst="rect">
-            <a:avLst/>
-          </a:prstGeom>
-          <a:noFill/>
-          <a:ln w="0">
-            <a:noFill/>
-          </a:ln>
-        </p:spPr>
-        <p:style>
-          <a:lnRef idx="0"/>
-          <a:fillRef idx="0"/>
-          <a:effectRef idx="0"/>
-          <a:fontRef idx="minor"/>
-        </p:style>
-        <p:txBody>
-          <a:bodyPr wrap="none" lIns="90000" rIns="90000" tIns="45000" bIns="45000" anchor="t">
-            <a:spAutoFit/>
-          </a:bodyPr>
-          <a:p>
-            <a:pPr defTabSz="457200">
-              <a:lnSpc>
-                <a:spcPct val="100000"/>
-              </a:lnSpc>
-            </a:pPr>
-            <a:r>
-              <a:rPr lang="en-US" sz="2000" b="0" u="none" strike="noStrike">
-                <a:solidFill>
-                  <a:schemeClr val="dk1"/>
-                </a:solidFill>
-                <a:effectLst/>
-                <a:uFillTx/>
-                <a:latin typeface="Calibri"/>
-              </a:rPr>
-              <a:t>• Finding</a:t>
-            </a:r>
-            <a:endParaRPr lang="en-IN" sz="2000" b="0" u="none" strike="noStrike">
-              <a:solidFill>
-                <a:srgbClr val="000000"/>
-              </a:solidFill>
-              <a:effectLst/>
-              <a:uFillTx/>
-              <a:latin typeface="Arial"/>
-            </a:endParaRPr>
-          </a:p>
-          <a:p>
-            <a:pPr defTabSz="457200">
-              <a:lnSpc>
-                <a:spcPct val="100000"/>
-              </a:lnSpc>
-            </a:pPr>
-            <a:r>
-              <a:rPr lang="en-US" sz="2000" b="0" u="none" strike="noStrike">
-                <a:solidFill>
-                  <a:schemeClr val="dk1"/>
-                </a:solidFill>
-                <a:effectLst/>
-                <a:uFillTx/>
-                <a:latin typeface="Calibri"/>
-              </a:rPr>
-              <a:t>• Evidence</a:t>
-            </a:r>
-            <a:endParaRPr lang="en-IN" sz="2000" b="0" u="none" strike="noStrike">
-              <a:solidFill>
-                <a:srgbClr val="000000"/>
-              </a:solidFill>
-              <a:effectLst/>
-              <a:uFillTx/>
-              <a:latin typeface="Arial"/>
-            </a:endParaRPr>
-          </a:p>
-          <a:p>
-            <a:pPr defTabSz="457200">
-              <a:lnSpc>
-                <a:spcPct val="100000"/>
-              </a:lnSpc>
-            </a:pPr>
-            <a:r>
-              <a:rPr lang="en-US" sz="2000" b="0" u="none" strike="noStrike">
-                <a:solidFill>
-                  <a:schemeClr val="dk1"/>
-                </a:solidFill>
-                <a:effectLst/>
-                <a:uFillTx/>
-                <a:latin typeface="Calibri"/>
-              </a:rPr>
-              <a:t>• Implications</a:t>
-            </a:r>
-            <a:endParaRPr lang="en-IN" sz="2000" b="0" u="none" strike="noStrike">
-              <a:solidFill>
-                <a:srgbClr val="000000"/>
-              </a:solidFill>
-              <a:effectLst/>
-              <a:uFillTx/>
-              <a:latin typeface="Arial"/>
-            </a:endParaRPr>
-          </a:p>
-        </p:txBody>
-      </p:sp>
-      <p:sp>
-        <p:nvSpPr>
-          <p:cNvPr id="72" name="EvalFooter"/>
-          <p:cNvSpPr txBox="1"/>
-          <p:nvPr/>
-        </p:nvSpPr>
-        <p:spPr>
-          <a:xfrm>
-            <a:off x="457200" y="6217920"/>
-            <a:ext cx="8229600" cy="246221"/>
-          </a:xfrm>
-          <a:prstGeom prst="rect">
-            <a:avLst/>
-          </a:prstGeom>
-          <a:noFill/>
-        </p:spPr>
-        <p:txBody>
-          <a:bodyPr wrap="square">
-            <a:normAutofit/>
-          </a:bodyPr>
-          <a:lstStyle/>
-          <a:p>
-            <a:pPr>
-              <a:defRPr sz="1000"/>
-            </a:pPr>
-            <a:r>
-              <a:rPr lang="en-US" sz="1000" dirty="0"/>
-              <a:t>Evaluation: Depth of analysis | Policy relevance | Cross-dataset analysis | Innovation | Clarity of insights | Visualisation &amp; presentation</a:t>
-            </a:r>
-          </a:p>
-        </p:txBody>
-      </p:sp>
-    </p:spTree>
-  </p:cSld>
-  <mc:AlternateContent>
-    <mc:Choice Requires="p14">
-      <p:transition spd="slow" p14:dur="2000"/>
-    </mc:Choice>
-    <mc:Fallback>
-      <p:transition spd="slow"/>
-    </mc:Fallback>
-  </mc:AlternateContent>
-</p:sld>
-</file>
-
-<file path=ppt/slides/slide7.xml><?xml version="1.0" encoding="utf-8"?>
-<p:sld xmlns:a="http://schemas.openxmlformats.org/drawingml/2006/main" xmlns:p="http://schemas.openxmlformats.org/presentationml/2006/main" xmlns:r="http://schemas.openxmlformats.org/officeDocument/2006/relationships" xmlns:p14="http://schemas.microsoft.com/office/powerpoint/2010/main" xmlns:p15="http://schemas.microsoft.com/office/powerpoint/2012/main" xmlns:mc="http://schemas.openxmlformats.org/markup-compatibility/2006">
-  <p:cSld>
-    <p:spTree>
-      <p:nvGrpSpPr>
-        <p:cNvPr id="1" name=""/>
-        <p:cNvGrpSpPr/>
-        <p:nvPr/>
-      </p:nvGrpSpPr>
-      <p:grpSpPr>
-        <a:xfrm>
-          <a:off x="0" y="0"/>
-          <a:ext cx="0" cy="0"/>
-          <a:chOff x="0" y="0"/>
-          <a:chExt cx="0" cy="0"/>
-        </a:xfrm>
-      </p:grpSpPr>
-      <p:sp>
-        <p:nvSpPr>
-          <p:cNvPr id="72" name="PlaceHolder 1"/>
-          <p:cNvSpPr>
-            <a:spLocks noGrp="1"/>
-          </p:cNvSpPr>
-          <p:nvPr>
-            <p:ph type="title"/>
-          </p:nvPr>
-        </p:nvSpPr>
-        <p:spPr>
-          <a:xfrm>
-            <a:off x="1828800" y="251640"/>
-            <a:ext cx="8229240" cy="1142640"/>
-          </a:xfrm>
-          <a:prstGeom prst="rect">
-            <a:avLst/>
-          </a:prstGeom>
-          <a:noFill/>
-          <a:ln w="0">
-            <a:noFill/>
-          </a:ln>
-        </p:spPr>
-        <p:txBody>
-          <a:bodyPr lIns="91440" rIns="91440" tIns="45720" bIns="45720" anchor="ctr">
-            <a:normAutofit fontScale="85000" lnSpcReduction="19999"/>
-          </a:bodyPr>
-          <a:p>
-            <a:pPr indent="0" algn="ctr" defTabSz="457200">
-              <a:lnSpc>
-                <a:spcPct val="100000"/>
-              </a:lnSpc>
-              <a:buNone/>
-            </a:pPr>
-            <a:r>
-              <a:rPr lang="en-US" sz="4400" b="0" u="none" strike="noStrike">
-                <a:solidFill>
-                  <a:schemeClr val="dk1"/>
-                </a:solidFill>
-                <a:effectLst/>
-                <a:uFillTx/>
-                <a:latin typeface="Calibri"/>
-              </a:rPr>
-              <a:t>Predictive / Diagnostic Analysis</a:t>
-            </a:r>
-            <a:br>
-              <a:rPr sz="4400"/>
-            </a:br>
-            <a:endParaRPr lang="en-US" sz="4400" b="0" u="none" strike="noStrike">
-              <a:solidFill>
-                <a:schemeClr val="dk1"/>
-              </a:solidFill>
-              <a:effectLst/>
-              <a:uFillTx/>
-              <a:latin typeface="Calibri"/>
-            </a:endParaRPr>
-          </a:p>
-        </p:txBody>
-      </p:sp>
-      <p:sp>
-        <p:nvSpPr>
-          <p:cNvPr id="73" name="TextBox 4"/>
-          <p:cNvSpPr/>
-          <p:nvPr/>
-        </p:nvSpPr>
-        <p:spPr>
-          <a:xfrm>
-            <a:off x="731520" y="1097280"/>
-            <a:ext cx="5486040" cy="4571640"/>
-          </a:xfrm>
-          <a:prstGeom prst="rect">
-            <a:avLst/>
-          </a:prstGeom>
-          <a:noFill/>
-          <a:ln w="0">
-            <a:noFill/>
-          </a:ln>
-        </p:spPr>
-        <p:style>
-          <a:lnRef idx="0"/>
-          <a:fillRef idx="0"/>
-          <a:effectRef idx="0"/>
-          <a:fontRef idx="minor"/>
-        </p:style>
-        <p:txBody>
-          <a:bodyPr wrap="none" lIns="90000" rIns="90000" tIns="45000" bIns="45000" anchor="t">
-            <a:spAutoFit/>
-          </a:bodyPr>
-          <a:p>
-            <a:pPr defTabSz="457200">
-              <a:lnSpc>
-                <a:spcPct val="100000"/>
-              </a:lnSpc>
-            </a:pPr>
-            <a:r>
-              <a:rPr lang="en-US" sz="2000" b="0" u="none" strike="noStrike">
-                <a:solidFill>
-                  <a:schemeClr val="dk1"/>
-                </a:solidFill>
-                <a:effectLst/>
-                <a:uFillTx/>
-                <a:latin typeface="Calibri"/>
-              </a:rPr>
-              <a:t>• Model</a:t>
-            </a:r>
-            <a:endParaRPr lang="en-IN" sz="2000" b="0" u="none" strike="noStrike">
-              <a:solidFill>
-                <a:srgbClr val="000000"/>
-              </a:solidFill>
-              <a:effectLst/>
-              <a:uFillTx/>
-              <a:latin typeface="Arial"/>
-            </a:endParaRPr>
-          </a:p>
-          <a:p>
-            <a:pPr defTabSz="457200">
-              <a:lnSpc>
-                <a:spcPct val="100000"/>
-              </a:lnSpc>
-            </a:pPr>
-            <a:r>
-              <a:rPr lang="en-US" sz="2000" b="0" u="none" strike="noStrike">
-                <a:solidFill>
-                  <a:schemeClr val="dk1"/>
-                </a:solidFill>
-                <a:effectLst/>
-                <a:uFillTx/>
-                <a:latin typeface="Calibri"/>
-              </a:rPr>
-              <a:t>• Metrics</a:t>
-            </a:r>
-            <a:endParaRPr lang="en-IN" sz="2000" b="0" u="none" strike="noStrike">
-              <a:solidFill>
-                <a:srgbClr val="000000"/>
-              </a:solidFill>
-              <a:effectLst/>
-              <a:uFillTx/>
-              <a:latin typeface="Arial"/>
-            </a:endParaRPr>
-          </a:p>
-          <a:p>
-            <a:pPr defTabSz="457200">
-              <a:lnSpc>
-                <a:spcPct val="100000"/>
-              </a:lnSpc>
-            </a:pPr>
-            <a:r>
-              <a:rPr lang="en-US" sz="2000" b="0" u="none" strike="noStrike">
-                <a:solidFill>
-                  <a:schemeClr val="dk1"/>
-                </a:solidFill>
-                <a:effectLst/>
-                <a:uFillTx/>
-                <a:latin typeface="Calibri"/>
-              </a:rPr>
-              <a:t>• Important predictors</a:t>
-            </a:r>
-            <a:endParaRPr lang="en-IN" sz="2000" b="0" u="none" strike="noStrike">
-              <a:solidFill>
-                <a:srgbClr val="000000"/>
-              </a:solidFill>
-              <a:effectLst/>
-              <a:uFillTx/>
-              <a:latin typeface="Arial"/>
-            </a:endParaRPr>
-          </a:p>
-          <a:p>
-            <a:pPr defTabSz="457200">
-              <a:lnSpc>
-                <a:spcPct val="100000"/>
-              </a:lnSpc>
-            </a:pPr>
-            <a:r>
-              <a:rPr lang="en-US" sz="2000" b="0" u="none" strike="noStrike">
-                <a:solidFill>
-                  <a:schemeClr val="dk1"/>
-                </a:solidFill>
-                <a:effectLst/>
-                <a:uFillTx/>
-                <a:latin typeface="Calibri"/>
-              </a:rPr>
-              <a:t>• Early warning</a:t>
-            </a:r>
-            <a:endParaRPr lang="en-IN" sz="2000" b="0" u="none" strike="noStrike">
-              <a:solidFill>
-                <a:srgbClr val="000000"/>
-              </a:solidFill>
-              <a:effectLst/>
-              <a:uFillTx/>
-              <a:latin typeface="Arial"/>
-            </a:endParaRPr>
-          </a:p>
-        </p:txBody>
-      </p:sp>
-      <p:sp>
-        <p:nvSpPr>
-          <p:cNvPr id="74" name="EvalFooter"/>
-          <p:cNvSpPr txBox="1"/>
-          <p:nvPr/>
-        </p:nvSpPr>
-        <p:spPr>
-          <a:xfrm>
-            <a:off x="457200" y="6217920"/>
-            <a:ext cx="8229600" cy="246221"/>
-          </a:xfrm>
-          <a:prstGeom prst="rect">
-            <a:avLst/>
-          </a:prstGeom>
-          <a:noFill/>
-        </p:spPr>
-        <p:txBody>
-          <a:bodyPr wrap="square">
-            <a:normAutofit/>
-          </a:bodyPr>
-          <a:lstStyle/>
-          <a:p>
-            <a:pPr>
-              <a:defRPr sz="1000"/>
-            </a:pPr>
-            <a:r>
-              <a:rPr lang="en-US" sz="1000" dirty="0"/>
-              <a:t>Evaluation: Depth of analysis | Policy relevance | Cross-dataset analysis | Innovation | Clarity of insights | Visualisation &amp; presentation</a:t>
-            </a:r>
-          </a:p>
-        </p:txBody>
-      </p:sp>
-    </p:spTree>
-  </p:cSld>
-  <mc:AlternateContent>
-    <mc:Choice Requires="p14">
-      <p:transition spd="slow" p14:dur="2000"/>
-    </mc:Choice>
-    <mc:Fallback>
-      <p:transition spd="slow"/>
-    </mc:Fallback>
-  </mc:AlternateContent>
-</p:sld>
-</file>
-
-<file path=ppt/slides/slide8.xml><?xml version="1.0" encoding="utf-8"?>
-<p:sld xmlns:a="http://schemas.openxmlformats.org/drawingml/2006/main" xmlns:p="http://schemas.openxmlformats.org/presentationml/2006/main" xmlns:r="http://schemas.openxmlformats.org/officeDocument/2006/relationships" xmlns:p14="http://schemas.microsoft.com/office/powerpoint/2010/main" xmlns:p15="http://schemas.microsoft.com/office/powerpoint/2012/main" xmlns:mc="http://schemas.openxmlformats.org/markup-compatibility/2006">
-  <p:cSld>
-    <p:spTree>
-      <p:nvGrpSpPr>
-        <p:cNvPr id="1" name=""/>
-        <p:cNvGrpSpPr/>
-        <p:nvPr/>
-      </p:nvGrpSpPr>
-      <p:grpSpPr>
-        <a:xfrm>
-          <a:off x="0" y="0"/>
-          <a:ext cx="0" cy="0"/>
-          <a:chOff x="0" y="0"/>
-          <a:chExt cx="0" cy="0"/>
-        </a:xfrm>
-      </p:grpSpPr>
-      <p:sp>
-        <p:nvSpPr>
-          <p:cNvPr id="74" name="PlaceHolder 1"/>
-          <p:cNvSpPr>
-            <a:spLocks noGrp="1"/>
-          </p:cNvSpPr>
-          <p:nvPr>
-            <p:ph type="title"/>
-          </p:nvPr>
-        </p:nvSpPr>
-        <p:spPr>
-          <a:xfrm>
-            <a:off x="1828800" y="226080"/>
-            <a:ext cx="8229240" cy="1142640"/>
-          </a:xfrm>
-          <a:prstGeom prst="rect">
-            <a:avLst/>
-          </a:prstGeom>
-          <a:noFill/>
-          <a:ln w="0">
-            <a:noFill/>
-          </a:ln>
-        </p:spPr>
-        <p:txBody>
-          <a:bodyPr lIns="91440" rIns="91440" tIns="45720" bIns="45720" anchor="ctr">
-            <a:normAutofit fontScale="85000" lnSpcReduction="19999"/>
-          </a:bodyPr>
-          <a:p>
-            <a:pPr indent="0" algn="ctr" defTabSz="457200">
-              <a:lnSpc>
-                <a:spcPct val="100000"/>
-              </a:lnSpc>
-              <a:buNone/>
-            </a:pPr>
-            <a:r>
-              <a:rPr lang="en-US" sz="4400" b="0" u="none" strike="noStrike">
-                <a:solidFill>
-                  <a:schemeClr val="dk1"/>
-                </a:solidFill>
-                <a:effectLst/>
-                <a:uFillTx/>
-                <a:latin typeface="Calibri"/>
-              </a:rPr>
-              <a:t>Visualization / Dashboard</a:t>
-            </a:r>
-            <a:br>
-              <a:rPr sz="4400"/>
-            </a:br>
-            <a:endParaRPr lang="en-US" sz="4400" b="0" u="none" strike="noStrike">
-              <a:solidFill>
-                <a:schemeClr val="dk1"/>
-              </a:solidFill>
-              <a:effectLst/>
-              <a:uFillTx/>
-              <a:latin typeface="Calibri"/>
-            </a:endParaRPr>
-          </a:p>
-        </p:txBody>
-      </p:sp>
-      <p:sp>
-        <p:nvSpPr>
-          <p:cNvPr id="75" name="TextBox 2"/>
-          <p:cNvSpPr/>
-          <p:nvPr/>
-        </p:nvSpPr>
-        <p:spPr>
-          <a:xfrm>
-            <a:off x="457200" y="274320"/>
-            <a:ext cx="184320" cy="522720"/>
-          </a:xfrm>
-          <a:prstGeom prst="rect">
-            <a:avLst/>
-          </a:prstGeom>
-          <a:noFill/>
-          <a:ln w="0">
-            <a:noFill/>
-          </a:ln>
-        </p:spPr>
-        <p:style>
-          <a:lnRef idx="0"/>
-          <a:fillRef idx="0"/>
-          <a:effectRef idx="0"/>
-          <a:fontRef idx="minor"/>
-        </p:style>
-        <p:txBody>
-          <a:bodyPr wrap="none" lIns="90000" rIns="90000" tIns="45000" bIns="45000" anchor="t">
-            <a:spAutoFit/>
-          </a:bodyPr>
-          <a:p>
-            <a:pPr defTabSz="457200">
-              <a:lnSpc>
-                <a:spcPct val="100000"/>
-              </a:lnSpc>
-            </a:pPr>
-            <a:endParaRPr lang="en-US" sz="2800" b="1" u="none" strike="noStrike">
-              <a:solidFill>
-                <a:schemeClr val="dk1"/>
-              </a:solidFill>
-              <a:effectLst/>
-              <a:uFillTx/>
-              <a:latin typeface="Calibri"/>
-            </a:endParaRPr>
-          </a:p>
-        </p:txBody>
-      </p:sp>
-      <p:sp>
-        <p:nvSpPr>
-          <p:cNvPr id="76" name="TextBox 4"/>
-          <p:cNvSpPr/>
-          <p:nvPr/>
-        </p:nvSpPr>
-        <p:spPr>
-          <a:xfrm>
-            <a:off x="731520" y="1097280"/>
-            <a:ext cx="5486040" cy="4571640"/>
-          </a:xfrm>
-          <a:prstGeom prst="rect">
-            <a:avLst/>
-          </a:prstGeom>
-          <a:noFill/>
-          <a:ln w="0">
-            <a:noFill/>
-          </a:ln>
-        </p:spPr>
-        <p:style>
-          <a:lnRef idx="0"/>
-          <a:fillRef idx="0"/>
-          <a:effectRef idx="0"/>
-          <a:fontRef idx="minor"/>
-        </p:style>
-        <p:txBody>
-          <a:bodyPr wrap="none" lIns="90000" rIns="90000" tIns="45000" bIns="45000" anchor="t">
-            <a:spAutoFit/>
-          </a:bodyPr>
-          <a:p>
-            <a:pPr defTabSz="457200">
-              <a:lnSpc>
-                <a:spcPct val="100000"/>
-              </a:lnSpc>
-            </a:pPr>
-            <a:r>
-              <a:rPr lang="en-US" sz="2000" b="0" u="none" strike="noStrike">
-                <a:solidFill>
-                  <a:schemeClr val="dk1"/>
-                </a:solidFill>
-                <a:effectLst/>
-                <a:uFillTx/>
-                <a:latin typeface="Calibri"/>
-              </a:rPr>
-              <a:t>• Dashboard screenshots</a:t>
-            </a:r>
-            <a:endParaRPr lang="en-IN" sz="2000" b="0" u="none" strike="noStrike">
-              <a:solidFill>
-                <a:srgbClr val="000000"/>
-              </a:solidFill>
-              <a:effectLst/>
-              <a:uFillTx/>
-              <a:latin typeface="Arial"/>
-            </a:endParaRPr>
-          </a:p>
-          <a:p>
-            <a:pPr defTabSz="457200">
-              <a:lnSpc>
-                <a:spcPct val="100000"/>
-              </a:lnSpc>
-            </a:pPr>
-            <a:r>
-              <a:rPr lang="en-US" sz="2000" b="0" u="none" strike="noStrike">
-                <a:solidFill>
-                  <a:schemeClr val="dk1"/>
-                </a:solidFill>
-                <a:effectLst/>
-                <a:uFillTx/>
-                <a:latin typeface="Calibri"/>
-              </a:rPr>
-              <a:t>• KPIs</a:t>
-            </a:r>
-            <a:endParaRPr lang="en-IN" sz="2000" b="0" u="none" strike="noStrike">
-              <a:solidFill>
-                <a:srgbClr val="000000"/>
-              </a:solidFill>
-              <a:effectLst/>
-              <a:uFillTx/>
-              <a:latin typeface="Arial"/>
-            </a:endParaRPr>
-          </a:p>
-          <a:p>
-            <a:pPr defTabSz="457200">
-              <a:lnSpc>
-                <a:spcPct val="100000"/>
-              </a:lnSpc>
-            </a:pPr>
-            <a:r>
-              <a:rPr lang="en-US" sz="2000" b="0" u="none" strike="noStrike">
-                <a:solidFill>
-                  <a:schemeClr val="dk1"/>
-                </a:solidFill>
-                <a:effectLst/>
-                <a:uFillTx/>
-                <a:latin typeface="Calibri"/>
-              </a:rPr>
-              <a:t>• Maps/Charts</a:t>
-            </a:r>
-            <a:endParaRPr lang="en-IN" sz="2000" b="0" u="none" strike="noStrike">
-              <a:solidFill>
-                <a:srgbClr val="000000"/>
-              </a:solidFill>
-              <a:effectLst/>
-              <a:uFillTx/>
-              <a:latin typeface="Arial"/>
-            </a:endParaRPr>
-          </a:p>
-        </p:txBody>
-      </p:sp>
-      <p:sp>
-        <p:nvSpPr>
-          <p:cNvPr id="77" name="EvalFooter"/>
-          <p:cNvSpPr txBox="1"/>
-          <p:nvPr/>
-        </p:nvSpPr>
-        <p:spPr>
-          <a:xfrm>
-            <a:off x="457200" y="6217920"/>
-            <a:ext cx="8229600" cy="246221"/>
-          </a:xfrm>
-          <a:prstGeom prst="rect">
-            <a:avLst/>
-          </a:prstGeom>
-          <a:noFill/>
-        </p:spPr>
-        <p:txBody>
-          <a:bodyPr wrap="square">
-            <a:normAutofit/>
-          </a:bodyPr>
-          <a:lstStyle/>
-          <a:p>
-            <a:pPr>
-              <a:defRPr sz="1000"/>
-            </a:pPr>
-            <a:r>
-              <a:rPr lang="en-US" sz="1000" dirty="0"/>
-              <a:t>Evaluation: Depth of analysis | Policy relevance | Cross-dataset analysis | Innovation | Clarity of insights | Visualisation &amp; presentation</a:t>
-            </a:r>
-          </a:p>
-        </p:txBody>
-      </p:sp>
-    </p:spTree>
-  </p:cSld>
-  <mc:AlternateContent>
-    <mc:Choice Requires="p14">
-      <p:transition spd="slow" p14:dur="2000"/>
-    </mc:Choice>
-    <mc:Fallback>
-      <p:transition spd="slow"/>
-    </mc:Fallback>
-  </mc:AlternateContent>
-</p:sld>
-</file>
-
-<file path=ppt/slides/slide9.xml><?xml version="1.0" encoding="utf-8"?>
-<p:sld xmlns:a="http://schemas.openxmlformats.org/drawingml/2006/main" xmlns:p="http://schemas.openxmlformats.org/presentationml/2006/main" xmlns:r="http://schemas.openxmlformats.org/officeDocument/2006/relationships" xmlns:p14="http://schemas.microsoft.com/office/powerpoint/2010/main" xmlns:p15="http://schemas.microsoft.com/office/powerpoint/2012/main" xmlns:mc="http://schemas.openxmlformats.org/markup-compatibility/2006">
-  <p:cSld>
-    <p:spTree>
-      <p:nvGrpSpPr>
-        <p:cNvPr id="1" name=""/>
-        <p:cNvGrpSpPr/>
-        <p:nvPr/>
-      </p:nvGrpSpPr>
-      <p:grpSpPr>
-        <a:xfrm>
-          <a:off x="0" y="0"/>
-          <a:ext cx="0" cy="0"/>
-          <a:chOff x="0" y="0"/>
-          <a:chExt cx="0" cy="0"/>
-        </a:xfrm>
-      </p:grpSpPr>
-      <p:sp>
-        <p:nvSpPr>
-          <p:cNvPr id="77" name="PlaceHolder 1"/>
-          <p:cNvSpPr>
-            <a:spLocks noGrp="1"/>
-          </p:cNvSpPr>
-          <p:nvPr>
-            <p:ph type="title"/>
-          </p:nvPr>
-        </p:nvSpPr>
-        <p:spPr>
-          <a:xfrm>
-            <a:off x="1828800" y="308880"/>
-            <a:ext cx="8229240" cy="1142640"/>
-          </a:xfrm>
-          <a:prstGeom prst="rect">
-            <a:avLst/>
-          </a:prstGeom>
-          <a:noFill/>
-          <a:ln w="0">
-            <a:noFill/>
-          </a:ln>
-        </p:spPr>
-        <p:txBody>
-          <a:bodyPr lIns="91440" rIns="91440" tIns="45720" bIns="45720" anchor="ctr">
-            <a:normAutofit fontScale="85000" lnSpcReduction="19999"/>
-          </a:bodyPr>
-          <a:p>
-            <a:pPr indent="0" algn="ctr" defTabSz="457200">
-              <a:lnSpc>
-                <a:spcPct val="100000"/>
-              </a:lnSpc>
-              <a:buNone/>
-            </a:pPr>
-            <a:r>
-              <a:rPr lang="en-US" sz="4400" b="0" u="none" strike="noStrike">
-                <a:solidFill>
-                  <a:schemeClr val="dk1"/>
-                </a:solidFill>
-                <a:effectLst/>
-                <a:uFillTx/>
-                <a:latin typeface="Calibri"/>
-              </a:rPr>
-              <a:t>Recommendations and Road Map</a:t>
-            </a:r>
-            <a:br>
-              <a:rPr sz="4400"/>
-            </a:br>
-            <a:endParaRPr lang="en-US" sz="4400" b="0" u="none" strike="noStrike">
-              <a:solidFill>
-                <a:schemeClr val="dk1"/>
-              </a:solidFill>
-              <a:effectLst/>
-              <a:uFillTx/>
-              <a:latin typeface="Calibri"/>
-            </a:endParaRPr>
-          </a:p>
-        </p:txBody>
-      </p:sp>
-      <p:sp>
-        <p:nvSpPr>
-          <p:cNvPr id="78" name="TextBox 2"/>
-          <p:cNvSpPr/>
-          <p:nvPr/>
-        </p:nvSpPr>
-        <p:spPr>
-          <a:xfrm>
-            <a:off x="457200" y="274320"/>
-            <a:ext cx="184320" cy="522720"/>
-          </a:xfrm>
-          <a:prstGeom prst="rect">
-            <a:avLst/>
-          </a:prstGeom>
-          <a:noFill/>
-          <a:ln w="0">
-            <a:noFill/>
-          </a:ln>
-        </p:spPr>
-        <p:style>
-          <a:lnRef idx="0"/>
-          <a:fillRef idx="0"/>
-          <a:effectRef idx="0"/>
-          <a:fontRef idx="minor"/>
-        </p:style>
-        <p:txBody>
-          <a:bodyPr wrap="none" lIns="90000" rIns="90000" tIns="45000" bIns="45000" anchor="t">
-            <a:spAutoFit/>
-          </a:bodyPr>
-          <a:p>
-            <a:pPr defTabSz="457200">
-              <a:lnSpc>
-                <a:spcPct val="100000"/>
-              </a:lnSpc>
-            </a:pPr>
-            <a:endParaRPr lang="en-US" sz="2800" b="1" u="none" strike="noStrike">
-              <a:solidFill>
-                <a:schemeClr val="dk1"/>
-              </a:solidFill>
-              <a:effectLst/>
-              <a:uFillTx/>
-              <a:latin typeface="Calibri"/>
-            </a:endParaRPr>
-          </a:p>
-        </p:txBody>
-      </p:sp>
-      <p:sp>
-        <p:nvSpPr>
-          <p:cNvPr id="79" name="TextBox 4"/>
-          <p:cNvSpPr/>
-          <p:nvPr/>
-        </p:nvSpPr>
-        <p:spPr>
-          <a:xfrm>
-            <a:off x="731520" y="1097280"/>
-            <a:ext cx="5486040" cy="4571640"/>
-          </a:xfrm>
-          <a:prstGeom prst="rect">
-            <a:avLst/>
-          </a:prstGeom>
-          <a:noFill/>
-          <a:ln w="0">
-            <a:noFill/>
-          </a:ln>
-        </p:spPr>
-        <p:style>
-          <a:lnRef idx="0"/>
-          <a:fillRef idx="0"/>
-          <a:effectRef idx="0"/>
-          <a:fontRef idx="minor"/>
-        </p:style>
-        <p:txBody>
-          <a:bodyPr wrap="none" lIns="90000" rIns="90000" tIns="45000" bIns="45000" anchor="t">
-            <a:spAutoFit/>
-          </a:bodyPr>
-          <a:p>
-            <a:pPr defTabSz="457200">
-              <a:lnSpc>
-                <a:spcPct val="100000"/>
-              </a:lnSpc>
-            </a:pPr>
-            <a:r>
-              <a:rPr lang="en-US" sz="2000" b="0" u="none" strike="noStrike">
-                <a:solidFill>
-                  <a:schemeClr val="dk1"/>
-                </a:solidFill>
-                <a:effectLst/>
-                <a:uFillTx/>
-                <a:latin typeface="Calibri"/>
-              </a:rPr>
-              <a:t>• Priority actions</a:t>
-            </a:r>
-            <a:endParaRPr lang="en-IN" sz="2000" b="0" u="none" strike="noStrike">
-              <a:solidFill>
-                <a:srgbClr val="000000"/>
-              </a:solidFill>
-              <a:effectLst/>
-              <a:uFillTx/>
-              <a:latin typeface="Arial"/>
-            </a:endParaRPr>
-          </a:p>
-          <a:p>
-            <a:pPr defTabSz="457200">
-              <a:lnSpc>
-                <a:spcPct val="100000"/>
-              </a:lnSpc>
-            </a:pPr>
-            <a:r>
-              <a:rPr lang="en-US" sz="2000" b="0" u="none" strike="noStrike">
-                <a:solidFill>
-                  <a:schemeClr val="dk1"/>
-                </a:solidFill>
-                <a:effectLst/>
-                <a:uFillTx/>
-                <a:latin typeface="Calibri"/>
-              </a:rPr>
-              <a:t>• Impact</a:t>
-            </a:r>
-            <a:endParaRPr lang="en-IN" sz="2000" b="0" u="none" strike="noStrike">
-              <a:solidFill>
-                <a:srgbClr val="000000"/>
-              </a:solidFill>
-              <a:effectLst/>
-              <a:uFillTx/>
-              <a:latin typeface="Arial"/>
-            </a:endParaRPr>
-          </a:p>
-          <a:p>
-            <a:pPr defTabSz="457200">
-              <a:lnSpc>
-                <a:spcPct val="100000"/>
-              </a:lnSpc>
-            </a:pPr>
-            <a:r>
-              <a:rPr lang="en-US" sz="2000" b="0" u="none" strike="noStrike">
-                <a:solidFill>
-                  <a:schemeClr val="dk1"/>
-                </a:solidFill>
-                <a:effectLst/>
-                <a:uFillTx/>
-                <a:latin typeface="Calibri"/>
-              </a:rPr>
-              <a:t>• Feasibility</a:t>
-            </a:r>
-            <a:endParaRPr lang="en-IN" sz="2000" b="0" u="none" strike="noStrike">
-              <a:solidFill>
-                <a:srgbClr val="000000"/>
-              </a:solidFill>
-              <a:effectLst/>
-              <a:uFillTx/>
-              <a:latin typeface="Arial"/>
-            </a:endParaRPr>
-          </a:p>
-        </p:txBody>
-      </p:sp>
-      <p:sp>
-        <p:nvSpPr>
-          <p:cNvPr id="80" name="EvalFooter"/>
-          <p:cNvSpPr txBox="1"/>
-          <p:nvPr/>
-        </p:nvSpPr>
-        <p:spPr>
-          <a:xfrm>
-            <a:off x="457200" y="6217920"/>
-            <a:ext cx="8229600" cy="246221"/>
-          </a:xfrm>
-          <a:prstGeom prst="rect">
-            <a:avLst/>
-          </a:prstGeom>
-          <a:noFill/>
-        </p:spPr>
-        <p:txBody>
-          <a:bodyPr wrap="square">
-            <a:normAutofit/>
-          </a:bodyPr>
-          <a:lstStyle/>
-          <a:p>
-            <a:pPr>
-              <a:defRPr sz="1000"/>
-            </a:pPr>
-            <a:r>
-              <a:rPr lang="en-US" sz="1000" dirty="0"/>
-              <a:t>Evaluation: Depth of analysis | Policy relevance | Cross-dataset analysis | Innovation | Clarity of insights | Visualisation &amp; presentation</a:t>
-            </a:r>
-          </a:p>
-        </p:txBody>
-      </p:sp>
-    </p:spTree>
-  </p:cSld>
-  <mc:AlternateContent>
-    <mc:Choice Requires="p14">
-      <p:transition spd="slow" p14:dur="2000"/>
-    </mc:Choice>
-    <mc:Fallback>
-      <p:transition spd="slow"/>
-    </mc:Fallback>
-  </mc:AlternateContent>
+  <p:clrMapOvr>
+    <a:masterClrMapping/>
+  </p:clrMapOvr>
 </p:sld>
 </file>
 
 <file path=ppt/theme/theme1.xml><?xml version="1.0" encoding="utf-8"?>
-<a:theme xmlns:a="http://schemas.openxmlformats.org/drawingml/2006/main" xmlns:r="http://schemas.openxmlformats.org/officeDocument/2006/relationships" name="Office Theme">
+<a:theme xmlns:a="http://schemas.openxmlformats.org/drawingml/2006/main" name="Office Theme">
   <a:themeElements>
     <a:clrScheme name="Office">
       <a:dk1>
         <a:srgbClr val="000000"/>
       </a:dk1>
       <a:lt1>
-        <a:srgbClr val="ffffff"/>
+        <a:srgbClr val="FFFFFF"/>
       </a:lt1>
       <a:dk2>
-        <a:srgbClr val="1f497d"/>
+        <a:srgbClr val="1F497D"/>
       </a:dk2>
       <a:lt2>
-        <a:srgbClr val="eeece1"/>
+        <a:srgbClr val="EEECE1"/>
       </a:lt2>
       <a:accent1>
-        <a:srgbClr val="4f81bd"/>
+        <a:srgbClr val="4F81BD"/>
       </a:accent1>
       <a:accent2>
-        <a:srgbClr val="c0504d"/>
+        <a:srgbClr val="C0504D"/>
       </a:accent2>
       <a:accent3>
-        <a:srgbClr val="9bbb59"/>
+        <a:srgbClr val="9BBB59"/>
       </a:accent3>
       <a:accent4>
-        <a:srgbClr val="8064a2"/>
+        <a:srgbClr val="8064A2"/>
       </a:accent4>
       <a:accent5>
-        <a:srgbClr val="4bacc6"/>
+        <a:srgbClr val="4BACC6"/>
       </a:accent5>
       <a:accent6>
-        <a:srgbClr val="f79646"/>
+        <a:srgbClr val="F79646"/>
       </a:accent6>
       <a:hlink>
-        <a:srgbClr val="0000ff"/>
+        <a:srgbClr val="0000FF"/>
       </a:hlink>
       <a:folHlink>
         <a:srgbClr val="800080"/>
@@ -8592,12 +9872,12 @@
     </a:clrScheme>
     <a:fontScheme name="Office">
       <a:majorFont>
-        <a:latin typeface="Calibri" pitchFamily="0" charset="1"/>
+        <a:latin typeface="Calibri"/>
         <a:ea typeface=""/>
         <a:cs typeface=""/>
       </a:majorFont>
       <a:minorFont>
-        <a:latin typeface="Calibri" pitchFamily="0" charset="1"/>
+        <a:latin typeface="Calibri"/>
         <a:ea typeface=""/>
         <a:cs typeface=""/>
       </a:minorFont>
@@ -8626,7 +9906,7 @@
             </a:gs>
           </a:gsLst>
           <a:lin ang="16200000" scaled="1"/>
-          <a:tileRect l="0" t="0" r="0" b="0"/>
+          <a:tileRect/>
         </a:gradFill>
         <a:gradFill>
           <a:gsLst>
@@ -8644,7 +9924,7 @@
             </a:gs>
           </a:gsLst>
           <a:lin ang="16200000" scaled="0"/>
-          <a:tileRect l="0" t="0" r="0" b="0"/>
+          <a:tileRect/>
         </a:gradFill>
       </a:fillStyleLst>
       <a:lnStyleLst>
@@ -8695,7 +9975,7 @@
           <a:path path="circle">
             <a:fillToRect l="50000" t="-80000" r="50000" b="180000"/>
           </a:path>
-          <a:tileRect l="0" t="0" r="0" b="0"/>
+          <a:tileRect/>
         </a:gradFill>
         <a:gradFill>
           <a:gsLst>
@@ -8713,10 +9993,12 @@
           <a:path path="circle">
             <a:fillToRect l="50000" t="50000" r="50000" b="50000"/>
           </a:path>
-          <a:tileRect l="0" t="0" r="0" b="0"/>
+          <a:tileRect/>
         </a:gradFill>
       </a:bgFillStyleLst>
     </a:fmtScheme>
   </a:themeElements>
+  <a:objectDefaults/>
+  <a:extraClrSchemeLst/>
 </a:theme>
 </file>